--- a/presentation/ConvoScore-Presentation.pptx
+++ b/presentation/ConvoScore-Presentation.pptx
@@ -15,10 +15,6 @@
     <p:sldId id="263" r:id="rId15"/>
     <p:sldId id="264" r:id="rId16"/>
     <p:sldId id="265" r:id="rId17"/>
-    <p:sldId id="266" r:id="rId18"/>
-    <p:sldId id="267" r:id="rId19"/>
-    <p:sldId id="268" r:id="rId20"/>
-    <p:sldId id="269" r:id="rId21"/>
   </p:sldIdLst>
   <p:sldSz cx="12191695" cy="6858000" type="screen4x3"/>
   <p:notesSz cx="6858000" cy="9144000"/>
@@ -585,287 +581,7 @@
           <a:lstStyle/>
           <a:p>
             <a:r>
-              <a:t>If asked 'how is least privilege represented' - the honest two-part answer is on this slide: the IAM policies are written correctly and scoped tightly, but LocalStack doesn't actually enforce them, so what's being demonstrated here is the intended shape for real AWS, not a currently-enforced restriction.</a:t>
-            </a:r>
-          </a:p>
-        </p:txBody>
-      </p:sp>
-      <p:sp>
-        <p:nvSpPr>
-          <p:cNvPr id="4" name="Slide Number Placeholder 3"/>
-          <p:cNvSpPr>
-            <a:spLocks noGrp="1"/>
-          </p:cNvSpPr>
-          <p:nvPr>
-            <p:ph type="sldNum" idx="5" sz="quarter"/>
-          </p:nvPr>
-        </p:nvSpPr>
-        <p:spPr/>
-      </p:sp>
-    </p:spTree>
-  </p:cSld>
-  <p:clrMapOvr>
-    <a:masterClrMapping/>
-  </p:clrMapOvr>
-</p:notes>
-</file>
-
-<file path=ppt/notesSlides/notesSlide11.xml><?xml version="1.0" encoding="utf-8"?>
-<p:notes xmlns:a="http://schemas.openxmlformats.org/drawingml/2006/main" xmlns:p="http://schemas.openxmlformats.org/presentationml/2006/main" xmlns:r="http://schemas.openxmlformats.org/officeDocument/2006/relationships">
-  <p:cSld>
-    <p:spTree>
-      <p:nvGrpSpPr>
-        <p:cNvPr id="1" name=""/>
-        <p:cNvGrpSpPr/>
-        <p:nvPr/>
-      </p:nvGrpSpPr>
-      <p:grpSpPr>
-        <a:xfrm>
-          <a:off x="0" y="0"/>
-          <a:ext cx="0" cy="0"/>
-          <a:chOff x="0" y="0"/>
-          <a:chExt cx="0" cy="0"/>
-        </a:xfrm>
-      </p:grpSpPr>
-      <p:sp>
-        <p:nvSpPr>
-          <p:cNvPr id="2" name="Slide Image Placeholder 1"/>
-          <p:cNvSpPr>
-            <a:spLocks noGrp="1"/>
-          </p:cNvSpPr>
-          <p:nvPr>
-            <p:ph type="sldImg" idx="2"/>
-          </p:nvPr>
-        </p:nvSpPr>
-        <p:spPr/>
-      </p:sp>
-      <p:sp>
-        <p:nvSpPr>
-          <p:cNvPr id="3" name="Notes Placeholder 2"/>
-          <p:cNvSpPr>
-            <a:spLocks noGrp="1"/>
-          </p:cNvSpPr>
-          <p:nvPr>
-            <p:ph type="body" idx="3" sz="quarter"/>
-          </p:nvPr>
-        </p:nvSpPr>
-        <p:spPr/>
-        <p:txBody>
-          <a:bodyPr/>
-          <a:lstStyle/>
-          <a:p>
-            <a:r>
-              <a:t>On-call would watch: DLQ depth rising, the two staleness gauges (worker loop / DLQ collector), the API's 5xx rate, and the cost counter's rate of change as a runaway-spend signal. Both screenshots are from the live deployed system. Worth mentioning if asked: I found and fixed a real bug while preparing these screenshots - the health gauges are defined in a module shared by both the API and worker processes, so without a job label filter the API's own always-zero copy made both alerts fire permanently. Small, but it's exactly the kind of false-positive that trains an on-call engineer to ignore alerts.</a:t>
-            </a:r>
-          </a:p>
-        </p:txBody>
-      </p:sp>
-      <p:sp>
-        <p:nvSpPr>
-          <p:cNvPr id="4" name="Slide Number Placeholder 3"/>
-          <p:cNvSpPr>
-            <a:spLocks noGrp="1"/>
-          </p:cNvSpPr>
-          <p:nvPr>
-            <p:ph type="sldNum" idx="5" sz="quarter"/>
-          </p:nvPr>
-        </p:nvSpPr>
-        <p:spPr/>
-      </p:sp>
-    </p:spTree>
-  </p:cSld>
-  <p:clrMapOvr>
-    <a:masterClrMapping/>
-  </p:clrMapOvr>
-</p:notes>
-</file>
-
-<file path=ppt/notesSlides/notesSlide12.xml><?xml version="1.0" encoding="utf-8"?>
-<p:notes xmlns:a="http://schemas.openxmlformats.org/drawingml/2006/main" xmlns:p="http://schemas.openxmlformats.org/presentationml/2006/main" xmlns:r="http://schemas.openxmlformats.org/officeDocument/2006/relationships">
-  <p:cSld>
-    <p:spTree>
-      <p:nvGrpSpPr>
-        <p:cNvPr id="1" name=""/>
-        <p:cNvGrpSpPr/>
-        <p:nvPr/>
-      </p:nvGrpSpPr>
-      <p:grpSpPr>
-        <a:xfrm>
-          <a:off x="0" y="0"/>
-          <a:ext cx="0" cy="0"/>
-          <a:chOff x="0" y="0"/>
-          <a:chExt cx="0" cy="0"/>
-        </a:xfrm>
-      </p:grpSpPr>
-      <p:sp>
-        <p:nvSpPr>
-          <p:cNvPr id="2" name="Slide Image Placeholder 1"/>
-          <p:cNvSpPr>
-            <a:spLocks noGrp="1"/>
-          </p:cNvSpPr>
-          <p:nvPr>
-            <p:ph type="sldImg" idx="2"/>
-          </p:nvPr>
-        </p:nvSpPr>
-        <p:spPr/>
-      </p:sp>
-      <p:sp>
-        <p:nvSpPr>
-          <p:cNvPr id="3" name="Notes Placeholder 2"/>
-          <p:cNvSpPr>
-            <a:spLocks noGrp="1"/>
-          </p:cNvSpPr>
-          <p:nvPr>
-            <p:ph type="body" idx="3" sz="quarter"/>
-          </p:nvPr>
-        </p:nvSpPr>
-        <p:spPr/>
-        <p:txBody>
-          <a:bodyPr/>
-          <a:lstStyle/>
-          <a:p>
-            <a:r>
-              <a:t>Follow DEMO-RUNBOOK.md in order during the actual session - it has the exact commands, what should print at each step, how long each part takes, and what to show instead if a live command doesn't cooperate on the day.</a:t>
-            </a:r>
-          </a:p>
-        </p:txBody>
-      </p:sp>
-      <p:sp>
-        <p:nvSpPr>
-          <p:cNvPr id="4" name="Slide Number Placeholder 3"/>
-          <p:cNvSpPr>
-            <a:spLocks noGrp="1"/>
-          </p:cNvSpPr>
-          <p:nvPr>
-            <p:ph type="sldNum" idx="5" sz="quarter"/>
-          </p:nvPr>
-        </p:nvSpPr>
-        <p:spPr/>
-      </p:sp>
-    </p:spTree>
-  </p:cSld>
-  <p:clrMapOvr>
-    <a:masterClrMapping/>
-  </p:clrMapOvr>
-</p:notes>
-</file>
-
-<file path=ppt/notesSlides/notesSlide13.xml><?xml version="1.0" encoding="utf-8"?>
-<p:notes xmlns:a="http://schemas.openxmlformats.org/drawingml/2006/main" xmlns:p="http://schemas.openxmlformats.org/presentationml/2006/main" xmlns:r="http://schemas.openxmlformats.org/officeDocument/2006/relationships">
-  <p:cSld>
-    <p:spTree>
-      <p:nvGrpSpPr>
-        <p:cNvPr id="1" name=""/>
-        <p:cNvGrpSpPr/>
-        <p:nvPr/>
-      </p:nvGrpSpPr>
-      <p:grpSpPr>
-        <a:xfrm>
-          <a:off x="0" y="0"/>
-          <a:ext cx="0" cy="0"/>
-          <a:chOff x="0" y="0"/>
-          <a:chExt cx="0" cy="0"/>
-        </a:xfrm>
-      </p:grpSpPr>
-      <p:sp>
-        <p:nvSpPr>
-          <p:cNvPr id="2" name="Slide Image Placeholder 1"/>
-          <p:cNvSpPr>
-            <a:spLocks noGrp="1"/>
-          </p:cNvSpPr>
-          <p:nvPr>
-            <p:ph type="sldImg" idx="2"/>
-          </p:nvPr>
-        </p:nvSpPr>
-        <p:spPr/>
-      </p:sp>
-      <p:sp>
-        <p:nvSpPr>
-          <p:cNvPr id="3" name="Notes Placeholder 2"/>
-          <p:cNvSpPr>
-            <a:spLocks noGrp="1"/>
-          </p:cNvSpPr>
-          <p:nvPr>
-            <p:ph type="body" idx="3" sz="quarter"/>
-          </p:nvPr>
-        </p:nvSpPr>
-        <p:spPr/>
-        <p:txBody>
-          <a:bodyPr/>
-          <a:lstStyle/>
-          <a:p>
-            <a:r>
-              <a:t>This slide is deliberately unflattering. Every item here is something I found or decided, not something a reviewer would have to find themselves - I'd rather say it out loud than have it discovered.</a:t>
-            </a:r>
-          </a:p>
-        </p:txBody>
-      </p:sp>
-      <p:sp>
-        <p:nvSpPr>
-          <p:cNvPr id="4" name="Slide Number Placeholder 3"/>
-          <p:cNvSpPr>
-            <a:spLocks noGrp="1"/>
-          </p:cNvSpPr>
-          <p:nvPr>
-            <p:ph type="sldNum" idx="5" sz="quarter"/>
-          </p:nvPr>
-        </p:nvSpPr>
-        <p:spPr/>
-      </p:sp>
-    </p:spTree>
-  </p:cSld>
-  <p:clrMapOvr>
-    <a:masterClrMapping/>
-  </p:clrMapOvr>
-</p:notes>
-</file>
-
-<file path=ppt/notesSlides/notesSlide14.xml><?xml version="1.0" encoding="utf-8"?>
-<p:notes xmlns:a="http://schemas.openxmlformats.org/drawingml/2006/main" xmlns:p="http://schemas.openxmlformats.org/presentationml/2006/main" xmlns:r="http://schemas.openxmlformats.org/officeDocument/2006/relationships">
-  <p:cSld>
-    <p:spTree>
-      <p:nvGrpSpPr>
-        <p:cNvPr id="1" name=""/>
-        <p:cNvGrpSpPr/>
-        <p:nvPr/>
-      </p:nvGrpSpPr>
-      <p:grpSpPr>
-        <a:xfrm>
-          <a:off x="0" y="0"/>
-          <a:ext cx="0" cy="0"/>
-          <a:chOff x="0" y="0"/>
-          <a:chExt cx="0" cy="0"/>
-        </a:xfrm>
-      </p:grpSpPr>
-      <p:sp>
-        <p:nvSpPr>
-          <p:cNvPr id="2" name="Slide Image Placeholder 1"/>
-          <p:cNvSpPr>
-            <a:spLocks noGrp="1"/>
-          </p:cNvSpPr>
-          <p:nvPr>
-            <p:ph type="sldImg" idx="2"/>
-          </p:nvPr>
-        </p:nvSpPr>
-        <p:spPr/>
-      </p:sp>
-      <p:sp>
-        <p:nvSpPr>
-          <p:cNvPr id="3" name="Notes Placeholder 2"/>
-          <p:cNvSpPr>
-            <a:spLocks noGrp="1"/>
-          </p:cNvSpPr>
-          <p:nvPr>
-            <p:ph type="body" idx="3" sz="quarter"/>
-          </p:nvPr>
-        </p:nvSpPr>
-        <p:spPr/>
-        <p:txBody>
-          <a:bodyPr/>
-          <a:lstStyle/>
-          <a:p>
-            <a:r>
-              <a:t>Frame this as 'what I'd do next with more time and a real budget,' not 'what's missing from this submission' - the take-home was deliberately scoped smaller than this list on purpose.</a:t>
+              <a:t>This slide is deliberately unflattering on the left and forward-looking on the right. Every item on the left is something I found or decided, not something a reviewer would have to find themselves. On the right: frame it as 'what I'd do next with more time and a real budget,' not 'what's missing from this submission' - the take-home was deliberately scoped smaller than this list on purpose. Note the duplicate-call window is narrowed by an idempotency key, not solved outright - a transactional outbox pattern doesn't apply here since the non-atomic boundary is an external OpenAI call, not two local writes. Other production gaps worth naming if asked: Prometheus/Grafana storage is emptyDir today (no history across restarts), Grafana uses anonymous viewer access, and cost figures are estimates from a hardcoded pricing table - all explicit, documented tradeoffs for a local take-home, not oversights.</a:t>
             </a:r>
           </a:p>
         </p:txBody>
@@ -935,7 +651,7 @@
           <a:lstStyle/>
           <a:p>
             <a:r>
-              <a:t>This slide exists so the reviewer sees I read the brief as a set of constraints, not just a feature list - especially the two 'don't oversell it' rules about SQS and LLM-call atomicity, which shape a lot of the design choices on later slides.</a:t>
+              <a:t>This slide exists so the reviewer sees I read the brief as a set of constraints, not just a feature list. Additional scope notes if asked: kept deliberately right-sized — no CI, no service mesh, no ORM, no new database. The two constraints on the right (SQS at-least-once, LLM-call/DB-commit non-atomicity) shape almost every design choice in the rest of the deck.</a:t>
             </a:r>
           </a:p>
         </p:txBody>
@@ -1005,7 +721,7 @@
           <a:lstStyle/>
           <a:p>
             <a:r>
-              <a:t>The point of this diagram is 'one pipeline, two doors in.' Whether a conversation arrives via the API or lands in S3 directly, it converges on the exact same S3 -&gt; SQS -&gt; worker code path - there's no special-casing based on how it arrived. That's what makes the whole thing testable with one set of behaviors instead of two.</a:t>
+              <a:t>The point of this diagram is 'one pipeline, two doors in.' Whether a conversation arrives via the API or lands in S3 directly, it converges on the exact same S3 -&gt; SQS -&gt; worker code path - there's no special-casing based on how it arrived. The amber line is the one part that's NOT on that shared path: the API writes the 'pending' row straight to Postgres, synchronously, before it ever touches S3, so the id exists immediately and the caller gets a stable status URL right away.</a:t>
             </a:r>
           </a:p>
         </p:txBody>
@@ -1075,7 +791,13 @@
           <a:lstStyle/>
           <a:p>
             <a:r>
-              <a:t>The subtle part is the last bullet. The original naive version deleted the pending row on any S3 exception, assuming the exception proved nothing was written - but a timeout can mean S3 actually accepted the object and the client just never saw the response. Deleting the row in that case would erase a conversation the worker is about to legitimately process. So we check before deciding, and we never silently destroy evidence when the true outcome is unknown.</a:t>
+              <a:t>API path detail: the request body is validated through the same Pydantic model the worker also uses (rejects missing/empty/whitespace-only/non-string/over-20,000 character text). If the S3 write's outcome is genuinely unknown (e.g. a timeout), the row stays visible and pending rather than being silently deleted - deleting on an ambiguous failure could erase a conversation S3 actually accepted.</a:t>
+            </a:r>
+          </a:p>
+          <a:p/>
+          <a:p>
+            <a:r>
+              <a:t>Direct-upload detail: source_key (the S3 key) is the idempotency anchor, since a direct upload never gets an id from the API. A UNIQUE constraint on source_key means the same key uploaded twice finds the existing row instead of duplicating it.</a:t>
             </a:r>
           </a:p>
         </p:txBody>
@@ -1145,7 +867,7 @@
           <a:lstStyle/>
           <a:p>
             <a:r>
-              <a:t>This is the 'triggers scoring' answer for this path: an S3 ObjectCreated event under the incoming/ prefix is the trigger, full stop - nothing polls a folder, nothing depends on the API being up. That's also why source_key (the S3 object key) had to become the idempotency anchor rather than a request-generated id - a direct upload never gets one of those from the API.</a:t>
+              <a:t>Trigger is SQS visibility, full stop - the worker is a simple poll loop, nothing depends on the API being up. Idempotency: source_key is UNIQUE. Claim fencing (the load-bearing safety net): every claim gets a fresh processing_token, so a superseded/slower attempt is rejected at the database level rather than silently overwriting a newer, correct result - without it, 'whoever writes last wins' could clobber a good row with a stale one. Honest remaining gap: a crash between 'OpenAI answered' and 'the guarded commit landed' can still cause one extra paid OpenAI call - SQS is at-least-once and an LLM call can't be made atomic with a DB commit.</a:t>
             </a:r>
           </a:p>
         </p:txBody>
@@ -1215,7 +937,7 @@
           <a:lstStyle/>
           <a:p>
             <a:r>
-              <a:t>Claim fencing is the one piece of this system I'd call genuinely load-bearing: without a per-claim token, an old worker attempt that's just running slow could come back after a newer attempt already reclaimed and finished the same row, and silently overwrite a correct result with a stale one. The fencing turns that into 'the database rejects the stale write' instead of 'whoever writes last wins.'</a:t>
+              <a:t>Every result also captures model name, prompt version, input/output token counts, and an estimated cost in USD from a hardcoded per-model price table (an estimate, not a billing feed). Retries use one mechanism (tenacity with exponential backoff) - the SDK's own built-in retries are explicitly disabled so there's exactly one retry policy to reason about, not two stacked on each other. The API-can't-leak-the-key point is a fact about the deployment, not just a policy: the key is never injected into that pod's environment at all.</a:t>
             </a:r>
           </a:p>
         </p:txBody>
@@ -1285,7 +1007,7 @@
           <a:lstStyle/>
           <a:p>
             <a:r>
-              <a:t>Two things worth calling out if asked: first, the API genuinely has no code path that can leak the OpenAI key, because it's never injected into that pod's environment at all - not a policy, a fact about the deployment. Second, the refusal-message exclusion was a real finding, not a hypothetical - a refusal's own explanation text can contain fragments of what was flagged.</a:t>
+              <a:t>The screenshot is a real conversation from the deployed system, not a mock. Durability is demonstrated, not just claimed: the restart demo captures a completed row's full result before deleting the API, worker, and Postgres pods, then proves the row is byte-for-byte identical afterward, including completed_at - a re-scored duplicate would also say 'completed' but with a different timestamp, so that field is the real proof, not just the status.</a:t>
             </a:r>
           </a:p>
         </p:txBody>
@@ -1355,7 +1077,7 @@
           <a:lstStyle/>
           <a:p>
             <a:r>
-              <a:t>The screenshot on the right is a real conversation from the deployed system, not a mock. Point out that 'durability is demonstrated' - the restart demo is the actual proof, and it specifically checks completed_at hasn't changed, because a re-scored duplicate would also show 'completed' but with a different timestamp.</a:t>
+              <a:t>On-call would watch: DLQ depth rising, two 'last progress' staleness gauges on the worker loop and DLQ collector (a bare TCP liveness check only proves the process is alive, not that it's doing anything - these catch a wedged loop that liveness alone would miss), the API's 5xx rate, and the cost counter's rate of change as a runaway-spend signal. Both screenshots are from the live deployed system. Worth mentioning if asked: found and fixed a real bug preparing these - the health gauges are defined in a module shared by both API and worker processes, so without a job-label filter the API's own always-zero copy made both alerts fire permanently. Exactly the kind of false positive that trains on-call to ignore alerts.</a:t>
             </a:r>
           </a:p>
         </p:txBody>
@@ -1425,7 +1147,7 @@
           <a:lstStyle/>
           <a:p>
             <a:r>
-              <a:t>The dirty-tree check is a small thing that closes a real gap: without it, you could build, deploy, make one more uncommitted edit, and rebuild - now the exact same SHA-tagged image name refers to two different sets of code, and nobody can tell which one is actually running from the tag alone.</a:t>
+              <a:t>Docker: multi-stage build - a builder stage installs dependencies into a venv, the runtime stage copies only that venv plus app/, no git metadata/tests/Terraform state. Deploy safety: deploy.sh tags images with the current git SHA and refuses to build at all if any tracked source/Docker/Helm/Terraform file has uncommitted changes, so one tag can never silently point at two different images. Least privilege specifics: the API can only PutObject under incoming/*; the worker can GetObject there and Receive/Delete/GetAttributes only on the processing queue plus GetUrl/GetAttributes on the DLQ - never a wildcard resource. Honest caveat: LocalStack Community doesn't enforce IAM at the API-call level, so these policies show the intended real-AWS shape, not a currently-enforced restriction.</a:t>
             </a:r>
           </a:p>
         </p:txBody>
@@ -4427,7 +4149,7 @@
     <p:bg>
       <p:bgPr>
         <a:solidFill>
-          <a:srgbClr val="162A3E"/>
+          <a:srgbClr val="14253A"/>
         </a:solidFill>
         <a:effectLst/>
       </p:bgPr>
@@ -4441,102 +4163,25 @@
       <p:grpSpPr/>
       <p:sp>
         <p:nvSpPr>
-          <p:cNvPr id="2" name="TextBox 1"/>
-          <p:cNvSpPr txBox="1"/>
-          <p:nvPr/>
-        </p:nvSpPr>
-        <p:spPr>
-          <a:xfrm>
-            <a:off x="822960" y="2331720"/>
-            <a:ext cx="10515600" cy="1188720"/>
+          <p:cNvPr id="2" name="Rectangle 1"/>
+          <p:cNvSpPr/>
+          <p:nvPr/>
+        </p:nvSpPr>
+        <p:spPr>
+          <a:xfrm>
+            <a:off x="0" y="0"/>
+            <a:ext cx="12191695" cy="6858000"/>
           </a:xfrm>
           <a:prstGeom prst="rect">
             <a:avLst/>
           </a:prstGeom>
-          <a:noFill/>
-        </p:spPr>
-        <p:txBody>
-          <a:bodyPr wrap="none">
-            <a:spAutoFit/>
-          </a:bodyPr>
-          <a:lstStyle/>
-          <a:p>
-            <a:pPr>
-              <a:defRPr sz="5400" b="1">
-                <a:solidFill>
-                  <a:srgbClr val="FFFFFF"/>
-                </a:solidFill>
-                <a:latin typeface="Calibri"/>
-              </a:defRPr>
-            </a:pPr>
-            <a:r>
-              <a:rPr>
-                <a:latin typeface="Calibri"/>
-              </a:rPr>
-              <a:t>ConvoScore</a:t>
-            </a:r>
-          </a:p>
-        </p:txBody>
-      </p:sp>
-      <p:sp>
-        <p:nvSpPr>
-          <p:cNvPr id="3" name="TextBox 2"/>
-          <p:cNvSpPr txBox="1"/>
-          <p:nvPr/>
-        </p:nvSpPr>
-        <p:spPr>
-          <a:xfrm>
-            <a:off x="868680" y="3246120"/>
-            <a:ext cx="10058400" cy="914400"/>
-          </a:xfrm>
-          <a:prstGeom prst="rect">
-            <a:avLst/>
-          </a:prstGeom>
-          <a:noFill/>
-        </p:spPr>
-        <p:txBody>
-          <a:bodyPr wrap="none">
-            <a:spAutoFit/>
-          </a:bodyPr>
-          <a:lstStyle/>
-          <a:p>
-            <a:pPr>
-              <a:defRPr sz="2000">
-                <a:solidFill>
-                  <a:srgbClr val="B9C7D3"/>
-                </a:solidFill>
-                <a:latin typeface="Calibri"/>
-              </a:defRPr>
-            </a:pPr>
-            <a:r>
-              <a:rPr>
-                <a:latin typeface="Calibri"/>
-              </a:rPr>
-              <a:t>Turning raw support conversations into a scored, reviewable, on-call-ready pipeline.</a:t>
-            </a:r>
-          </a:p>
-        </p:txBody>
-      </p:sp>
-      <p:sp>
-        <p:nvSpPr>
-          <p:cNvPr id="4" name="Rectangle 3"/>
-          <p:cNvSpPr/>
-          <p:nvPr/>
-        </p:nvSpPr>
-        <p:spPr>
-          <a:xfrm>
-            <a:off x="548640" y="2148840"/>
-            <a:ext cx="50800" cy="868680"/>
-          </a:xfrm>
-          <a:prstGeom prst="rect">
-            <a:avLst/>
-          </a:prstGeom>
           <a:solidFill>
-            <a:srgbClr val="1F8A8A"/>
+            <a:srgbClr val="14253A"/>
           </a:solidFill>
           <a:ln>
             <a:noFill/>
           </a:ln>
+          <a:effectLst/>
         </p:spPr>
         <p:style>
           <a:lnRef idx="1">
@@ -4562,14 +4207,58 @@
       </p:sp>
       <p:sp>
         <p:nvSpPr>
-          <p:cNvPr id="5" name="TextBox 4"/>
+          <p:cNvPr id="3" name="Rectangle 2"/>
+          <p:cNvSpPr/>
+          <p:nvPr/>
+        </p:nvSpPr>
+        <p:spPr>
+          <a:xfrm>
+            <a:off x="0" y="0"/>
+            <a:ext cx="76200" cy="6858000"/>
+          </a:xfrm>
+          <a:prstGeom prst="rect">
+            <a:avLst/>
+          </a:prstGeom>
+          <a:solidFill>
+            <a:srgbClr val="168A86"/>
+          </a:solidFill>
+          <a:ln>
+            <a:noFill/>
+          </a:ln>
+          <a:effectLst/>
+        </p:spPr>
+        <p:style>
+          <a:lnRef idx="1">
+            <a:schemeClr val="accent1"/>
+          </a:lnRef>
+          <a:fillRef idx="3">
+            <a:schemeClr val="accent1"/>
+          </a:fillRef>
+          <a:effectRef idx="2">
+            <a:schemeClr val="accent1"/>
+          </a:effectRef>
+          <a:fontRef idx="minor">
+            <a:schemeClr val="lt1"/>
+          </a:fontRef>
+        </p:style>
+        <p:txBody>
+          <a:bodyPr rtlCol="0" anchor="ctr"/>
+          <a:lstStyle/>
+          <a:p>
+            <a:pPr algn="ctr"/>
+          </a:p>
+        </p:txBody>
+      </p:sp>
+      <p:sp>
+        <p:nvSpPr>
+          <p:cNvPr id="4" name="TextBox 3"/>
           <p:cNvSpPr txBox="1"/>
           <p:nvPr/>
         </p:nvSpPr>
         <p:spPr>
           <a:xfrm>
-            <a:off x="868680" y="6035040"/>
-            <a:ext cx="9144000" cy="457200"/>
+            <a:off x="914400" y="1965960"/>
+            <a:ext cx="9601200" cy="320040"/>
           </a:xfrm>
           <a:prstGeom prst="rect">
             <a:avLst/>
@@ -4582,19 +4271,125 @@
           </a:bodyPr>
           <a:lstStyle/>
           <a:p>
-            <a:pPr>
-              <a:defRPr sz="1300">
-                <a:solidFill>
-                  <a:srgbClr val="8A9AA8"/>
-                </a:solidFill>
-                <a:latin typeface="Calibri"/>
-              </a:defRPr>
-            </a:pPr>
-            <a:r>
-              <a:rPr>
-                <a:latin typeface="Calibri"/>
-              </a:rPr>
-              <a:t>Amir Weiser  ·  Solution Engineer / DevOps take-home</a:t>
+            <a:r>
+              <a:rPr sz="1300" b="1" i="0" spc="200">
+                <a:solidFill>
+                  <a:srgbClr val="6FC7C2"/>
+                </a:solidFill>
+                <a:latin typeface="Segoe UI"/>
+              </a:rPr>
+              <a:t>SOLUTION ENGINEERING / DEVOPS TAKE-HOME</a:t>
+            </a:r>
+          </a:p>
+        </p:txBody>
+      </p:sp>
+      <p:sp>
+        <p:nvSpPr>
+          <p:cNvPr id="5" name="TextBox 4"/>
+          <p:cNvSpPr txBox="1"/>
+          <p:nvPr/>
+        </p:nvSpPr>
+        <p:spPr>
+          <a:xfrm>
+            <a:off x="877824" y="2331720"/>
+            <a:ext cx="10058400" cy="1188720"/>
+          </a:xfrm>
+          <a:prstGeom prst="rect">
+            <a:avLst/>
+          </a:prstGeom>
+          <a:noFill/>
+        </p:spPr>
+        <p:txBody>
+          <a:bodyPr wrap="none">
+            <a:spAutoFit/>
+          </a:bodyPr>
+          <a:lstStyle/>
+          <a:p>
+            <a:r>
+              <a:rPr sz="5600" b="1" i="0">
+                <a:solidFill>
+                  <a:srgbClr val="FFFFFF"/>
+                </a:solidFill>
+                <a:latin typeface="Segoe UI"/>
+              </a:rPr>
+              <a:t>ConvoScore</a:t>
+            </a:r>
+          </a:p>
+        </p:txBody>
+      </p:sp>
+      <p:sp>
+        <p:nvSpPr>
+          <p:cNvPr id="6" name="TextBox 5"/>
+          <p:cNvSpPr txBox="1"/>
+          <p:nvPr/>
+        </p:nvSpPr>
+        <p:spPr>
+          <a:xfrm>
+            <a:off x="914400" y="3337560"/>
+            <a:ext cx="9418320" cy="822960"/>
+          </a:xfrm>
+          <a:prstGeom prst="rect">
+            <a:avLst/>
+          </a:prstGeom>
+          <a:noFill/>
+        </p:spPr>
+        <p:txBody>
+          <a:bodyPr wrap="square">
+            <a:spAutoFit/>
+          </a:bodyPr>
+          <a:lstStyle/>
+          <a:p>
+            <a:r>
+              <a:rPr sz="1900" b="0" i="0">
+                <a:solidFill>
+                  <a:srgbClr val="C3CFD9"/>
+                </a:solidFill>
+                <a:latin typeface="Segoe UI"/>
+              </a:rPr>
+              <a:t>Turning raw support conversations into a scored, reviewable, on-call-ready pipeline.</a:t>
+            </a:r>
+          </a:p>
+        </p:txBody>
+      </p:sp>
+      <p:sp>
+        <p:nvSpPr>
+          <p:cNvPr id="7" name="TextBox 6"/>
+          <p:cNvSpPr txBox="1"/>
+          <p:nvPr/>
+        </p:nvSpPr>
+        <p:spPr>
+          <a:xfrm>
+            <a:off x="914400" y="5989320"/>
+            <a:ext cx="9144000" cy="365760"/>
+          </a:xfrm>
+          <a:prstGeom prst="rect">
+            <a:avLst/>
+          </a:prstGeom>
+          <a:noFill/>
+        </p:spPr>
+        <p:txBody>
+          <a:bodyPr wrap="none">
+            <a:spAutoFit/>
+          </a:bodyPr>
+          <a:lstStyle/>
+          <a:p>
+            <a:r>
+              <a:rPr sz="1300" b="1" i="0">
+                <a:solidFill>
+                  <a:srgbClr val="9BABB8"/>
+                </a:solidFill>
+                <a:latin typeface="Segoe UI"/>
+              </a:rPr>
+              <a:t>Amir Weiser</a:t>
+            </a:r>
+            <a:r>
+              <a:rPr sz="1300" b="0" i="0">
+                <a:solidFill>
+                  <a:srgbClr val="6E808F"/>
+                </a:solidFill>
+                <a:latin typeface="Segoe UI"/>
+              </a:rPr>
+              <a:t>   ·   Architecture, ingestion, scoring, deployment, and operations</a:t>
             </a:r>
           </a:p>
         </p:txBody>
@@ -4613,7 +4408,7 @@
     <p:bg>
       <p:bgPr>
         <a:solidFill>
-          <a:srgbClr val="F6F7F9"/>
+          <a:srgbClr val="F7F8FA"/>
         </a:solidFill>
         <a:effectLst/>
       </p:bgPr>
@@ -4633,8 +4428,8 @@
         </p:nvSpPr>
         <p:spPr>
           <a:xfrm>
-            <a:off x="548640" y="320040"/>
-            <a:ext cx="11064240" cy="365760"/>
+            <a:off x="640080" y="384048"/>
+            <a:ext cx="9601200" cy="292608"/>
           </a:xfrm>
           <a:prstGeom prst="rect">
             <a:avLst/>
@@ -4647,19 +4442,14 @@
           </a:bodyPr>
           <a:lstStyle/>
           <a:p>
-            <a:pPr>
-              <a:defRPr sz="1300" b="1">
-                <a:solidFill>
-                  <a:srgbClr val="1F8A8A"/>
-                </a:solidFill>
-                <a:latin typeface="Calibri"/>
-              </a:defRPr>
-            </a:pPr>
-            <a:r>
-              <a:rPr>
-                <a:latin typeface="Calibri"/>
-              </a:rPr>
-              <a:t>INFRASTRUCTURE AS CODE</a:t>
+            <a:r>
+              <a:rPr sz="1250" b="1" i="0" spc="160">
+                <a:solidFill>
+                  <a:srgbClr val="168A86"/>
+                </a:solidFill>
+                <a:latin typeface="Segoe UI"/>
+              </a:rPr>
+              <a:t>HONEST TRADEOFFS</a:t>
             </a:r>
           </a:p>
         </p:txBody>
@@ -4672,8 +4462,8 @@
         </p:nvSpPr>
         <p:spPr>
           <a:xfrm>
-            <a:off x="502920" y="621792"/>
-            <a:ext cx="11155680" cy="822960"/>
+            <a:off x="612647" y="658368"/>
+            <a:ext cx="10607040" cy="640080"/>
           </a:xfrm>
           <a:prstGeom prst="rect">
             <a:avLst/>
@@ -4686,19 +4476,14 @@
           </a:bodyPr>
           <a:lstStyle/>
           <a:p>
-            <a:pPr>
-              <a:defRPr sz="3000" b="1">
-                <a:solidFill>
-                  <a:srgbClr val="162A3E"/>
-                </a:solidFill>
-                <a:latin typeface="Calibri"/>
-              </a:defRPr>
-            </a:pPr>
-            <a:r>
-              <a:rPr>
-                <a:latin typeface="Calibri"/>
-              </a:rPr>
-              <a:t>Terraform, notifications, and least privilege</a:t>
+            <a:r>
+              <a:rPr sz="2700" b="1" i="0">
+                <a:solidFill>
+                  <a:srgbClr val="14253A"/>
+                </a:solidFill>
+                <a:latin typeface="Segoe UI"/>
+              </a:rPr>
+              <a:t>What this skips, and what changes in production</a:t>
             </a:r>
           </a:p>
         </p:txBody>
@@ -4711,18 +4496,19 @@
         </p:nvSpPr>
         <p:spPr>
           <a:xfrm>
-            <a:off x="548640" y="1371600"/>
-            <a:ext cx="1828800" cy="38100"/>
+            <a:off x="640080" y="1353312"/>
+            <a:ext cx="1051560" cy="38100"/>
           </a:xfrm>
           <a:prstGeom prst="rect">
             <a:avLst/>
           </a:prstGeom>
           <a:solidFill>
-            <a:srgbClr val="1F8A8A"/>
+            <a:srgbClr val="168A86"/>
           </a:solidFill>
           <a:ln>
             <a:noFill/>
           </a:ln>
+          <a:effectLst/>
         </p:spPr>
         <p:style>
           <a:lnRef idx="1">
@@ -4748,285 +4534,29 @@
       </p:sp>
       <p:sp>
         <p:nvSpPr>
-          <p:cNvPr id="5" name="TextBox 4"/>
-          <p:cNvSpPr txBox="1"/>
-          <p:nvPr/>
-        </p:nvSpPr>
-        <p:spPr>
-          <a:xfrm>
-            <a:off x="548640" y="1645920"/>
-            <a:ext cx="6400800" cy="4754880"/>
-          </a:xfrm>
-          <a:prstGeom prst="rect">
-            <a:avLst/>
-          </a:prstGeom>
-          <a:noFill/>
-        </p:spPr>
-        <p:txBody>
-          <a:bodyPr wrap="square">
-            <a:spAutoFit/>
-          </a:bodyPr>
-          <a:lstStyle/>
-          <a:p>
-            <a:pPr>
-              <a:spcAft>
-                <a:spcPts val="1000"/>
-              </a:spcAft>
-              <a:defRPr sz="1550">
-                <a:solidFill>
-                  <a:srgbClr val="202428"/>
-                </a:solidFill>
-                <a:latin typeface="Calibri"/>
-              </a:defRPr>
-            </a:pPr>
-            <a:r>
-              <a:rPr>
-                <a:latin typeface="Calibri"/>
-              </a:rPr>
-              <a:t>•  Terraform (against LocalStack, standing in for AWS) provisions everything the pipeline needs: the S3 bucket, the processing queue, its dead-letter queue, and the redrive policy linking them</a:t>
-            </a:r>
-          </a:p>
-          <a:p>
-            <a:pPr>
-              <a:spcAft>
-                <a:spcPts val="1000"/>
-              </a:spcAft>
-              <a:defRPr sz="1550">
-                <a:solidFill>
-                  <a:srgbClr val="202428"/>
-                </a:solidFill>
-                <a:latin typeface="Calibri"/>
-              </a:defRPr>
-            </a:pPr>
-            <a:r>
-              <a:rPr>
-                <a:latin typeface="Calibri"/>
-              </a:rPr>
-              <a:t>•  An S3 bucket notification wires ObjectCreated events under incoming/ straight to the SQS queue - this is what makes the direct-upload path work with zero polling</a:t>
-            </a:r>
-          </a:p>
-          <a:p>
-            <a:pPr>
-              <a:spcAft>
-                <a:spcPts val="1000"/>
-              </a:spcAft>
-              <a:defRPr sz="1550">
-                <a:solidFill>
-                  <a:srgbClr val="202428"/>
-                </a:solidFill>
-                <a:latin typeface="Calibri"/>
-              </a:defRPr>
-            </a:pPr>
-            <a:r>
-              <a:rPr>
-                <a:latin typeface="Calibri"/>
-              </a:rPr>
-              <a:t>•  IAM policies describe the intended least-privilege shape per component: the API can only PutObject under incoming/*; the worker can GetObject there, and can Receive/Delete/GetAttributes only on the processing queue plus GetUrl/GetAttributes only on the DLQ - never a wildcard resource</a:t>
-            </a:r>
-          </a:p>
-          <a:p>
-            <a:pPr>
-              <a:spcAft>
-                <a:spcPts val="1000"/>
-              </a:spcAft>
-              <a:defRPr sz="1550">
-                <a:solidFill>
-                  <a:srgbClr val="202428"/>
-                </a:solidFill>
-                <a:latin typeface="Calibri"/>
-              </a:defRPr>
-            </a:pPr>
-            <a:r>
-              <a:rPr>
-                <a:latin typeface="Calibri"/>
-              </a:rPr>
-              <a:t>•  Honest caveat: LocalStack Community does not enforce IAM at the API-call level - these policies show the real-AWS shape, they don't actually restrict anything in this environment</a:t>
-            </a:r>
-          </a:p>
-          <a:p>
-            <a:pPr>
-              <a:spcAft>
-                <a:spcPts val="1000"/>
-              </a:spcAft>
-              <a:defRPr sz="1550">
-                <a:solidFill>
-                  <a:srgbClr val="202428"/>
-                </a:solidFill>
-                <a:latin typeface="Calibri"/>
-              </a:defRPr>
-            </a:pPr>
-            <a:r>
-              <a:rPr>
-                <a:latin typeface="Calibri"/>
-              </a:rPr>
-              <a:t>•  Kubernetes Secrets are created out-of-band by a small script, referenced by name from the Helm chart, and never templated into it or committed to Git</a:t>
-            </a:r>
-          </a:p>
-        </p:txBody>
-      </p:sp>
-      <p:sp>
-        <p:nvSpPr>
-          <p:cNvPr id="6" name="TextBox 5"/>
-          <p:cNvSpPr txBox="1"/>
-          <p:nvPr/>
-        </p:nvSpPr>
-        <p:spPr>
-          <a:xfrm>
-            <a:off x="548640" y="6492240"/>
-            <a:ext cx="9144000" cy="274320"/>
-          </a:xfrm>
-          <a:prstGeom prst="rect">
-            <a:avLst/>
-          </a:prstGeom>
-          <a:noFill/>
-        </p:spPr>
-        <p:txBody>
-          <a:bodyPr wrap="none">
-            <a:spAutoFit/>
-          </a:bodyPr>
-          <a:lstStyle/>
-          <a:p>
-            <a:pPr>
-              <a:defRPr sz="1000">
-                <a:solidFill>
-                  <a:srgbClr val="636E77"/>
-                </a:solidFill>
-                <a:latin typeface="Calibri"/>
-              </a:defRPr>
-            </a:pPr>
-            <a:r>
-              <a:rPr>
-                <a:latin typeface="Calibri"/>
-              </a:rPr>
-              <a:t>ConvoScore  ·  Terraform and security</a:t>
-            </a:r>
-          </a:p>
-        </p:txBody>
-      </p:sp>
-    </p:spTree>
-  </p:cSld>
-  <p:clrMapOvr>
-    <a:masterClrMapping/>
-  </p:clrMapOvr>
-</p:sld>
-</file>
-
-<file path=ppt/slides/slide11.xml><?xml version="1.0" encoding="utf-8"?>
-<p:sld xmlns:a="http://schemas.openxmlformats.org/drawingml/2006/main" xmlns:p="http://schemas.openxmlformats.org/presentationml/2006/main" xmlns:r="http://schemas.openxmlformats.org/officeDocument/2006/relationships">
-  <p:cSld>
-    <p:bg>
-      <p:bgPr>
-        <a:solidFill>
-          <a:srgbClr val="F6F7F9"/>
-        </a:solidFill>
-        <a:effectLst/>
-      </p:bgPr>
-    </p:bg>
-    <p:spTree>
-      <p:nvGrpSpPr>
-        <p:cNvPr id="1" name=""/>
-        <p:cNvGrpSpPr/>
-        <p:nvPr/>
-      </p:nvGrpSpPr>
-      <p:grpSpPr/>
-      <p:sp>
-        <p:nvSpPr>
-          <p:cNvPr id="2" name="TextBox 1"/>
-          <p:cNvSpPr txBox="1"/>
-          <p:nvPr/>
-        </p:nvSpPr>
-        <p:spPr>
-          <a:xfrm>
-            <a:off x="548640" y="320040"/>
-            <a:ext cx="11064240" cy="365760"/>
-          </a:xfrm>
-          <a:prstGeom prst="rect">
-            <a:avLst/>
-          </a:prstGeom>
-          <a:noFill/>
-        </p:spPr>
-        <p:txBody>
-          <a:bodyPr wrap="none">
-            <a:spAutoFit/>
-          </a:bodyPr>
-          <a:lstStyle/>
-          <a:p>
-            <a:pPr>
-              <a:defRPr sz="1300" b="1">
-                <a:solidFill>
-                  <a:srgbClr val="1F8A8A"/>
-                </a:solidFill>
-                <a:latin typeface="Calibri"/>
-              </a:defRPr>
-            </a:pPr>
-            <a:r>
-              <a:rPr>
-                <a:latin typeface="Calibri"/>
-              </a:rPr>
-              <a:t>OBSERVABILITY</a:t>
-            </a:r>
-          </a:p>
-        </p:txBody>
-      </p:sp>
-      <p:sp>
-        <p:nvSpPr>
-          <p:cNvPr id="3" name="TextBox 2"/>
-          <p:cNvSpPr txBox="1"/>
-          <p:nvPr/>
-        </p:nvSpPr>
-        <p:spPr>
-          <a:xfrm>
-            <a:off x="502920" y="621792"/>
-            <a:ext cx="11155680" cy="822960"/>
-          </a:xfrm>
-          <a:prstGeom prst="rect">
-            <a:avLst/>
-          </a:prstGeom>
-          <a:noFill/>
-        </p:spPr>
-        <p:txBody>
-          <a:bodyPr wrap="square">
-            <a:spAutoFit/>
-          </a:bodyPr>
-          <a:lstStyle/>
-          <a:p>
-            <a:pPr>
-              <a:defRPr sz="3000" b="1">
-                <a:solidFill>
-                  <a:srgbClr val="162A3E"/>
-                </a:solidFill>
-                <a:latin typeface="Calibri"/>
-              </a:defRPr>
-            </a:pPr>
-            <a:r>
-              <a:rPr>
-                <a:latin typeface="Calibri"/>
-              </a:rPr>
-              <a:t>Logs, metrics, dashboard, and what's on watch</a:t>
-            </a:r>
-          </a:p>
-        </p:txBody>
-      </p:sp>
-      <p:sp>
-        <p:nvSpPr>
-          <p:cNvPr id="4" name="Rectangle 3"/>
+          <p:cNvPr id="5" name="Rounded Rectangle 4"/>
           <p:cNvSpPr/>
           <p:nvPr/>
         </p:nvSpPr>
         <p:spPr>
           <a:xfrm>
-            <a:off x="548640" y="1371600"/>
-            <a:ext cx="1828800" cy="38100"/>
-          </a:xfrm>
-          <a:prstGeom prst="rect">
-            <a:avLst/>
+            <a:off x="640080" y="1737360"/>
+            <a:ext cx="5074920" cy="4206240"/>
+          </a:xfrm>
+          <a:prstGeom prst="roundRect">
+            <a:avLst>
+              <a:gd name="adj" fmla="val 3500"/>
+            </a:avLst>
           </a:prstGeom>
           <a:solidFill>
-            <a:srgbClr val="1F8A8A"/>
+            <a:srgbClr val="FFFFFF"/>
           </a:solidFill>
-          <a:ln>
-            <a:noFill/>
+          <a:ln w="9525">
+            <a:solidFill>
+              <a:srgbClr val="E1E5EA"/>
+            </a:solidFill>
           </a:ln>
+          <a:effectLst/>
         </p:spPr>
         <p:style>
           <a:lnRef idx="1">
@@ -5052,305 +4582,25 @@
       </p:sp>
       <p:sp>
         <p:nvSpPr>
-          <p:cNvPr id="5" name="TextBox 4"/>
-          <p:cNvSpPr txBox="1"/>
-          <p:nvPr/>
-        </p:nvSpPr>
-        <p:spPr>
-          <a:xfrm>
-            <a:off x="548640" y="1645920"/>
-            <a:ext cx="6035040" cy="4754880"/>
+          <p:cNvPr id="6" name="Rectangle 5"/>
+          <p:cNvSpPr/>
+          <p:nvPr/>
+        </p:nvSpPr>
+        <p:spPr>
+          <a:xfrm>
+            <a:off x="786384" y="1737360"/>
+            <a:ext cx="4782312" cy="40640"/>
           </a:xfrm>
           <a:prstGeom prst="rect">
             <a:avLst/>
           </a:prstGeom>
-          <a:noFill/>
-        </p:spPr>
-        <p:txBody>
-          <a:bodyPr wrap="square">
-            <a:spAutoFit/>
-          </a:bodyPr>
-          <a:lstStyle/>
-          <a:p>
-            <a:pPr>
-              <a:spcAft>
-                <a:spcPts val="1000"/>
-              </a:spcAft>
-              <a:defRPr sz="1600">
-                <a:solidFill>
-                  <a:srgbClr val="202428"/>
-                </a:solidFill>
-                <a:latin typeface="Calibri"/>
-              </a:defRPr>
-            </a:pPr>
-            <a:r>
-              <a:rPr>
-                <a:latin typeface="Calibri"/>
-              </a:rPr>
-              <a:t>•  Structured JSON logs, stdout only - never a raw exception message or third-party exception text, only its type name plus stack frames, enforced through one shared formatter used everywhere including unhandled-exception paths</a:t>
-            </a:r>
-          </a:p>
-          <a:p>
-            <a:pPr>
-              <a:spcAft>
-                <a:spcPts val="1000"/>
-              </a:spcAft>
-              <a:defRPr sz="1600">
-                <a:solidFill>
-                  <a:srgbClr val="202428"/>
-                </a:solidFill>
-                <a:latin typeface="Calibri"/>
-              </a:defRPr>
-            </a:pPr>
-            <a:r>
-              <a:rPr>
-                <a:latin typeface="Calibri"/>
-              </a:rPr>
-              <a:t>•  Prometheus metrics: processing outcomes, HTTP/processing latency, OpenAI tokens and estimated cost, DLQ depth, plus two health gauges most dashboards skip</a:t>
-            </a:r>
-          </a:p>
-          <a:p>
-            <a:pPr>
-              <a:spcAft>
-                <a:spcPts val="1000"/>
-              </a:spcAft>
-              <a:defRPr sz="1600">
-                <a:solidFill>
-                  <a:srgbClr val="202428"/>
-                </a:solidFill>
-                <a:latin typeface="Calibri"/>
-              </a:defRPr>
-            </a:pPr>
-            <a:r>
-              <a:rPr>
-                <a:latin typeface="Calibri"/>
-              </a:rPr>
-              <a:t>•  Worker-loop and DLQ-collector 'last progress' timestamps - a bare TCP liveness check only proves the process is alive, not that it's doing anything; these gauges (and a matching Prometheus alert) catch a wedged loop that liveness alone would miss</a:t>
-            </a:r>
-          </a:p>
-        </p:txBody>
-      </p:sp>
-      <p:pic>
-        <p:nvPicPr>
-          <p:cNvPr id="6" name="Picture 5" descr="grafana-dashboard.png"/>
-          <p:cNvPicPr>
-            <a:picLocks noChangeAspect="1"/>
-          </p:cNvPicPr>
-          <p:nvPr/>
-        </p:nvPicPr>
-        <p:blipFill>
-          <a:blip r:embed="rId2"/>
-          <a:stretch>
-            <a:fillRect/>
-          </a:stretch>
-        </p:blipFill>
-        <p:spPr>
-          <a:xfrm>
-            <a:off x="6675120" y="1572768"/>
-            <a:ext cx="4937760" cy="3621024"/>
-          </a:xfrm>
-          <a:prstGeom prst="rect">
-            <a:avLst/>
-          </a:prstGeom>
-          <a:ln w="12700">
-            <a:solidFill>
-              <a:srgbClr val="D8DCE0"/>
-            </a:solidFill>
-          </a:ln>
-        </p:spPr>
-      </p:pic>
-      <p:pic>
-        <p:nvPicPr>
-          <p:cNvPr id="7" name="Picture 6" descr="prometheus-alerts.png"/>
-          <p:cNvPicPr>
-            <a:picLocks noChangeAspect="1"/>
-          </p:cNvPicPr>
-          <p:nvPr/>
-        </p:nvPicPr>
-        <p:blipFill>
-          <a:blip r:embed="rId3"/>
-          <a:stretch>
-            <a:fillRect/>
-          </a:stretch>
-        </p:blipFill>
-        <p:spPr>
-          <a:xfrm>
-            <a:off x="7351776" y="5257800"/>
-            <a:ext cx="3584448" cy="1280160"/>
-          </a:xfrm>
-          <a:prstGeom prst="rect">
-            <a:avLst/>
-          </a:prstGeom>
-          <a:ln w="12700">
-            <a:solidFill>
-              <a:srgbClr val="D8DCE0"/>
-            </a:solidFill>
-          </a:ln>
-        </p:spPr>
-      </p:pic>
-      <p:sp>
-        <p:nvSpPr>
-          <p:cNvPr id="8" name="TextBox 7"/>
-          <p:cNvSpPr txBox="1"/>
-          <p:nvPr/>
-        </p:nvSpPr>
-        <p:spPr>
-          <a:xfrm>
-            <a:off x="548640" y="6492240"/>
-            <a:ext cx="9144000" cy="274320"/>
-          </a:xfrm>
-          <a:prstGeom prst="rect">
-            <a:avLst/>
-          </a:prstGeom>
-          <a:noFill/>
-        </p:spPr>
-        <p:txBody>
-          <a:bodyPr wrap="none">
-            <a:spAutoFit/>
-          </a:bodyPr>
-          <a:lstStyle/>
-          <a:p>
-            <a:pPr>
-              <a:defRPr sz="1000">
-                <a:solidFill>
-                  <a:srgbClr val="636E77"/>
-                </a:solidFill>
-                <a:latin typeface="Calibri"/>
-              </a:defRPr>
-            </a:pPr>
-            <a:r>
-              <a:rPr>
-                <a:latin typeface="Calibri"/>
-              </a:rPr>
-              <a:t>ConvoScore  ·  Observability</a:t>
-            </a:r>
-          </a:p>
-        </p:txBody>
-      </p:sp>
-    </p:spTree>
-  </p:cSld>
-  <p:clrMapOvr>
-    <a:masterClrMapping/>
-  </p:clrMapOvr>
-</p:sld>
-</file>
-
-<file path=ppt/slides/slide12.xml><?xml version="1.0" encoding="utf-8"?>
-<p:sld xmlns:a="http://schemas.openxmlformats.org/drawingml/2006/main" xmlns:p="http://schemas.openxmlformats.org/presentationml/2006/main" xmlns:r="http://schemas.openxmlformats.org/officeDocument/2006/relationships">
-  <p:cSld>
-    <p:bg>
-      <p:bgPr>
-        <a:solidFill>
-          <a:srgbClr val="F6F7F9"/>
-        </a:solidFill>
-        <a:effectLst/>
-      </p:bgPr>
-    </p:bg>
-    <p:spTree>
-      <p:nvGrpSpPr>
-        <p:cNvPr id="1" name=""/>
-        <p:cNvGrpSpPr/>
-        <p:nvPr/>
-      </p:nvGrpSpPr>
-      <p:grpSpPr/>
-      <p:sp>
-        <p:nvSpPr>
-          <p:cNvPr id="2" name="TextBox 1"/>
-          <p:cNvSpPr txBox="1"/>
-          <p:nvPr/>
-        </p:nvSpPr>
-        <p:spPr>
-          <a:xfrm>
-            <a:off x="548640" y="320040"/>
-            <a:ext cx="11064240" cy="365760"/>
-          </a:xfrm>
-          <a:prstGeom prst="rect">
-            <a:avLst/>
-          </a:prstGeom>
-          <a:noFill/>
-        </p:spPr>
-        <p:txBody>
-          <a:bodyPr wrap="none">
-            <a:spAutoFit/>
-          </a:bodyPr>
-          <a:lstStyle/>
-          <a:p>
-            <a:pPr>
-              <a:defRPr sz="1300" b="1">
-                <a:solidFill>
-                  <a:srgbClr val="1F8A8A"/>
-                </a:solidFill>
-                <a:latin typeface="Calibri"/>
-              </a:defRPr>
-            </a:pPr>
-            <a:r>
-              <a:rPr>
-                <a:latin typeface="Calibri"/>
-              </a:rPr>
-              <a:t>LIVE DEMO</a:t>
-            </a:r>
-          </a:p>
-        </p:txBody>
-      </p:sp>
-      <p:sp>
-        <p:nvSpPr>
-          <p:cNvPr id="3" name="TextBox 2"/>
-          <p:cNvSpPr txBox="1"/>
-          <p:nvPr/>
-        </p:nvSpPr>
-        <p:spPr>
-          <a:xfrm>
-            <a:off x="502920" y="621792"/>
-            <a:ext cx="11155680" cy="822960"/>
-          </a:xfrm>
-          <a:prstGeom prst="rect">
-            <a:avLst/>
-          </a:prstGeom>
-          <a:noFill/>
-        </p:spPr>
-        <p:txBody>
-          <a:bodyPr wrap="square">
-            <a:spAutoFit/>
-          </a:bodyPr>
-          <a:lstStyle/>
-          <a:p>
-            <a:pPr>
-              <a:defRPr sz="3000" b="1">
-                <a:solidFill>
-                  <a:srgbClr val="162A3E"/>
-                </a:solidFill>
-                <a:latin typeface="Calibri"/>
-              </a:defRPr>
-            </a:pPr>
-            <a:r>
-              <a:rPr>
-                <a:latin typeface="Calibri"/>
-              </a:rPr>
-              <a:t>Success, direct S3, induced failure, restart</a:t>
-            </a:r>
-          </a:p>
-        </p:txBody>
-      </p:sp>
-      <p:sp>
-        <p:nvSpPr>
-          <p:cNvPr id="4" name="Rectangle 3"/>
-          <p:cNvSpPr/>
-          <p:nvPr/>
-        </p:nvSpPr>
-        <p:spPr>
-          <a:xfrm>
-            <a:off x="548640" y="1371600"/>
-            <a:ext cx="1828800" cy="38100"/>
-          </a:xfrm>
-          <a:prstGeom prst="rect">
-            <a:avLst/>
-          </a:prstGeom>
           <a:solidFill>
-            <a:srgbClr val="1F8A8A"/>
+            <a:srgbClr val="9E3533"/>
           </a:solidFill>
           <a:ln>
             <a:noFill/>
           </a:ln>
+          <a:effectLst/>
         </p:spPr>
         <p:style>
           <a:lnRef idx="1">
@@ -5376,14 +4626,48 @@
       </p:sp>
       <p:sp>
         <p:nvSpPr>
-          <p:cNvPr id="5" name="TextBox 4"/>
+          <p:cNvPr id="7" name="TextBox 6"/>
           <p:cNvSpPr txBox="1"/>
           <p:nvPr/>
         </p:nvSpPr>
         <p:spPr>
           <a:xfrm>
-            <a:off x="548640" y="1645920"/>
-            <a:ext cx="6400800" cy="4754880"/>
+            <a:off x="914400" y="1920240"/>
+            <a:ext cx="4572000" cy="365760"/>
+          </a:xfrm>
+          <a:prstGeom prst="rect">
+            <a:avLst/>
+          </a:prstGeom>
+          <a:noFill/>
+        </p:spPr>
+        <p:txBody>
+          <a:bodyPr wrap="none">
+            <a:spAutoFit/>
+          </a:bodyPr>
+          <a:lstStyle/>
+          <a:p>
+            <a:r>
+              <a:rPr sz="1600" b="1" i="0">
+                <a:solidFill>
+                  <a:srgbClr val="9E3533"/>
+                </a:solidFill>
+                <a:latin typeface="Segoe UI"/>
+              </a:rPr>
+              <a:t>Tradeoffs &amp; exclusions</a:t>
+            </a:r>
+          </a:p>
+        </p:txBody>
+      </p:sp>
+      <p:sp>
+        <p:nvSpPr>
+          <p:cNvPr id="8" name="TextBox 7"/>
+          <p:cNvSpPr txBox="1"/>
+          <p:nvPr/>
+        </p:nvSpPr>
+        <p:spPr>
+          <a:xfrm>
+            <a:off x="914400" y="2395728"/>
+            <a:ext cx="4526280" cy="3474720"/>
           </a:xfrm>
           <a:prstGeom prst="rect">
             <a:avLst/>
@@ -5397,245 +4681,179 @@
           <a:lstStyle/>
           <a:p>
             <a:pPr>
+              <a:lnSpc>
+                <a:spcPct val="110000"/>
+              </a:lnSpc>
               <a:spcAft>
-                <a:spcPts val="1000"/>
+                <a:spcPts val="1300"/>
               </a:spcAft>
-              <a:defRPr sz="1800">
-                <a:solidFill>
-                  <a:srgbClr val="202428"/>
-                </a:solidFill>
-                <a:latin typeface="Calibri"/>
-              </a:defRPr>
             </a:pPr>
             <a:r>
-              <a:rPr>
-                <a:latin typeface="Calibri"/>
-              </a:rPr>
-              <a:t>•  1. Success: submit via the API and upload directly to S3 - both reach completed with a real OpenAI result, checked straight against Postgres</a:t>
+              <a:rPr sz="1280" b="1" i="0">
+                <a:solidFill>
+                  <a:srgbClr val="9E3533"/>
+                </a:solidFill>
+                <a:latin typeface="Segoe UI"/>
+              </a:rPr>
+              <a:t>▸  </a:t>
+            </a:r>
+            <a:r>
+              <a:rPr sz="1280" b="1" i="0">
+                <a:solidFill>
+                  <a:srgbClr val="14253A"/>
+                </a:solidFill>
+                <a:latin typeface="Segoe UI"/>
+              </a:rPr>
+              <a:t>No exactly-once claim anywhere</a:t>
+            </a:r>
+            <a:r>
+              <a:rPr sz="1280" b="0" i="0">
+                <a:solidFill>
+                  <a:srgbClr val="1E242B"/>
+                </a:solidFill>
+                <a:latin typeface="Segoe UI"/>
+              </a:rPr>
+              <a:t> — SQS is at-least-once by design</a:t>
             </a:r>
           </a:p>
           <a:p>
             <a:pPr>
+              <a:lnSpc>
+                <a:spcPct val="110000"/>
+              </a:lnSpc>
               <a:spcAft>
-                <a:spcPts val="1000"/>
+                <a:spcPts val="1300"/>
               </a:spcAft>
-              <a:defRPr sz="1800">
-                <a:solidFill>
-                  <a:srgbClr val="202428"/>
-                </a:solidFill>
-                <a:latin typeface="Calibri"/>
-              </a:defRPr>
             </a:pPr>
             <a:r>
-              <a:rPr>
-                <a:latin typeface="Calibri"/>
-              </a:rPr>
-              <a:t>•  2. Induced failure: a deterministic trigger fails scoring on purpose - watch it retry 3 times roughly 60 seconds apart, land in the DLQ, and a healthy conversation submitted alongside it complete normally the whole time</a:t>
+              <a:rPr sz="1280" b="1" i="0">
+                <a:solidFill>
+                  <a:srgbClr val="9E3533"/>
+                </a:solidFill>
+                <a:latin typeface="Segoe UI"/>
+              </a:rPr>
+              <a:t>▸  </a:t>
+            </a:r>
+            <a:r>
+              <a:rPr sz="1280" b="1" i="0">
+                <a:solidFill>
+                  <a:srgbClr val="14253A"/>
+                </a:solidFill>
+                <a:latin typeface="Segoe UI"/>
+              </a:rPr>
+              <a:t>A crash between an OpenAI response and the DB commit can still cause one extra paid call</a:t>
+            </a:r>
+            <a:r>
+              <a:rPr sz="1280" b="0" i="0">
+                <a:solidFill>
+                  <a:srgbClr val="1E242B"/>
+                </a:solidFill>
+                <a:latin typeface="Segoe UI"/>
+              </a:rPr>
+              <a:t> — bounded and rare, not eliminated</a:t>
             </a:r>
           </a:p>
           <a:p>
             <a:pPr>
+              <a:lnSpc>
+                <a:spcPct val="110000"/>
+              </a:lnSpc>
               <a:spcAft>
-                <a:spcPts val="1000"/>
+                <a:spcPts val="1300"/>
               </a:spcAft>
-              <a:defRPr sz="1800">
-                <a:solidFill>
-                  <a:srgbClr val="202428"/>
-                </a:solidFill>
-                <a:latin typeface="Calibri"/>
-              </a:defRPr>
             </a:pPr>
             <a:r>
-              <a:rPr>
-                <a:latin typeface="Calibri"/>
-              </a:rPr>
-              <a:t>•  3. Restart: delete the API, worker, and Postgres pods - watch them come back on the same image tag, and confirm the pre-restart result is unchanged, down to the timestamp</a:t>
+              <a:rPr sz="1280" b="1" i="0">
+                <a:solidFill>
+                  <a:srgbClr val="9E3533"/>
+                </a:solidFill>
+                <a:latin typeface="Segoe UI"/>
+              </a:rPr>
+              <a:t>▸  </a:t>
+            </a:r>
+            <a:r>
+              <a:rPr sz="1280" b="1" i="0">
+                <a:solidFill>
+                  <a:srgbClr val="14253A"/>
+                </a:solidFill>
+                <a:latin typeface="Segoe UI"/>
+              </a:rPr>
+              <a:t>LocalStack doesn't enforce the IAM policies Terraform defines</a:t>
+            </a:r>
+            <a:r>
+              <a:rPr sz="1280" b="0" i="0">
+                <a:solidFill>
+                  <a:srgbClr val="1E242B"/>
+                </a:solidFill>
+                <a:latin typeface="Segoe UI"/>
+              </a:rPr>
+              <a:t> — they show the intended shape for real AWS</a:t>
             </a:r>
           </a:p>
           <a:p>
             <a:pPr>
+              <a:lnSpc>
+                <a:spcPct val="110000"/>
+              </a:lnSpc>
               <a:spcAft>
-                <a:spcPts val="1000"/>
+                <a:spcPts val="1300"/>
               </a:spcAft>
-              <a:defRPr sz="1800">
-                <a:solidFill>
-                  <a:srgbClr val="202428"/>
-                </a:solidFill>
-                <a:latin typeface="Calibri"/>
-              </a:defRPr>
             </a:pPr>
             <a:r>
-              <a:rPr>
-                <a:latin typeface="Calibri"/>
-              </a:rPr>
-              <a:t>•  Exact commands, expected output, timing, and fallback screenshots are in presentation/DEMO-RUNBOOK.md</a:t>
-            </a:r>
-          </a:p>
-        </p:txBody>
-      </p:sp>
-      <p:sp>
-        <p:nvSpPr>
-          <p:cNvPr id="6" name="TextBox 5"/>
-          <p:cNvSpPr txBox="1"/>
-          <p:nvPr/>
-        </p:nvSpPr>
-        <p:spPr>
-          <a:xfrm>
-            <a:off x="548640" y="6492240"/>
-            <a:ext cx="9144000" cy="274320"/>
-          </a:xfrm>
-          <a:prstGeom prst="rect">
-            <a:avLst/>
-          </a:prstGeom>
-          <a:noFill/>
-        </p:spPr>
-        <p:txBody>
-          <a:bodyPr wrap="none">
-            <a:spAutoFit/>
-          </a:bodyPr>
-          <a:lstStyle/>
-          <a:p>
-            <a:pPr>
-              <a:defRPr sz="1000">
-                <a:solidFill>
-                  <a:srgbClr val="636E77"/>
-                </a:solidFill>
-                <a:latin typeface="Calibri"/>
-              </a:defRPr>
-            </a:pPr>
-            <a:r>
-              <a:rPr>
-                <a:latin typeface="Calibri"/>
-              </a:rPr>
-              <a:t>ConvoScore  ·  Live demo</a:t>
-            </a:r>
-          </a:p>
-        </p:txBody>
-      </p:sp>
-    </p:spTree>
-  </p:cSld>
-  <p:clrMapOvr>
-    <a:masterClrMapping/>
-  </p:clrMapOvr>
-</p:sld>
-</file>
-
-<file path=ppt/slides/slide13.xml><?xml version="1.0" encoding="utf-8"?>
-<p:sld xmlns:a="http://schemas.openxmlformats.org/drawingml/2006/main" xmlns:p="http://schemas.openxmlformats.org/presentationml/2006/main" xmlns:r="http://schemas.openxmlformats.org/officeDocument/2006/relationships">
-  <p:cSld>
-    <p:bg>
-      <p:bgPr>
-        <a:solidFill>
-          <a:srgbClr val="F6F7F9"/>
-        </a:solidFill>
-        <a:effectLst/>
-      </p:bgPr>
-    </p:bg>
-    <p:spTree>
-      <p:nvGrpSpPr>
-        <p:cNvPr id="1" name=""/>
-        <p:cNvGrpSpPr/>
-        <p:nvPr/>
-      </p:nvGrpSpPr>
-      <p:grpSpPr/>
-      <p:sp>
-        <p:nvSpPr>
-          <p:cNvPr id="2" name="TextBox 1"/>
-          <p:cNvSpPr txBox="1"/>
-          <p:nvPr/>
-        </p:nvSpPr>
-        <p:spPr>
-          <a:xfrm>
-            <a:off x="548640" y="320040"/>
-            <a:ext cx="11064240" cy="365760"/>
-          </a:xfrm>
-          <a:prstGeom prst="rect">
-            <a:avLst/>
-          </a:prstGeom>
-          <a:noFill/>
-        </p:spPr>
-        <p:txBody>
-          <a:bodyPr wrap="none">
-            <a:spAutoFit/>
-          </a:bodyPr>
-          <a:lstStyle/>
-          <a:p>
-            <a:pPr>
-              <a:defRPr sz="1300" b="1">
-                <a:solidFill>
-                  <a:srgbClr val="1F8A8A"/>
-                </a:solidFill>
-                <a:latin typeface="Calibri"/>
-              </a:defRPr>
-            </a:pPr>
-            <a:r>
-              <a:rPr>
-                <a:latin typeface="Calibri"/>
-              </a:rPr>
-              <a:t>HONESTY CHECK</a:t>
-            </a:r>
-          </a:p>
-        </p:txBody>
-      </p:sp>
-      <p:sp>
-        <p:nvSpPr>
-          <p:cNvPr id="3" name="TextBox 2"/>
-          <p:cNvSpPr txBox="1"/>
-          <p:nvPr/>
-        </p:nvSpPr>
-        <p:spPr>
-          <a:xfrm>
-            <a:off x="502920" y="621792"/>
-            <a:ext cx="11155680" cy="822960"/>
-          </a:xfrm>
-          <a:prstGeom prst="rect">
-            <a:avLst/>
-          </a:prstGeom>
-          <a:noFill/>
-        </p:spPr>
-        <p:txBody>
-          <a:bodyPr wrap="square">
-            <a:spAutoFit/>
-          </a:bodyPr>
-          <a:lstStyle/>
-          <a:p>
-            <a:pPr>
-              <a:defRPr sz="3000" b="1">
-                <a:solidFill>
-                  <a:srgbClr val="162A3E"/>
-                </a:solidFill>
-                <a:latin typeface="Calibri"/>
-              </a:defRPr>
-            </a:pPr>
-            <a:r>
-              <a:rPr>
-                <a:latin typeface="Calibri"/>
-              </a:rPr>
-              <a:t>Tradeoffs and known limitations</a:t>
-            </a:r>
-          </a:p>
-        </p:txBody>
-      </p:sp>
-      <p:sp>
-        <p:nvSpPr>
-          <p:cNvPr id="4" name="Rectangle 3"/>
+              <a:rPr sz="1280" b="1" i="0">
+                <a:solidFill>
+                  <a:srgbClr val="9E3533"/>
+                </a:solidFill>
+                <a:latin typeface="Segoe UI"/>
+              </a:rPr>
+              <a:t>▸  </a:t>
+            </a:r>
+            <a:r>
+              <a:rPr sz="1280" b="1" i="0">
+                <a:solidFill>
+                  <a:srgbClr val="14253A"/>
+                </a:solidFill>
+                <a:latin typeface="Segoe UI"/>
+              </a:rPr>
+              <a:t>Scoped down on purpose</a:t>
+            </a:r>
+            <a:r>
+              <a:rPr sz="1280" b="0" i="0">
+                <a:solidFill>
+                  <a:srgbClr val="1E242B"/>
+                </a:solidFill>
+                <a:latin typeface="Segoe UI"/>
+              </a:rPr>
+              <a:t> — no CI, no service mesh, no ORM, no new database</a:t>
+            </a:r>
+          </a:p>
+        </p:txBody>
+      </p:sp>
+      <p:sp>
+        <p:nvSpPr>
+          <p:cNvPr id="9" name="Rounded Rectangle 8"/>
           <p:cNvSpPr/>
           <p:nvPr/>
         </p:nvSpPr>
         <p:spPr>
           <a:xfrm>
-            <a:off x="548640" y="1371600"/>
-            <a:ext cx="1828800" cy="38100"/>
-          </a:xfrm>
-          <a:prstGeom prst="rect">
-            <a:avLst/>
+            <a:off x="6172200" y="1737360"/>
+            <a:ext cx="5074920" cy="4206240"/>
+          </a:xfrm>
+          <a:prstGeom prst="roundRect">
+            <a:avLst>
+              <a:gd name="adj" fmla="val 3500"/>
+            </a:avLst>
           </a:prstGeom>
           <a:solidFill>
-            <a:srgbClr val="1F8A8A"/>
+            <a:srgbClr val="FFFFFF"/>
           </a:solidFill>
-          <a:ln>
-            <a:noFill/>
+          <a:ln w="9525">
+            <a:solidFill>
+              <a:srgbClr val="E1E5EA"/>
+            </a:solidFill>
           </a:ln>
+          <a:effectLst/>
         </p:spPr>
         <p:style>
           <a:lnRef idx="1">
@@ -5661,304 +4879,25 @@
       </p:sp>
       <p:sp>
         <p:nvSpPr>
-          <p:cNvPr id="5" name="TextBox 4"/>
-          <p:cNvSpPr txBox="1"/>
-          <p:nvPr/>
-        </p:nvSpPr>
-        <p:spPr>
-          <a:xfrm>
-            <a:off x="548640" y="1645920"/>
-            <a:ext cx="6400800" cy="4754880"/>
+          <p:cNvPr id="10" name="Rectangle 9"/>
+          <p:cNvSpPr/>
+          <p:nvPr/>
+        </p:nvSpPr>
+        <p:spPr>
+          <a:xfrm>
+            <a:off x="6318504" y="1737360"/>
+            <a:ext cx="4782312" cy="40640"/>
           </a:xfrm>
           <a:prstGeom prst="rect">
             <a:avLst/>
           </a:prstGeom>
-          <a:noFill/>
-        </p:spPr>
-        <p:txBody>
-          <a:bodyPr wrap="square">
-            <a:spAutoFit/>
-          </a:bodyPr>
-          <a:lstStyle/>
-          <a:p>
-            <a:pPr>
-              <a:spcAft>
-                <a:spcPts val="1000"/>
-              </a:spcAft>
-              <a:defRPr sz="1700">
-                <a:solidFill>
-                  <a:srgbClr val="202428"/>
-                </a:solidFill>
-                <a:latin typeface="Calibri"/>
-              </a:defRPr>
-            </a:pPr>
-            <a:r>
-              <a:rPr>
-                <a:latin typeface="Calibri"/>
-              </a:rPr>
-              <a:t>•  No exactly-once processing claim anywhere - SQS is at-least-once by design</a:t>
-            </a:r>
-          </a:p>
-          <a:p>
-            <a:pPr>
-              <a:spcAft>
-                <a:spcPts val="1000"/>
-              </a:spcAft>
-              <a:defRPr sz="1700">
-                <a:solidFill>
-                  <a:srgbClr val="202428"/>
-                </a:solidFill>
-                <a:latin typeface="Calibri"/>
-              </a:defRPr>
-            </a:pPr>
-            <a:r>
-              <a:rPr>
-                <a:latin typeface="Calibri"/>
-              </a:rPr>
-              <a:t>•  A crash between an OpenAI response and the guarded commit can cause one extra paid OpenAI call for the same conversation - bounded and rare, not eliminated</a:t>
-            </a:r>
-          </a:p>
-          <a:p>
-            <a:pPr>
-              <a:spcAft>
-                <a:spcPts val="1000"/>
-              </a:spcAft>
-              <a:defRPr sz="1700">
-                <a:solidFill>
-                  <a:srgbClr val="202428"/>
-                </a:solidFill>
-                <a:latin typeface="Calibri"/>
-              </a:defRPr>
-            </a:pPr>
-            <a:r>
-              <a:rPr>
-                <a:latin typeface="Calibri"/>
-              </a:rPr>
-              <a:t>•  Prometheus and Grafana storage is emptyDir - metrics/dashboard history do not survive a pod restart</a:t>
-            </a:r>
-          </a:p>
-          <a:p>
-            <a:pPr>
-              <a:spcAft>
-                <a:spcPts val="1000"/>
-              </a:spcAft>
-              <a:defRPr sz="1700">
-                <a:solidFill>
-                  <a:srgbClr val="202428"/>
-                </a:solidFill>
-                <a:latin typeface="Calibri"/>
-              </a:defRPr>
-            </a:pPr>
-            <a:r>
-              <a:rPr>
-                <a:latin typeface="Calibri"/>
-              </a:rPr>
-              <a:t>•  LocalStack Community does not enforce the IAM policies Terraform defines</a:t>
-            </a:r>
-          </a:p>
-          <a:p>
-            <a:pPr>
-              <a:spcAft>
-                <a:spcPts val="1000"/>
-              </a:spcAft>
-              <a:defRPr sz="1700">
-                <a:solidFill>
-                  <a:srgbClr val="202428"/>
-                </a:solidFill>
-                <a:latin typeface="Calibri"/>
-              </a:defRPr>
-            </a:pPr>
-            <a:r>
-              <a:rPr>
-                <a:latin typeface="Calibri"/>
-              </a:rPr>
-              <a:t>•  Pod-restart durability is demonstrated; full cluster deletion or losing the underlying volume is not, and isn't claimed to be</a:t>
-            </a:r>
-          </a:p>
-          <a:p>
-            <a:pPr>
-              <a:spcAft>
-                <a:spcPts val="1000"/>
-              </a:spcAft>
-              <a:defRPr sz="1700">
-                <a:solidFill>
-                  <a:srgbClr val="202428"/>
-                </a:solidFill>
-                <a:latin typeface="Calibri"/>
-              </a:defRPr>
-            </a:pPr>
-            <a:r>
-              <a:rPr>
-                <a:latin typeface="Calibri"/>
-              </a:rPr>
-              <a:t>•  Grafana uses anonymous viewer access and cost figures are estimates from a hardcoded pricing table - both explicit, documented tradeoffs for a local take-home, not oversights</a:t>
-            </a:r>
-          </a:p>
-        </p:txBody>
-      </p:sp>
-      <p:sp>
-        <p:nvSpPr>
-          <p:cNvPr id="6" name="TextBox 5"/>
-          <p:cNvSpPr txBox="1"/>
-          <p:nvPr/>
-        </p:nvSpPr>
-        <p:spPr>
-          <a:xfrm>
-            <a:off x="548640" y="6492240"/>
-            <a:ext cx="9144000" cy="274320"/>
-          </a:xfrm>
-          <a:prstGeom prst="rect">
-            <a:avLst/>
-          </a:prstGeom>
-          <a:noFill/>
-        </p:spPr>
-        <p:txBody>
-          <a:bodyPr wrap="none">
-            <a:spAutoFit/>
-          </a:bodyPr>
-          <a:lstStyle/>
-          <a:p>
-            <a:pPr>
-              <a:defRPr sz="1000">
-                <a:solidFill>
-                  <a:srgbClr val="636E77"/>
-                </a:solidFill>
-                <a:latin typeface="Calibri"/>
-              </a:defRPr>
-            </a:pPr>
-            <a:r>
-              <a:rPr>
-                <a:latin typeface="Calibri"/>
-              </a:rPr>
-              <a:t>ConvoScore  ·  Tradeoffs and limitations</a:t>
-            </a:r>
-          </a:p>
-        </p:txBody>
-      </p:sp>
-    </p:spTree>
-  </p:cSld>
-  <p:clrMapOvr>
-    <a:masterClrMapping/>
-  </p:clrMapOvr>
-</p:sld>
-</file>
-
-<file path=ppt/slides/slide14.xml><?xml version="1.0" encoding="utf-8"?>
-<p:sld xmlns:a="http://schemas.openxmlformats.org/drawingml/2006/main" xmlns:p="http://schemas.openxmlformats.org/presentationml/2006/main" xmlns:r="http://schemas.openxmlformats.org/officeDocument/2006/relationships">
-  <p:cSld>
-    <p:bg>
-      <p:bgPr>
-        <a:solidFill>
-          <a:srgbClr val="F6F7F9"/>
-        </a:solidFill>
-        <a:effectLst/>
-      </p:bgPr>
-    </p:bg>
-    <p:spTree>
-      <p:nvGrpSpPr>
-        <p:cNvPr id="1" name=""/>
-        <p:cNvGrpSpPr/>
-        <p:nvPr/>
-      </p:nvGrpSpPr>
-      <p:grpSpPr/>
-      <p:sp>
-        <p:nvSpPr>
-          <p:cNvPr id="2" name="TextBox 1"/>
-          <p:cNvSpPr txBox="1"/>
-          <p:nvPr/>
-        </p:nvSpPr>
-        <p:spPr>
-          <a:xfrm>
-            <a:off x="548640" y="320040"/>
-            <a:ext cx="11064240" cy="365760"/>
-          </a:xfrm>
-          <a:prstGeom prst="rect">
-            <a:avLst/>
-          </a:prstGeom>
-          <a:noFill/>
-        </p:spPr>
-        <p:txBody>
-          <a:bodyPr wrap="none">
-            <a:spAutoFit/>
-          </a:bodyPr>
-          <a:lstStyle/>
-          <a:p>
-            <a:pPr>
-              <a:defRPr sz="1300" b="1">
-                <a:solidFill>
-                  <a:srgbClr val="1F8A8A"/>
-                </a:solidFill>
-                <a:latin typeface="Calibri"/>
-              </a:defRPr>
-            </a:pPr>
-            <a:r>
-              <a:rPr>
-                <a:latin typeface="Calibri"/>
-              </a:rPr>
-              <a:t>LOOKING AHEAD</a:t>
-            </a:r>
-          </a:p>
-        </p:txBody>
-      </p:sp>
-      <p:sp>
-        <p:nvSpPr>
-          <p:cNvPr id="3" name="TextBox 2"/>
-          <p:cNvSpPr txBox="1"/>
-          <p:nvPr/>
-        </p:nvSpPr>
-        <p:spPr>
-          <a:xfrm>
-            <a:off x="502920" y="621792"/>
-            <a:ext cx="11155680" cy="822960"/>
-          </a:xfrm>
-          <a:prstGeom prst="rect">
-            <a:avLst/>
-          </a:prstGeom>
-          <a:noFill/>
-        </p:spPr>
-        <p:txBody>
-          <a:bodyPr wrap="square">
-            <a:spAutoFit/>
-          </a:bodyPr>
-          <a:lstStyle/>
-          <a:p>
-            <a:pPr>
-              <a:defRPr sz="3000" b="1">
-                <a:solidFill>
-                  <a:srgbClr val="162A3E"/>
-                </a:solidFill>
-                <a:latin typeface="Calibri"/>
-              </a:defRPr>
-            </a:pPr>
-            <a:r>
-              <a:rPr>
-                <a:latin typeface="Calibri"/>
-              </a:rPr>
-              <a:t>What changes for real production</a:t>
-            </a:r>
-          </a:p>
-        </p:txBody>
-      </p:sp>
-      <p:sp>
-        <p:nvSpPr>
-          <p:cNvPr id="4" name="Rectangle 3"/>
-          <p:cNvSpPr/>
-          <p:nvPr/>
-        </p:nvSpPr>
-        <p:spPr>
-          <a:xfrm>
-            <a:off x="548640" y="1371600"/>
-            <a:ext cx="1828800" cy="38100"/>
-          </a:xfrm>
-          <a:prstGeom prst="rect">
-            <a:avLst/>
-          </a:prstGeom>
           <a:solidFill>
-            <a:srgbClr val="1F8A8A"/>
+            <a:srgbClr val="168A86"/>
           </a:solidFill>
           <a:ln>
             <a:noFill/>
           </a:ln>
+          <a:effectLst/>
         </p:spPr>
         <p:style>
           <a:lnRef idx="1">
@@ -5984,14 +4923,48 @@
       </p:sp>
       <p:sp>
         <p:nvSpPr>
-          <p:cNvPr id="5" name="TextBox 4"/>
+          <p:cNvPr id="11" name="TextBox 10"/>
           <p:cNvSpPr txBox="1"/>
           <p:nvPr/>
         </p:nvSpPr>
         <p:spPr>
           <a:xfrm>
-            <a:off x="548640" y="1645920"/>
-            <a:ext cx="6400800" cy="4754880"/>
+            <a:off x="6446520" y="1920240"/>
+            <a:ext cx="4572000" cy="365760"/>
+          </a:xfrm>
+          <a:prstGeom prst="rect">
+            <a:avLst/>
+          </a:prstGeom>
+          <a:noFill/>
+        </p:spPr>
+        <p:txBody>
+          <a:bodyPr wrap="none">
+            <a:spAutoFit/>
+          </a:bodyPr>
+          <a:lstStyle/>
+          <a:p>
+            <a:r>
+              <a:rPr sz="1600" b="1" i="0">
+                <a:solidFill>
+                  <a:srgbClr val="0F6664"/>
+                </a:solidFill>
+                <a:latin typeface="Segoe UI"/>
+              </a:rPr>
+              <a:t>What changes in production</a:t>
+            </a:r>
+          </a:p>
+        </p:txBody>
+      </p:sp>
+      <p:sp>
+        <p:nvSpPr>
+          <p:cNvPr id="12" name="TextBox 11"/>
+          <p:cNvSpPr txBox="1"/>
+          <p:nvPr/>
+        </p:nvSpPr>
+        <p:spPr>
+          <a:xfrm>
+            <a:off x="6446520" y="2395728"/>
+            <a:ext cx="4526280" cy="3474720"/>
           </a:xfrm>
           <a:prstGeom prst="rect">
             <a:avLst/>
@@ -6005,168 +4978,181 @@
           <a:lstStyle/>
           <a:p>
             <a:pPr>
+              <a:lnSpc>
+                <a:spcPct val="110000"/>
+              </a:lnSpc>
               <a:spcAft>
-                <a:spcPts val="1000"/>
+                <a:spcPts val="1300"/>
               </a:spcAft>
-              <a:defRPr sz="1550">
-                <a:solidFill>
-                  <a:srgbClr val="202428"/>
-                </a:solidFill>
-                <a:latin typeface="Calibri"/>
-              </a:defRPr>
             </a:pPr>
             <a:r>
-              <a:rPr>
-                <a:latin typeface="Calibri"/>
-              </a:rPr>
-              <a:t>•  Managed database and queue/storage services (RDS/ElastiCache-equivalent, real SQS/S3) instead of a self-hosted Postgres pod and LocalStack</a:t>
+              <a:rPr sz="1280" b="1" i="0">
+                <a:solidFill>
+                  <a:srgbClr val="168A86"/>
+                </a:solidFill>
+                <a:latin typeface="Segoe UI"/>
+              </a:rPr>
+              <a:t>▸  </a:t>
+            </a:r>
+            <a:r>
+              <a:rPr sz="1280" b="0" i="0">
+                <a:solidFill>
+                  <a:srgbClr val="1E242B"/>
+                </a:solidFill>
+                <a:latin typeface="Segoe UI"/>
+              </a:rPr>
+              <a:t>RDS for PostgreSQL and managed SQS/S3, instead of a self-hosted Postgres pod and LocalStack</a:t>
             </a:r>
           </a:p>
           <a:p>
             <a:pPr>
+              <a:lnSpc>
+                <a:spcPct val="110000"/>
+              </a:lnSpc>
               <a:spcAft>
-                <a:spcPts val="1000"/>
+                <a:spcPts val="1300"/>
               </a:spcAft>
-              <a:defRPr sz="1550">
-                <a:solidFill>
-                  <a:srgbClr val="202428"/>
-                </a:solidFill>
-                <a:latin typeface="Calibri"/>
-              </a:defRPr>
             </a:pPr>
             <a:r>
-              <a:rPr>
-                <a:latin typeface="Calibri"/>
-              </a:rPr>
-              <a:t>•  Workload identity (e.g. IRSA) instead of static test/test AWS credentials</a:t>
+              <a:rPr sz="1280" b="1" i="0">
+                <a:solidFill>
+                  <a:srgbClr val="168A86"/>
+                </a:solidFill>
+                <a:latin typeface="Segoe UI"/>
+              </a:rPr>
+              <a:t>▸  </a:t>
+            </a:r>
+            <a:r>
+              <a:rPr sz="1280" b="0" i="0">
+                <a:solidFill>
+                  <a:srgbClr val="1E242B"/>
+                </a:solidFill>
+                <a:latin typeface="Segoe UI"/>
+              </a:rPr>
+              <a:t>Workload identity (e.g. IRSA) and an external secret manager, instead of static credentials and manual Kubernetes Secrets</a:t>
             </a:r>
           </a:p>
           <a:p>
             <a:pPr>
+              <a:lnSpc>
+                <a:spcPct val="110000"/>
+              </a:lnSpc>
               <a:spcAft>
-                <a:spcPts val="1000"/>
+                <a:spcPts val="1300"/>
               </a:spcAft>
-              <a:defRPr sz="1550">
-                <a:solidFill>
-                  <a:srgbClr val="202428"/>
-                </a:solidFill>
-                <a:latin typeface="Calibri"/>
-              </a:defRPr>
             </a:pPr>
             <a:r>
-              <a:rPr>
-                <a:latin typeface="Calibri"/>
-              </a:rPr>
-              <a:t>•  An external secret manager instead of manually-created Kubernetes Secrets</a:t>
+              <a:rPr sz="1280" b="1" i="0">
+                <a:solidFill>
+                  <a:srgbClr val="168A86"/>
+                </a:solidFill>
+                <a:latin typeface="Segoe UI"/>
+              </a:rPr>
+              <a:t>▸  </a:t>
+            </a:r>
+            <a:r>
+              <a:rPr sz="1280" b="0" i="0">
+                <a:solidFill>
+                  <a:srgbClr val="1E242B"/>
+                </a:solidFill>
+                <a:latin typeface="Segoe UI"/>
+              </a:rPr>
+              <a:t>High availability, autoscaling on queue depth, persistent metrics storage, real alert routing</a:t>
             </a:r>
           </a:p>
           <a:p>
             <a:pPr>
+              <a:lnSpc>
+                <a:spcPct val="110000"/>
+              </a:lnSpc>
               <a:spcAft>
-                <a:spcPts val="1000"/>
+                <a:spcPts val="1300"/>
               </a:spcAft>
-              <a:defRPr sz="1550">
-                <a:solidFill>
-                  <a:srgbClr val="202428"/>
-                </a:solidFill>
-                <a:latin typeface="Calibri"/>
-              </a:defRPr>
             </a:pPr>
             <a:r>
-              <a:rPr>
-                <a:latin typeface="Calibri"/>
-              </a:rPr>
-              <a:t>•  Authenticated Grafana with real users and roles; persistent metrics/dashboard storage</a:t>
-            </a:r>
-          </a:p>
-          <a:p>
-            <a:pPr>
-              <a:spcAft>
-                <a:spcPts val="1000"/>
-              </a:spcAft>
-              <a:defRPr sz="1550">
-                <a:solidFill>
-                  <a:srgbClr val="202428"/>
-                </a:solidFill>
-                <a:latin typeface="Calibri"/>
-              </a:defRPr>
-            </a:pPr>
-            <a:r>
-              <a:rPr>
-                <a:latin typeface="Calibri"/>
-              </a:rPr>
-              <a:t>•  High availability (multiple replicas, an HA Postgres topology), autoscaling on queue depth</a:t>
-            </a:r>
-          </a:p>
-          <a:p>
-            <a:pPr>
-              <a:spcAft>
-                <a:spcPts val="1000"/>
-              </a:spcAft>
-              <a:defRPr sz="1550">
-                <a:solidFill>
-                  <a:srgbClr val="202428"/>
-                </a:solidFill>
-                <a:latin typeface="Calibri"/>
-              </a:defRPr>
-            </a:pPr>
-            <a:r>
-              <a:rPr>
-                <a:latin typeface="Calibri"/>
-              </a:rPr>
-              <a:t>•  Alert routing to a real on-call system instead of Prometheus-only visibility</a:t>
-            </a:r>
-          </a:p>
-          <a:p>
-            <a:pPr>
-              <a:spcAft>
-                <a:spcPts val="1000"/>
-              </a:spcAft>
-              <a:defRPr sz="1550">
-                <a:solidFill>
-                  <a:srgbClr val="202428"/>
-                </a:solidFill>
-                <a:latin typeface="Calibri"/>
-              </a:defRPr>
-            </a:pPr>
-            <a:r>
-              <a:rPr>
-                <a:latin typeface="Calibri"/>
-              </a:rPr>
-              <a:t>•  Backups, TLS/Ingress, conversation-content retention and privacy controls</a:t>
-            </a:r>
-          </a:p>
-          <a:p>
-            <a:pPr>
-              <a:spcAft>
-                <a:spcPts val="1000"/>
-              </a:spcAft>
-              <a:defRPr sz="1550">
-                <a:solidFill>
-                  <a:srgbClr val="202428"/>
-                </a:solidFill>
-                <a:latin typeface="Calibri"/>
-              </a:defRPr>
-            </a:pPr>
-            <a:r>
-              <a:rPr>
-                <a:latin typeface="Calibri"/>
-              </a:rPr>
-              <a:t>•  A transactional outbox or idempotency-keyed LLM call to close the remaining duplicate-OpenAI-call window described earlier</a:t>
-            </a:r>
-          </a:p>
-        </p:txBody>
-      </p:sp>
-      <p:sp>
-        <p:nvSpPr>
-          <p:cNvPr id="6" name="TextBox 5"/>
+              <a:rPr sz="1280" b="1" i="0">
+                <a:solidFill>
+                  <a:srgbClr val="168A86"/>
+                </a:solidFill>
+                <a:latin typeface="Segoe UI"/>
+              </a:rPr>
+              <a:t>▸  </a:t>
+            </a:r>
+            <a:r>
+              <a:rPr sz="1280" b="1" i="0">
+                <a:solidFill>
+                  <a:srgbClr val="14253A"/>
+                </a:solidFill>
+                <a:latin typeface="Segoe UI"/>
+              </a:rPr>
+              <a:t>Narrowing</a:t>
+            </a:r>
+            <a:r>
+              <a:rPr sz="1280" b="0" i="0">
+                <a:solidFill>
+                  <a:srgbClr val="1E242B"/>
+                </a:solidFill>
+                <a:latin typeface="Segoe UI"/>
+              </a:rPr>
+              <a:t> — not fully closing — the OpenAI-response-to-commit duplicate window, e.g. with an idempotency key on the LLM call</a:t>
+            </a:r>
+          </a:p>
+        </p:txBody>
+      </p:sp>
+      <p:sp>
+        <p:nvSpPr>
+          <p:cNvPr id="13" name="Rectangle 12"/>
+          <p:cNvSpPr/>
+          <p:nvPr/>
+        </p:nvSpPr>
+        <p:spPr>
+          <a:xfrm>
+            <a:off x="640080" y="6272784"/>
+            <a:ext cx="10911535" cy="9525"/>
+          </a:xfrm>
+          <a:prstGeom prst="rect">
+            <a:avLst/>
+          </a:prstGeom>
+          <a:solidFill>
+            <a:srgbClr val="E1E5EA"/>
+          </a:solidFill>
+          <a:ln>
+            <a:noFill/>
+          </a:ln>
+          <a:effectLst/>
+        </p:spPr>
+        <p:style>
+          <a:lnRef idx="1">
+            <a:schemeClr val="accent1"/>
+          </a:lnRef>
+          <a:fillRef idx="3">
+            <a:schemeClr val="accent1"/>
+          </a:fillRef>
+          <a:effectRef idx="2">
+            <a:schemeClr val="accent1"/>
+          </a:effectRef>
+          <a:fontRef idx="minor">
+            <a:schemeClr val="lt1"/>
+          </a:fontRef>
+        </p:style>
+        <p:txBody>
+          <a:bodyPr rtlCol="0" anchor="ctr"/>
+          <a:lstStyle/>
+          <a:p>
+            <a:pPr algn="ctr"/>
+          </a:p>
+        </p:txBody>
+      </p:sp>
+      <p:sp>
+        <p:nvSpPr>
+          <p:cNvPr id="14" name="TextBox 13"/>
           <p:cNvSpPr txBox="1"/>
           <p:nvPr/>
         </p:nvSpPr>
         <p:spPr>
           <a:xfrm>
-            <a:off x="548640" y="6492240"/>
-            <a:ext cx="9144000" cy="274320"/>
+            <a:off x="640080" y="6382512"/>
+            <a:ext cx="7315200" cy="292608"/>
           </a:xfrm>
           <a:prstGeom prst="rect">
             <a:avLst/>
@@ -6179,19 +5165,49 @@
           </a:bodyPr>
           <a:lstStyle/>
           <a:p>
-            <a:pPr>
-              <a:defRPr sz="1000">
-                <a:solidFill>
-                  <a:srgbClr val="636E77"/>
-                </a:solidFill>
-                <a:latin typeface="Calibri"/>
-              </a:defRPr>
-            </a:pPr>
-            <a:r>
-              <a:rPr>
-                <a:latin typeface="Calibri"/>
-              </a:rPr>
-              <a:t>ConvoScore  ·  Production roadmap</a:t>
+            <a:r>
+              <a:rPr sz="1000" b="0" i="0">
+                <a:solidFill>
+                  <a:srgbClr val="626E79"/>
+                </a:solidFill>
+                <a:latin typeface="Segoe UI"/>
+              </a:rPr>
+              <a:t>ConvoScore  ·  Tradeoffs and roadmap</a:t>
+            </a:r>
+          </a:p>
+        </p:txBody>
+      </p:sp>
+      <p:sp>
+        <p:nvSpPr>
+          <p:cNvPr id="15" name="TextBox 14"/>
+          <p:cNvSpPr txBox="1"/>
+          <p:nvPr/>
+        </p:nvSpPr>
+        <p:spPr>
+          <a:xfrm>
+            <a:off x="10362895" y="6382512"/>
+            <a:ext cx="1188720" cy="292608"/>
+          </a:xfrm>
+          <a:prstGeom prst="rect">
+            <a:avLst/>
+          </a:prstGeom>
+          <a:noFill/>
+        </p:spPr>
+        <p:txBody>
+          <a:bodyPr wrap="none">
+            <a:spAutoFit/>
+          </a:bodyPr>
+          <a:lstStyle/>
+          <a:p>
+            <a:pPr algn="r"/>
+            <a:r>
+              <a:rPr sz="1000" b="0" i="0">
+                <a:solidFill>
+                  <a:srgbClr val="B7C2CC"/>
+                </a:solidFill>
+                <a:latin typeface="Segoe UI"/>
+              </a:rPr>
+              <a:t>10 / 10</a:t>
             </a:r>
           </a:p>
         </p:txBody>
@@ -6210,7 +5226,7 @@
     <p:bg>
       <p:bgPr>
         <a:solidFill>
-          <a:srgbClr val="F6F7F9"/>
+          <a:srgbClr val="F7F8FA"/>
         </a:solidFill>
         <a:effectLst/>
       </p:bgPr>
@@ -6230,8 +5246,8 @@
         </p:nvSpPr>
         <p:spPr>
           <a:xfrm>
-            <a:off x="548640" y="320040"/>
-            <a:ext cx="11064240" cy="365760"/>
+            <a:off x="640080" y="384048"/>
+            <a:ext cx="9601200" cy="292608"/>
           </a:xfrm>
           <a:prstGeom prst="rect">
             <a:avLst/>
@@ -6244,19 +5260,14 @@
           </a:bodyPr>
           <a:lstStyle/>
           <a:p>
-            <a:pPr>
-              <a:defRPr sz="1300" b="1">
-                <a:solidFill>
-                  <a:srgbClr val="1F8A8A"/>
-                </a:solidFill>
-                <a:latin typeface="Calibri"/>
-              </a:defRPr>
-            </a:pPr>
-            <a:r>
-              <a:rPr>
-                <a:latin typeface="Calibri"/>
-              </a:rPr>
-              <a:t>ASSIGNMENT</a:t>
+            <a:r>
+              <a:rPr sz="1250" b="1" i="0" spc="160">
+                <a:solidFill>
+                  <a:srgbClr val="168A86"/>
+                </a:solidFill>
+                <a:latin typeface="Segoe UI"/>
+              </a:rPr>
+              <a:t>OVERVIEW</a:t>
             </a:r>
           </a:p>
         </p:txBody>
@@ -6269,8 +5280,8 @@
         </p:nvSpPr>
         <p:spPr>
           <a:xfrm>
-            <a:off x="502920" y="621792"/>
-            <a:ext cx="11155680" cy="822960"/>
+            <a:off x="612647" y="658368"/>
+            <a:ext cx="10607040" cy="640080"/>
           </a:xfrm>
           <a:prstGeom prst="rect">
             <a:avLst/>
@@ -6283,19 +5294,14 @@
           </a:bodyPr>
           <a:lstStyle/>
           <a:p>
-            <a:pPr>
-              <a:defRPr sz="3000" b="1">
-                <a:solidFill>
-                  <a:srgbClr val="162A3E"/>
-                </a:solidFill>
-                <a:latin typeface="Calibri"/>
-              </a:defRPr>
-            </a:pPr>
-            <a:r>
-              <a:rPr>
-                <a:latin typeface="Calibri"/>
-              </a:rPr>
-              <a:t>Requirements and constraints</a:t>
+            <a:r>
+              <a:rPr sz="2700" b="1" i="0">
+                <a:solidFill>
+                  <a:srgbClr val="14253A"/>
+                </a:solidFill>
+                <a:latin typeface="Segoe UI"/>
+              </a:rPr>
+              <a:t>What ConvoScore does, and why it's shaped this way</a:t>
             </a:r>
           </a:p>
         </p:txBody>
@@ -6308,18 +5314,19 @@
         </p:nvSpPr>
         <p:spPr>
           <a:xfrm>
-            <a:off x="548640" y="1371600"/>
-            <a:ext cx="1828800" cy="38100"/>
+            <a:off x="640080" y="1353312"/>
+            <a:ext cx="1051560" cy="38100"/>
           </a:xfrm>
           <a:prstGeom prst="rect">
             <a:avLst/>
           </a:prstGeom>
           <a:solidFill>
-            <a:srgbClr val="1F8A8A"/>
+            <a:srgbClr val="168A86"/>
           </a:solidFill>
           <a:ln>
             <a:noFill/>
           </a:ln>
+          <a:effectLst/>
         </p:spPr>
         <p:style>
           <a:lnRef idx="1">
@@ -6345,14 +5352,140 @@
       </p:sp>
       <p:sp>
         <p:nvSpPr>
-          <p:cNvPr id="5" name="TextBox 4"/>
+          <p:cNvPr id="5" name="Rounded Rectangle 4"/>
+          <p:cNvSpPr/>
+          <p:nvPr/>
+        </p:nvSpPr>
+        <p:spPr>
+          <a:xfrm>
+            <a:off x="640080" y="1737360"/>
+            <a:ext cx="5074920" cy="3977639"/>
+          </a:xfrm>
+          <a:prstGeom prst="roundRect">
+            <a:avLst>
+              <a:gd name="adj" fmla="val 3500"/>
+            </a:avLst>
+          </a:prstGeom>
+          <a:solidFill>
+            <a:srgbClr val="FFFFFF"/>
+          </a:solidFill>
+          <a:ln w="9525">
+            <a:solidFill>
+              <a:srgbClr val="E1E5EA"/>
+            </a:solidFill>
+          </a:ln>
+          <a:effectLst/>
+        </p:spPr>
+        <p:style>
+          <a:lnRef idx="1">
+            <a:schemeClr val="accent1"/>
+          </a:lnRef>
+          <a:fillRef idx="3">
+            <a:schemeClr val="accent1"/>
+          </a:fillRef>
+          <a:effectRef idx="2">
+            <a:schemeClr val="accent1"/>
+          </a:effectRef>
+          <a:fontRef idx="minor">
+            <a:schemeClr val="lt1"/>
+          </a:fontRef>
+        </p:style>
+        <p:txBody>
+          <a:bodyPr rtlCol="0" anchor="ctr"/>
+          <a:lstStyle/>
+          <a:p>
+            <a:pPr algn="ctr"/>
+          </a:p>
+        </p:txBody>
+      </p:sp>
+      <p:sp>
+        <p:nvSpPr>
+          <p:cNvPr id="6" name="Rectangle 5"/>
+          <p:cNvSpPr/>
+          <p:nvPr/>
+        </p:nvSpPr>
+        <p:spPr>
+          <a:xfrm>
+            <a:off x="786384" y="1737360"/>
+            <a:ext cx="4782312" cy="40640"/>
+          </a:xfrm>
+          <a:prstGeom prst="rect">
+            <a:avLst/>
+          </a:prstGeom>
+          <a:solidFill>
+            <a:srgbClr val="168A86"/>
+          </a:solidFill>
+          <a:ln>
+            <a:noFill/>
+          </a:ln>
+          <a:effectLst/>
+        </p:spPr>
+        <p:style>
+          <a:lnRef idx="1">
+            <a:schemeClr val="accent1"/>
+          </a:lnRef>
+          <a:fillRef idx="3">
+            <a:schemeClr val="accent1"/>
+          </a:fillRef>
+          <a:effectRef idx="2">
+            <a:schemeClr val="accent1"/>
+          </a:effectRef>
+          <a:fontRef idx="minor">
+            <a:schemeClr val="lt1"/>
+          </a:fontRef>
+        </p:style>
+        <p:txBody>
+          <a:bodyPr rtlCol="0" anchor="ctr"/>
+          <a:lstStyle/>
+          <a:p>
+            <a:pPr algn="ctr"/>
+          </a:p>
+        </p:txBody>
+      </p:sp>
+      <p:sp>
+        <p:nvSpPr>
+          <p:cNvPr id="7" name="TextBox 6"/>
           <p:cNvSpPr txBox="1"/>
           <p:nvPr/>
         </p:nvSpPr>
         <p:spPr>
           <a:xfrm>
-            <a:off x="548640" y="1645920"/>
-            <a:ext cx="7315200" cy="4754880"/>
+            <a:off x="914400" y="1938528"/>
+            <a:ext cx="4572000" cy="365760"/>
+          </a:xfrm>
+          <a:prstGeom prst="rect">
+            <a:avLst/>
+          </a:prstGeom>
+          <a:noFill/>
+        </p:spPr>
+        <p:txBody>
+          <a:bodyPr wrap="none">
+            <a:spAutoFit/>
+          </a:bodyPr>
+          <a:lstStyle/>
+          <a:p>
+            <a:r>
+              <a:rPr sz="1600" b="1" i="0">
+                <a:solidFill>
+                  <a:srgbClr val="14253A"/>
+                </a:solidFill>
+                <a:latin typeface="Segoe UI"/>
+              </a:rPr>
+              <a:t>What it does</a:t>
+            </a:r>
+          </a:p>
+        </p:txBody>
+      </p:sp>
+      <p:sp>
+        <p:nvSpPr>
+          <p:cNvPr id="8" name="TextBox 7"/>
+          <p:cNvSpPr txBox="1"/>
+          <p:nvPr/>
+        </p:nvSpPr>
+        <p:spPr>
+          <a:xfrm>
+            <a:off x="914400" y="2423160"/>
+            <a:ext cx="4526280" cy="3108960"/>
           </a:xfrm>
           <a:prstGeom prst="rect">
             <a:avLst/>
@@ -6366,111 +5499,253 @@
           <a:lstStyle/>
           <a:p>
             <a:pPr>
+              <a:lnSpc>
+                <a:spcPct val="110000"/>
+              </a:lnSpc>
               <a:spcAft>
-                <a:spcPts val="1000"/>
+                <a:spcPts val="1600"/>
               </a:spcAft>
-              <a:defRPr sz="1700">
-                <a:solidFill>
-                  <a:srgbClr val="202428"/>
-                </a:solidFill>
-                <a:latin typeface="Calibri"/>
-              </a:defRPr>
             </a:pPr>
             <a:r>
-              <a:rPr>
-                <a:latin typeface="Calibri"/>
-              </a:rPr>
-              <a:t>•  Ingest support-conversation text two ways: an API call, or a file dropped into storage</a:t>
+              <a:rPr sz="1450" b="1" i="0">
+                <a:solidFill>
+                  <a:srgbClr val="168A86"/>
+                </a:solidFill>
+                <a:latin typeface="Segoe UI"/>
+              </a:rPr>
+              <a:t>▸  </a:t>
+            </a:r>
+            <a:r>
+              <a:rPr sz="1450" b="1" i="0">
+                <a:solidFill>
+                  <a:srgbClr val="14253A"/>
+                </a:solidFill>
+                <a:latin typeface="Segoe UI"/>
+              </a:rPr>
+              <a:t>Ingests support conversations two ways</a:t>
+            </a:r>
+            <a:r>
+              <a:rPr sz="1450" b="0" i="0">
+                <a:solidFill>
+                  <a:srgbClr val="1E242B"/>
+                </a:solidFill>
+                <a:latin typeface="Segoe UI"/>
+              </a:rPr>
+              <a:t> — an API call, or a file dropped into storage</a:t>
             </a:r>
           </a:p>
           <a:p>
             <a:pPr>
+              <a:lnSpc>
+                <a:spcPct val="110000"/>
+              </a:lnSpc>
               <a:spcAft>
-                <a:spcPts val="1000"/>
+                <a:spcPts val="1600"/>
               </a:spcAft>
-              <a:defRPr sz="1700">
-                <a:solidFill>
-                  <a:srgbClr val="202428"/>
-                </a:solidFill>
-                <a:latin typeface="Calibri"/>
-              </a:defRPr>
             </a:pPr>
             <a:r>
-              <a:rPr>
-                <a:latin typeface="Calibri"/>
-              </a:rPr>
-              <a:t>•  Score each conversation with an LLM: sentiment, a risk score, a short rationale</a:t>
+              <a:rPr sz="1450" b="1" i="0">
+                <a:solidFill>
+                  <a:srgbClr val="168A86"/>
+                </a:solidFill>
+                <a:latin typeface="Segoe UI"/>
+              </a:rPr>
+              <a:t>▸  </a:t>
+            </a:r>
+            <a:r>
+              <a:rPr sz="1450" b="1" i="0">
+                <a:solidFill>
+                  <a:srgbClr val="14253A"/>
+                </a:solidFill>
+                <a:latin typeface="Segoe UI"/>
+              </a:rPr>
+              <a:t>Scores each one with an LLM</a:t>
+            </a:r>
+            <a:r>
+              <a:rPr sz="1450" b="0" i="0">
+                <a:solidFill>
+                  <a:srgbClr val="1E242B"/>
+                </a:solidFill>
+                <a:latin typeface="Segoe UI"/>
+              </a:rPr>
+              <a:t> — sentiment, a 0–1 risk score, a short rationale</a:t>
             </a:r>
           </a:p>
           <a:p>
             <a:pPr>
+              <a:lnSpc>
+                <a:spcPct val="110000"/>
+              </a:lnSpc>
               <a:spcAft>
-                <a:spcPts val="1000"/>
+                <a:spcPts val="1600"/>
               </a:spcAft>
-              <a:defRPr sz="1700">
-                <a:solidFill>
-                  <a:srgbClr val="202428"/>
-                </a:solidFill>
-                <a:latin typeface="Calibri"/>
-              </a:defRPr>
             </a:pPr>
             <a:r>
-              <a:rPr>
-                <a:latin typeface="Calibri"/>
-              </a:rPr>
-              <a:t>•  Store results durably and make them reviewable by a person - no separate frontend framework</a:t>
-            </a:r>
-          </a:p>
-          <a:p>
-            <a:pPr>
-              <a:spcAft>
-                <a:spcPts val="1000"/>
-              </a:spcAft>
-              <a:defRPr sz="1700">
-                <a:solidFill>
-                  <a:srgbClr val="202428"/>
-                </a:solidFill>
-                <a:latin typeface="Calibri"/>
-              </a:defRPr>
-            </a:pPr>
-            <a:r>
-              <a:rPr>
-                <a:latin typeface="Calibri"/>
-              </a:rPr>
-              <a:t>•  Package as containers, deploy to Kubernetes, provision cloud resources as code</a:t>
-            </a:r>
-          </a:p>
-          <a:p>
-            <a:pPr>
-              <a:spcAft>
-                <a:spcPts val="1000"/>
-              </a:spcAft>
-              <a:defRPr sz="1700">
-                <a:solidFill>
-                  <a:srgbClr val="202428"/>
-                </a:solidFill>
-                <a:latin typeface="Calibri"/>
-              </a:defRPr>
-            </a:pPr>
-            <a:r>
-              <a:rPr>
-                <a:latin typeface="Calibri"/>
-              </a:rPr>
-              <a:t>•  Show real observability: logs, metrics, a dashboard, an induced failure that's visible end to end</a:t>
-            </a:r>
-          </a:p>
-        </p:txBody>
-      </p:sp>
-      <p:sp>
-        <p:nvSpPr>
-          <p:cNvPr id="6" name="TextBox 5"/>
+              <a:rPr sz="1450" b="1" i="0">
+                <a:solidFill>
+                  <a:srgbClr val="168A86"/>
+                </a:solidFill>
+                <a:latin typeface="Segoe UI"/>
+              </a:rPr>
+              <a:t>▸  </a:t>
+            </a:r>
+            <a:r>
+              <a:rPr sz="1450" b="1" i="0">
+                <a:solidFill>
+                  <a:srgbClr val="14253A"/>
+                </a:solidFill>
+                <a:latin typeface="Segoe UI"/>
+              </a:rPr>
+              <a:t>Stores results durably and makes them reviewable by a person</a:t>
+            </a:r>
+            <a:r>
+              <a:rPr sz="1450" b="0" i="0">
+                <a:solidFill>
+                  <a:srgbClr val="1E242B"/>
+                </a:solidFill>
+                <a:latin typeface="Segoe UI"/>
+              </a:rPr>
+              <a:t> — no separate frontend</a:t>
+            </a:r>
+          </a:p>
+        </p:txBody>
+      </p:sp>
+      <p:sp>
+        <p:nvSpPr>
+          <p:cNvPr id="9" name="Rounded Rectangle 8"/>
+          <p:cNvSpPr/>
+          <p:nvPr/>
+        </p:nvSpPr>
+        <p:spPr>
+          <a:xfrm>
+            <a:off x="6172200" y="1737360"/>
+            <a:ext cx="5074920" cy="3977639"/>
+          </a:xfrm>
+          <a:prstGeom prst="roundRect">
+            <a:avLst>
+              <a:gd name="adj" fmla="val 3500"/>
+            </a:avLst>
+          </a:prstGeom>
+          <a:solidFill>
+            <a:srgbClr val="FFFFFF"/>
+          </a:solidFill>
+          <a:ln w="9525">
+            <a:solidFill>
+              <a:srgbClr val="E1E5EA"/>
+            </a:solidFill>
+          </a:ln>
+          <a:effectLst/>
+        </p:spPr>
+        <p:style>
+          <a:lnRef idx="1">
+            <a:schemeClr val="accent1"/>
+          </a:lnRef>
+          <a:fillRef idx="3">
+            <a:schemeClr val="accent1"/>
+          </a:fillRef>
+          <a:effectRef idx="2">
+            <a:schemeClr val="accent1"/>
+          </a:effectRef>
+          <a:fontRef idx="minor">
+            <a:schemeClr val="lt1"/>
+          </a:fontRef>
+        </p:style>
+        <p:txBody>
+          <a:bodyPr rtlCol="0" anchor="ctr"/>
+          <a:lstStyle/>
+          <a:p>
+            <a:pPr algn="ctr"/>
+          </a:p>
+        </p:txBody>
+      </p:sp>
+      <p:sp>
+        <p:nvSpPr>
+          <p:cNvPr id="10" name="Rectangle 9"/>
+          <p:cNvSpPr/>
+          <p:nvPr/>
+        </p:nvSpPr>
+        <p:spPr>
+          <a:xfrm>
+            <a:off x="6318504" y="1737360"/>
+            <a:ext cx="4782312" cy="40640"/>
+          </a:xfrm>
+          <a:prstGeom prst="rect">
+            <a:avLst/>
+          </a:prstGeom>
+          <a:solidFill>
+            <a:srgbClr val="C97A1A"/>
+          </a:solidFill>
+          <a:ln>
+            <a:noFill/>
+          </a:ln>
+          <a:effectLst/>
+        </p:spPr>
+        <p:style>
+          <a:lnRef idx="1">
+            <a:schemeClr val="accent1"/>
+          </a:lnRef>
+          <a:fillRef idx="3">
+            <a:schemeClr val="accent1"/>
+          </a:fillRef>
+          <a:effectRef idx="2">
+            <a:schemeClr val="accent1"/>
+          </a:effectRef>
+          <a:fontRef idx="minor">
+            <a:schemeClr val="lt1"/>
+          </a:fontRef>
+        </p:style>
+        <p:txBody>
+          <a:bodyPr rtlCol="0" anchor="ctr"/>
+          <a:lstStyle/>
+          <a:p>
+            <a:pPr algn="ctr"/>
+          </a:p>
+        </p:txBody>
+      </p:sp>
+      <p:sp>
+        <p:nvSpPr>
+          <p:cNvPr id="11" name="TextBox 10"/>
           <p:cNvSpPr txBox="1"/>
           <p:nvPr/>
         </p:nvSpPr>
         <p:spPr>
           <a:xfrm>
-            <a:off x="548640" y="4572000"/>
-            <a:ext cx="7315200" cy="4754880"/>
+            <a:off x="6446520" y="1938528"/>
+            <a:ext cx="4572000" cy="365760"/>
+          </a:xfrm>
+          <a:prstGeom prst="rect">
+            <a:avLst/>
+          </a:prstGeom>
+          <a:noFill/>
+        </p:spPr>
+        <p:txBody>
+          <a:bodyPr wrap="none">
+            <a:spAutoFit/>
+          </a:bodyPr>
+          <a:lstStyle/>
+          <a:p>
+            <a:r>
+              <a:rPr sz="1600" b="1" i="0">
+                <a:solidFill>
+                  <a:srgbClr val="14253A"/>
+                </a:solidFill>
+                <a:latin typeface="Segoe UI"/>
+              </a:rPr>
+              <a:t>Why this architecture</a:t>
+            </a:r>
+          </a:p>
+        </p:txBody>
+      </p:sp>
+      <p:sp>
+        <p:nvSpPr>
+          <p:cNvPr id="12" name="TextBox 11"/>
+          <p:cNvSpPr txBox="1"/>
+          <p:nvPr/>
+        </p:nvSpPr>
+        <p:spPr>
+          <a:xfrm>
+            <a:off x="6446520" y="2423160"/>
+            <a:ext cx="4526280" cy="3108960"/>
           </a:xfrm>
           <a:prstGeom prst="rect">
             <a:avLst/>
@@ -6484,92 +5759,171 @@
           <a:lstStyle/>
           <a:p>
             <a:pPr>
+              <a:lnSpc>
+                <a:spcPct val="110000"/>
+              </a:lnSpc>
               <a:spcAft>
-                <a:spcPts val="1000"/>
+                <a:spcPts val="1600"/>
               </a:spcAft>
-              <a:defRPr sz="1500">
-                <a:solidFill>
-                  <a:srgbClr val="202428"/>
-                </a:solidFill>
-                <a:latin typeface="Calibri"/>
-              </a:defRPr>
             </a:pPr>
             <a:r>
-              <a:rPr>
-                <a:latin typeface="Calibri"/>
-              </a:rPr>
-              <a:t>•  Hard constraints I held myself to:</a:t>
+              <a:rPr sz="1450" b="1" i="0">
+                <a:solidFill>
+                  <a:srgbClr val="C97A1A"/>
+                </a:solidFill>
+                <a:latin typeface="Segoe UI"/>
+              </a:rPr>
+              <a:t>▸  </a:t>
+            </a:r>
+            <a:r>
+              <a:rPr sz="1450" b="1" i="0">
+                <a:solidFill>
+                  <a:srgbClr val="14253A"/>
+                </a:solidFill>
+                <a:latin typeface="Segoe UI"/>
+              </a:rPr>
+              <a:t>Decouples ingestion from scoring</a:t>
+            </a:r>
+            <a:r>
+              <a:rPr sz="1450" b="0" i="0">
+                <a:solidFill>
+                  <a:srgbClr val="1E242B"/>
+                </a:solidFill>
+                <a:latin typeface="Segoe UI"/>
+              </a:rPr>
+              <a:t> — a slow or failed OpenAI call never blocks the caller</a:t>
             </a:r>
           </a:p>
           <a:p>
             <a:pPr>
+              <a:lnSpc>
+                <a:spcPct val="110000"/>
+              </a:lnSpc>
               <a:spcAft>
-                <a:spcPts val="400"/>
+                <a:spcPts val="1600"/>
               </a:spcAft>
-              <a:defRPr sz="1300">
-                <a:solidFill>
-                  <a:srgbClr val="636E77"/>
-                </a:solidFill>
-                <a:latin typeface="Calibri"/>
-              </a:defRPr>
             </a:pPr>
             <a:r>
-              <a:rPr>
-                <a:latin typeface="Calibri"/>
-              </a:rPr>
-              <a:t>–  SQS is at-least-once - never claim exactly-once processing anywhere</a:t>
+              <a:rPr sz="1450" b="1" i="0">
+                <a:solidFill>
+                  <a:srgbClr val="C97A1A"/>
+                </a:solidFill>
+                <a:latin typeface="Segoe UI"/>
+              </a:rPr>
+              <a:t>▸  </a:t>
+            </a:r>
+            <a:r>
+              <a:rPr sz="1450" b="1" i="0">
+                <a:solidFill>
+                  <a:srgbClr val="14253A"/>
+                </a:solidFill>
+                <a:latin typeface="Segoe UI"/>
+              </a:rPr>
+              <a:t>One shared pipeline behind both entry points</a:t>
+            </a:r>
+            <a:r>
+              <a:rPr sz="1450" b="0" i="0">
+                <a:solidFill>
+                  <a:srgbClr val="1E242B"/>
+                </a:solidFill>
+                <a:latin typeface="Segoe UI"/>
+              </a:rPr>
+              <a:t> — one code path to trust and test</a:t>
             </a:r>
           </a:p>
           <a:p>
             <a:pPr>
+              <a:lnSpc>
+                <a:spcPct val="110000"/>
+              </a:lnSpc>
               <a:spcAft>
-                <a:spcPts val="400"/>
+                <a:spcPts val="1600"/>
               </a:spcAft>
-              <a:defRPr sz="1300">
-                <a:solidFill>
-                  <a:srgbClr val="636E77"/>
-                </a:solidFill>
-                <a:latin typeface="Calibri"/>
-              </a:defRPr>
             </a:pPr>
             <a:r>
-              <a:rPr>
-                <a:latin typeface="Calibri"/>
-              </a:rPr>
-              <a:t>–  An LLM call and a database commit can't be made atomic - don't pretend otherwise</a:t>
-            </a:r>
-          </a:p>
-          <a:p>
-            <a:pPr>
-              <a:spcAft>
-                <a:spcPts val="400"/>
-              </a:spcAft>
-              <a:defRPr sz="1300">
-                <a:solidFill>
-                  <a:srgbClr val="636E77"/>
-                </a:solidFill>
-                <a:latin typeface="Calibri"/>
-              </a:defRPr>
-            </a:pPr>
-            <a:r>
-              <a:rPr>
-                <a:latin typeface="Calibri"/>
-              </a:rPr>
-              <a:t>–  Keep the take-home right-sized - no CI, no service mesh, no ORM, no new database</a:t>
-            </a:r>
-          </a:p>
-        </p:txBody>
-      </p:sp>
-      <p:sp>
-        <p:nvSpPr>
-          <p:cNvPr id="7" name="TextBox 6"/>
+              <a:rPr sz="1450" b="1" i="0">
+                <a:solidFill>
+                  <a:srgbClr val="C97A1A"/>
+                </a:solidFill>
+                <a:latin typeface="Segoe UI"/>
+              </a:rPr>
+              <a:t>▸  </a:t>
+            </a:r>
+            <a:r>
+              <a:rPr sz="1450" b="1" i="0">
+                <a:solidFill>
+                  <a:srgbClr val="14253A"/>
+                </a:solidFill>
+                <a:latin typeface="Segoe UI"/>
+              </a:rPr>
+              <a:t>Designed around two honest constraints</a:t>
+            </a:r>
+            <a:r>
+              <a:rPr sz="1450" b="0" i="0">
+                <a:solidFill>
+                  <a:srgbClr val="1E242B"/>
+                </a:solidFill>
+                <a:latin typeface="Segoe UI"/>
+              </a:rPr>
+              <a:t> — SQS is at-least-once, and an LLM call can't be made atomic with a DB commit</a:t>
+            </a:r>
+          </a:p>
+        </p:txBody>
+      </p:sp>
+      <p:sp>
+        <p:nvSpPr>
+          <p:cNvPr id="13" name="Rectangle 12"/>
+          <p:cNvSpPr/>
+          <p:nvPr/>
+        </p:nvSpPr>
+        <p:spPr>
+          <a:xfrm>
+            <a:off x="640080" y="6272784"/>
+            <a:ext cx="10911535" cy="9525"/>
+          </a:xfrm>
+          <a:prstGeom prst="rect">
+            <a:avLst/>
+          </a:prstGeom>
+          <a:solidFill>
+            <a:srgbClr val="E1E5EA"/>
+          </a:solidFill>
+          <a:ln>
+            <a:noFill/>
+          </a:ln>
+          <a:effectLst/>
+        </p:spPr>
+        <p:style>
+          <a:lnRef idx="1">
+            <a:schemeClr val="accent1"/>
+          </a:lnRef>
+          <a:fillRef idx="3">
+            <a:schemeClr val="accent1"/>
+          </a:fillRef>
+          <a:effectRef idx="2">
+            <a:schemeClr val="accent1"/>
+          </a:effectRef>
+          <a:fontRef idx="minor">
+            <a:schemeClr val="lt1"/>
+          </a:fontRef>
+        </p:style>
+        <p:txBody>
+          <a:bodyPr rtlCol="0" anchor="ctr"/>
+          <a:lstStyle/>
+          <a:p>
+            <a:pPr algn="ctr"/>
+          </a:p>
+        </p:txBody>
+      </p:sp>
+      <p:sp>
+        <p:nvSpPr>
+          <p:cNvPr id="14" name="TextBox 13"/>
           <p:cNvSpPr txBox="1"/>
           <p:nvPr/>
         </p:nvSpPr>
         <p:spPr>
           <a:xfrm>
-            <a:off x="548640" y="6492240"/>
-            <a:ext cx="9144000" cy="274320"/>
+            <a:off x="640080" y="6382512"/>
+            <a:ext cx="7315200" cy="292608"/>
           </a:xfrm>
           <a:prstGeom prst="rect">
             <a:avLst/>
@@ -6582,19 +5936,49 @@
           </a:bodyPr>
           <a:lstStyle/>
           <a:p>
-            <a:pPr>
-              <a:defRPr sz="1000">
-                <a:solidFill>
-                  <a:srgbClr val="636E77"/>
-                </a:solidFill>
-                <a:latin typeface="Calibri"/>
-              </a:defRPr>
-            </a:pPr>
-            <a:r>
-              <a:rPr>
-                <a:latin typeface="Calibri"/>
-              </a:rPr>
-              <a:t>ConvoScore  ·  Assignment scope</a:t>
+            <a:r>
+              <a:rPr sz="1000" b="0" i="0">
+                <a:solidFill>
+                  <a:srgbClr val="626E79"/>
+                </a:solidFill>
+                <a:latin typeface="Segoe UI"/>
+              </a:rPr>
+              <a:t>ConvoScore  ·  Overview</a:t>
+            </a:r>
+          </a:p>
+        </p:txBody>
+      </p:sp>
+      <p:sp>
+        <p:nvSpPr>
+          <p:cNvPr id="15" name="TextBox 14"/>
+          <p:cNvSpPr txBox="1"/>
+          <p:nvPr/>
+        </p:nvSpPr>
+        <p:spPr>
+          <a:xfrm>
+            <a:off x="10362895" y="6382512"/>
+            <a:ext cx="1188720" cy="292608"/>
+          </a:xfrm>
+          <a:prstGeom prst="rect">
+            <a:avLst/>
+          </a:prstGeom>
+          <a:noFill/>
+        </p:spPr>
+        <p:txBody>
+          <a:bodyPr wrap="none">
+            <a:spAutoFit/>
+          </a:bodyPr>
+          <a:lstStyle/>
+          <a:p>
+            <a:pPr algn="r"/>
+            <a:r>
+              <a:rPr sz="1000" b="0" i="0">
+                <a:solidFill>
+                  <a:srgbClr val="B7C2CC"/>
+                </a:solidFill>
+                <a:latin typeface="Segoe UI"/>
+              </a:rPr>
+              <a:t>02 / 10</a:t>
             </a:r>
           </a:p>
         </p:txBody>
@@ -6613,7 +5997,7 @@
     <p:bg>
       <p:bgPr>
         <a:solidFill>
-          <a:srgbClr val="F6F7F9"/>
+          <a:srgbClr val="F7F8FA"/>
         </a:solidFill>
         <a:effectLst/>
       </p:bgPr>
@@ -6633,8 +6017,8 @@
         </p:nvSpPr>
         <p:spPr>
           <a:xfrm>
-            <a:off x="548640" y="320040"/>
-            <a:ext cx="11064240" cy="365760"/>
+            <a:off x="640080" y="384048"/>
+            <a:ext cx="9601200" cy="292608"/>
           </a:xfrm>
           <a:prstGeom prst="rect">
             <a:avLst/>
@@ -6647,17 +6031,12 @@
           </a:bodyPr>
           <a:lstStyle/>
           <a:p>
-            <a:pPr>
-              <a:defRPr sz="1300" b="1">
-                <a:solidFill>
-                  <a:srgbClr val="1F8A8A"/>
-                </a:solidFill>
-                <a:latin typeface="Calibri"/>
-              </a:defRPr>
-            </a:pPr>
-            <a:r>
-              <a:rPr>
-                <a:latin typeface="Calibri"/>
+            <a:r>
+              <a:rPr sz="1250" b="1" i="0" spc="160">
+                <a:solidFill>
+                  <a:srgbClr val="168A86"/>
+                </a:solidFill>
+                <a:latin typeface="Segoe UI"/>
               </a:rPr>
               <a:t>ARCHITECTURE</a:t>
             </a:r>
@@ -6672,8 +6051,8 @@
         </p:nvSpPr>
         <p:spPr>
           <a:xfrm>
-            <a:off x="502920" y="621792"/>
-            <a:ext cx="11155680" cy="822960"/>
+            <a:off x="612647" y="658368"/>
+            <a:ext cx="10607040" cy="640080"/>
           </a:xfrm>
           <a:prstGeom prst="rect">
             <a:avLst/>
@@ -6686,19 +6065,14 @@
           </a:bodyPr>
           <a:lstStyle/>
           <a:p>
-            <a:pPr>
-              <a:defRPr sz="3000" b="1">
-                <a:solidFill>
-                  <a:srgbClr val="162A3E"/>
-                </a:solidFill>
-                <a:latin typeface="Calibri"/>
-              </a:defRPr>
-            </a:pPr>
-            <a:r>
-              <a:rPr>
-                <a:latin typeface="Calibri"/>
-              </a:rPr>
-              <a:t>Both ingestion paths, one shared pipeline</a:t>
+            <a:r>
+              <a:rPr sz="2700" b="1" i="0">
+                <a:solidFill>
+                  <a:srgbClr val="14253A"/>
+                </a:solidFill>
+                <a:latin typeface="Segoe UI"/>
+              </a:rPr>
+              <a:t>One pipeline, two doors in</a:t>
             </a:r>
           </a:p>
         </p:txBody>
@@ -6711,18 +6085,19 @@
         </p:nvSpPr>
         <p:spPr>
           <a:xfrm>
-            <a:off x="548640" y="1371600"/>
-            <a:ext cx="1828800" cy="38100"/>
+            <a:off x="640080" y="1353312"/>
+            <a:ext cx="1051560" cy="38100"/>
           </a:xfrm>
           <a:prstGeom prst="rect">
             <a:avLst/>
           </a:prstGeom>
           <a:solidFill>
-            <a:srgbClr val="1F8A8A"/>
+            <a:srgbClr val="168A86"/>
           </a:solidFill>
           <a:ln>
             <a:noFill/>
           </a:ln>
+          <a:effectLst/>
         </p:spPr>
         <p:style>
           <a:lnRef idx="1">
@@ -6754,19 +6129,19 @@
         </p:nvSpPr>
         <p:spPr>
           <a:xfrm>
-            <a:off x="640080" y="1828800"/>
-            <a:ext cx="1828800" cy="914400"/>
+            <a:off x="640080" y="2011680"/>
+            <a:ext cx="1691640" cy="731520"/>
           </a:xfrm>
           <a:prstGeom prst="roundRect">
-            <a:avLst/>
+            <a:avLst>
+              <a:gd name="adj" fmla="val 12000"/>
+            </a:avLst>
           </a:prstGeom>
           <a:solidFill>
-            <a:srgbClr val="1F8A8A"/>
+            <a:srgbClr val="168A86"/>
           </a:solidFill>
           <a:ln>
-            <a:solidFill>
-              <a:srgbClr val="1F8A8A"/>
-            </a:solidFill>
+            <a:noFill/>
           </a:ln>
           <a:effectLst/>
         </p:spPr>
@@ -6785,29 +6160,23 @@
           </a:fontRef>
         </p:style>
         <p:txBody>
-          <a:bodyPr rtlCol="0" anchor="ctr" wrap="square"/>
+          <a:bodyPr rtlCol="0" anchor="ctr" wrap="square" lIns="50800" rIns="50800"/>
           <a:lstStyle/>
           <a:p>
             <a:pPr algn="ctr">
-              <a:defRPr sz="1300" b="1">
+              <a:lnSpc>
+                <a:spcPct val="100000"/>
+              </a:lnSpc>
+            </a:pPr>
+            <a:r>
+              <a:rPr sz="1250" b="1" i="0">
                 <a:solidFill>
                   <a:srgbClr val="FFFFFF"/>
                 </a:solidFill>
-                <a:latin typeface="Calibri"/>
-              </a:defRPr>
-            </a:pPr>
-            <a:r>
-              <a:rPr>
-                <a:latin typeface="Calibri"/>
-              </a:rPr>
-              <a:t>API</a:t>
-            </a:r>
-            <a:br/>
-            <a:r>
-              <a:rPr>
-                <a:latin typeface="Calibri"/>
-              </a:rPr>
-              <a:t>POST /conversations</a:t>
+                <a:latin typeface="Segoe UI"/>
+              </a:rPr>
+              <a:t>API
+POST /conversations</a:t>
             </a:r>
           </a:p>
         </p:txBody>
@@ -6820,19 +6189,19 @@
         </p:nvSpPr>
         <p:spPr>
           <a:xfrm>
-            <a:off x="640080" y="3017520"/>
-            <a:ext cx="1828800" cy="914400"/>
+            <a:off x="640080" y="3063240"/>
+            <a:ext cx="1691640" cy="731520"/>
           </a:xfrm>
           <a:prstGeom prst="roundRect">
-            <a:avLst/>
+            <a:avLst>
+              <a:gd name="adj" fmla="val 12000"/>
+            </a:avLst>
           </a:prstGeom>
           <a:solidFill>
-            <a:srgbClr val="C77B1E"/>
+            <a:srgbClr val="C97A1A"/>
           </a:solidFill>
           <a:ln>
-            <a:solidFill>
-              <a:srgbClr val="C77B1E"/>
-            </a:solidFill>
+            <a:noFill/>
           </a:ln>
           <a:effectLst/>
         </p:spPr>
@@ -6851,29 +6220,23 @@
           </a:fontRef>
         </p:style>
         <p:txBody>
-          <a:bodyPr rtlCol="0" anchor="ctr" wrap="square"/>
+          <a:bodyPr rtlCol="0" anchor="ctr" wrap="square" lIns="50800" rIns="50800"/>
           <a:lstStyle/>
           <a:p>
             <a:pPr algn="ctr">
-              <a:defRPr sz="1300" b="1">
+              <a:lnSpc>
+                <a:spcPct val="100000"/>
+              </a:lnSpc>
+            </a:pPr>
+            <a:r>
+              <a:rPr sz="1250" b="1" i="0">
                 <a:solidFill>
                   <a:srgbClr val="FFFFFF"/>
                 </a:solidFill>
-                <a:latin typeface="Calibri"/>
-              </a:defRPr>
-            </a:pPr>
-            <a:r>
-              <a:rPr>
-                <a:latin typeface="Calibri"/>
-              </a:rPr>
-              <a:t>Direct upload</a:t>
-            </a:r>
-            <a:br/>
-            <a:r>
-              <a:rPr>
-                <a:latin typeface="Calibri"/>
-              </a:rPr>
-              <a:t>(no API call)</a:t>
+                <a:latin typeface="Segoe UI"/>
+              </a:rPr>
+              <a:t>Direct upload
+(no API call)</a:t>
             </a:r>
           </a:p>
         </p:txBody>
@@ -6886,19 +6249,19 @@
         </p:nvSpPr>
         <p:spPr>
           <a:xfrm>
-            <a:off x="3017520" y="2423160"/>
-            <a:ext cx="1737360" cy="914400"/>
+            <a:off x="2880360" y="2542032"/>
+            <a:ext cx="1554480" cy="777240"/>
           </a:xfrm>
           <a:prstGeom prst="roundRect">
-            <a:avLst/>
+            <a:avLst>
+              <a:gd name="adj" fmla="val 12000"/>
+            </a:avLst>
           </a:prstGeom>
           <a:solidFill>
-            <a:srgbClr val="3D5366"/>
+            <a:srgbClr val="4A5A6A"/>
           </a:solidFill>
           <a:ln>
-            <a:solidFill>
-              <a:srgbClr val="3D5366"/>
-            </a:solidFill>
+            <a:noFill/>
           </a:ln>
           <a:effectLst/>
         </p:spPr>
@@ -6917,29 +6280,23 @@
           </a:fontRef>
         </p:style>
         <p:txBody>
-          <a:bodyPr rtlCol="0" anchor="ctr" wrap="square"/>
+          <a:bodyPr rtlCol="0" anchor="ctr" wrap="square" lIns="50800" rIns="50800"/>
           <a:lstStyle/>
           <a:p>
             <a:pPr algn="ctr">
-              <a:defRPr sz="1300" b="1">
+              <a:lnSpc>
+                <a:spcPct val="100000"/>
+              </a:lnSpc>
+            </a:pPr>
+            <a:r>
+              <a:rPr sz="1250" b="1" i="0">
                 <a:solidFill>
                   <a:srgbClr val="FFFFFF"/>
                 </a:solidFill>
-                <a:latin typeface="Calibri"/>
-              </a:defRPr>
-            </a:pPr>
-            <a:r>
-              <a:rPr>
-                <a:latin typeface="Calibri"/>
-              </a:rPr>
-              <a:t>S3</a:t>
-            </a:r>
-            <a:br/>
-            <a:r>
-              <a:rPr>
-                <a:latin typeface="Calibri"/>
-              </a:rPr>
-              <a:t>incoming/{id}.json</a:t>
+                <a:latin typeface="Segoe UI"/>
+              </a:rPr>
+              <a:t>S3
+incoming/{id}.json</a:t>
             </a:r>
           </a:p>
         </p:txBody>
@@ -6952,19 +6309,19 @@
         </p:nvSpPr>
         <p:spPr>
           <a:xfrm>
-            <a:off x="5257800" y="2423160"/>
-            <a:ext cx="1737360" cy="914400"/>
+            <a:off x="4892040" y="2542032"/>
+            <a:ext cx="1554480" cy="777240"/>
           </a:xfrm>
           <a:prstGeom prst="roundRect">
-            <a:avLst/>
+            <a:avLst>
+              <a:gd name="adj" fmla="val 12000"/>
+            </a:avLst>
           </a:prstGeom>
           <a:solidFill>
-            <a:srgbClr val="3D5366"/>
+            <a:srgbClr val="4A5A6A"/>
           </a:solidFill>
           <a:ln>
-            <a:solidFill>
-              <a:srgbClr val="3D5366"/>
-            </a:solidFill>
+            <a:noFill/>
           </a:ln>
           <a:effectLst/>
         </p:spPr>
@@ -6983,29 +6340,23 @@
           </a:fontRef>
         </p:style>
         <p:txBody>
-          <a:bodyPr rtlCol="0" anchor="ctr" wrap="square"/>
+          <a:bodyPr rtlCol="0" anchor="ctr" wrap="square" lIns="50800" rIns="50800"/>
           <a:lstStyle/>
           <a:p>
             <a:pPr algn="ctr">
-              <a:defRPr sz="1300" b="1">
+              <a:lnSpc>
+                <a:spcPct val="100000"/>
+              </a:lnSpc>
+            </a:pPr>
+            <a:r>
+              <a:rPr sz="1250" b="1" i="0">
                 <a:solidFill>
                   <a:srgbClr val="FFFFFF"/>
                 </a:solidFill>
-                <a:latin typeface="Calibri"/>
-              </a:defRPr>
-            </a:pPr>
-            <a:r>
-              <a:rPr>
-                <a:latin typeface="Calibri"/>
-              </a:rPr>
-              <a:t>SQS</a:t>
-            </a:r>
-            <a:br/>
-            <a:r>
-              <a:rPr>
-                <a:latin typeface="Calibri"/>
-              </a:rPr>
-              <a:t>processing queue</a:t>
+                <a:latin typeface="Segoe UI"/>
+              </a:rPr>
+              <a:t>SQS
+processing queue</a:t>
             </a:r>
           </a:p>
         </p:txBody>
@@ -7018,19 +6369,19 @@
         </p:nvSpPr>
         <p:spPr>
           <a:xfrm>
-            <a:off x="7498079" y="2423160"/>
-            <a:ext cx="1463040" cy="914400"/>
+            <a:off x="6903720" y="2542032"/>
+            <a:ext cx="1417320" cy="777240"/>
           </a:xfrm>
           <a:prstGeom prst="roundRect">
-            <a:avLst/>
+            <a:avLst>
+              <a:gd name="adj" fmla="val 12000"/>
+            </a:avLst>
           </a:prstGeom>
           <a:solidFill>
-            <a:srgbClr val="1F8A8A"/>
+            <a:srgbClr val="0F6664"/>
           </a:solidFill>
           <a:ln>
-            <a:solidFill>
-              <a:srgbClr val="1F8A8A"/>
-            </a:solidFill>
+            <a:noFill/>
           </a:ln>
           <a:effectLst/>
         </p:spPr>
@@ -7049,20 +6400,20 @@
           </a:fontRef>
         </p:style>
         <p:txBody>
-          <a:bodyPr rtlCol="0" anchor="ctr" wrap="square"/>
+          <a:bodyPr rtlCol="0" anchor="ctr" wrap="square" lIns="50800" rIns="50800"/>
           <a:lstStyle/>
           <a:p>
             <a:pPr algn="ctr">
-              <a:defRPr sz="1300" b="1">
+              <a:lnSpc>
+                <a:spcPct val="100000"/>
+              </a:lnSpc>
+            </a:pPr>
+            <a:r>
+              <a:rPr sz="1250" b="1" i="0">
                 <a:solidFill>
                   <a:srgbClr val="FFFFFF"/>
                 </a:solidFill>
-                <a:latin typeface="Calibri"/>
-              </a:defRPr>
-            </a:pPr>
-            <a:r>
-              <a:rPr>
-                <a:latin typeface="Calibri"/>
+                <a:latin typeface="Segoe UI"/>
               </a:rPr>
               <a:t>Worker</a:t>
             </a:r>
@@ -7077,19 +6428,19 @@
         </p:nvSpPr>
         <p:spPr>
           <a:xfrm>
-            <a:off x="7498079" y="3749039"/>
-            <a:ext cx="1463040" cy="777240"/>
+            <a:off x="6903720" y="3703320"/>
+            <a:ext cx="1417320" cy="685800"/>
           </a:xfrm>
           <a:prstGeom prst="roundRect">
-            <a:avLst/>
+            <a:avLst>
+              <a:gd name="adj" fmla="val 12000"/>
+            </a:avLst>
           </a:prstGeom>
           <a:solidFill>
-            <a:srgbClr val="162A3E"/>
+            <a:srgbClr val="14253A"/>
           </a:solidFill>
           <a:ln>
-            <a:solidFill>
-              <a:srgbClr val="162A3E"/>
-            </a:solidFill>
+            <a:noFill/>
           </a:ln>
           <a:effectLst/>
         </p:spPr>
@@ -7108,20 +6459,20 @@
           </a:fontRef>
         </p:style>
         <p:txBody>
-          <a:bodyPr rtlCol="0" anchor="ctr" wrap="square"/>
+          <a:bodyPr rtlCol="0" anchor="ctr" wrap="square" lIns="50800" rIns="50800"/>
           <a:lstStyle/>
           <a:p>
             <a:pPr algn="ctr">
-              <a:defRPr sz="1300" b="1">
+              <a:lnSpc>
+                <a:spcPct val="100000"/>
+              </a:lnSpc>
+            </a:pPr>
+            <a:r>
+              <a:rPr sz="1250" b="1" i="0">
                 <a:solidFill>
                   <a:srgbClr val="FFFFFF"/>
                 </a:solidFill>
-                <a:latin typeface="Calibri"/>
-              </a:defRPr>
-            </a:pPr>
-            <a:r>
-              <a:rPr>
-                <a:latin typeface="Calibri"/>
+                <a:latin typeface="Segoe UI"/>
               </a:rPr>
               <a:t>OpenAI</a:t>
             </a:r>
@@ -7136,19 +6487,19 @@
         </p:nvSpPr>
         <p:spPr>
           <a:xfrm>
-            <a:off x="9464040" y="2423160"/>
-            <a:ext cx="1463040" cy="914400"/>
+            <a:off x="8823960" y="2542032"/>
+            <a:ext cx="1508760" cy="777240"/>
           </a:xfrm>
           <a:prstGeom prst="roundRect">
-            <a:avLst/>
+            <a:avLst>
+              <a:gd name="adj" fmla="val 12000"/>
+            </a:avLst>
           </a:prstGeom>
           <a:solidFill>
-            <a:srgbClr val="162A3E"/>
+            <a:srgbClr val="14253A"/>
           </a:solidFill>
           <a:ln>
-            <a:solidFill>
-              <a:srgbClr val="162A3E"/>
-            </a:solidFill>
+            <a:noFill/>
           </a:ln>
           <a:effectLst/>
         </p:spPr>
@@ -7167,20 +6518,20 @@
           </a:fontRef>
         </p:style>
         <p:txBody>
-          <a:bodyPr rtlCol="0" anchor="ctr" wrap="square"/>
+          <a:bodyPr rtlCol="0" anchor="ctr" wrap="square" lIns="50800" rIns="50800"/>
           <a:lstStyle/>
           <a:p>
             <a:pPr algn="ctr">
-              <a:defRPr sz="1300" b="1">
+              <a:lnSpc>
+                <a:spcPct val="100000"/>
+              </a:lnSpc>
+            </a:pPr>
+            <a:r>
+              <a:rPr sz="1250" b="1" i="0">
                 <a:solidFill>
                   <a:srgbClr val="FFFFFF"/>
                 </a:solidFill>
-                <a:latin typeface="Calibri"/>
-              </a:defRPr>
-            </a:pPr>
-            <a:r>
-              <a:rPr>
-                <a:latin typeface="Calibri"/>
+                <a:latin typeface="Segoe UI"/>
               </a:rPr>
               <a:t>PostgreSQL</a:t>
             </a:r>
@@ -7195,19 +6546,19 @@
         </p:nvSpPr>
         <p:spPr>
           <a:xfrm>
-            <a:off x="9464040" y="3749039"/>
-            <a:ext cx="1463040" cy="777240"/>
+            <a:off x="8823960" y="3703320"/>
+            <a:ext cx="1508760" cy="685800"/>
           </a:xfrm>
           <a:prstGeom prst="roundRect">
-            <a:avLst/>
+            <a:avLst>
+              <a:gd name="adj" fmla="val 12000"/>
+            </a:avLst>
           </a:prstGeom>
           <a:solidFill>
-            <a:srgbClr val="3D5366"/>
+            <a:srgbClr val="4A5A6A"/>
           </a:solidFill>
           <a:ln>
-            <a:solidFill>
-              <a:srgbClr val="3D5366"/>
-            </a:solidFill>
+            <a:noFill/>
           </a:ln>
           <a:effectLst/>
         </p:spPr>
@@ -7226,20 +6577,20 @@
           </a:fontRef>
         </p:style>
         <p:txBody>
-          <a:bodyPr rtlCol="0" anchor="ctr" wrap="square"/>
+          <a:bodyPr rtlCol="0" anchor="ctr" wrap="square" lIns="50800" rIns="50800"/>
           <a:lstStyle/>
           <a:p>
             <a:pPr algn="ctr">
-              <a:defRPr sz="1300" b="1">
+              <a:lnSpc>
+                <a:spcPct val="100000"/>
+              </a:lnSpc>
+            </a:pPr>
+            <a:r>
+              <a:rPr sz="1250" b="1" i="0">
                 <a:solidFill>
                   <a:srgbClr val="FFFFFF"/>
                 </a:solidFill>
-                <a:latin typeface="Calibri"/>
-              </a:defRPr>
-            </a:pPr>
-            <a:r>
-              <a:rPr>
-                <a:latin typeface="Calibri"/>
+                <a:latin typeface="Segoe UI"/>
               </a:rPr>
               <a:t>Review UI</a:t>
             </a:r>
@@ -7254,19 +6605,19 @@
         </p:nvSpPr>
         <p:spPr>
           <a:xfrm>
-            <a:off x="5257800" y="4023360"/>
-            <a:ext cx="1737360" cy="777240"/>
+            <a:off x="4892040" y="3703320"/>
+            <a:ext cx="1554480" cy="685800"/>
           </a:xfrm>
           <a:prstGeom prst="roundRect">
-            <a:avLst/>
+            <a:avLst>
+              <a:gd name="adj" fmla="val 12000"/>
+            </a:avLst>
           </a:prstGeom>
           <a:solidFill>
-            <a:srgbClr val="8B2E2E"/>
+            <a:srgbClr val="9E3533"/>
           </a:solidFill>
           <a:ln>
-            <a:solidFill>
-              <a:srgbClr val="8B2E2E"/>
-            </a:solidFill>
+            <a:noFill/>
           </a:ln>
           <a:effectLst/>
         </p:spPr>
@@ -7285,20 +6636,20 @@
           </a:fontRef>
         </p:style>
         <p:txBody>
-          <a:bodyPr rtlCol="0" anchor="ctr" wrap="square"/>
+          <a:bodyPr rtlCol="0" anchor="ctr" wrap="square" lIns="50800" rIns="50800"/>
           <a:lstStyle/>
           <a:p>
             <a:pPr algn="ctr">
-              <a:defRPr sz="1300" b="1">
+              <a:lnSpc>
+                <a:spcPct val="100000"/>
+              </a:lnSpc>
+            </a:pPr>
+            <a:r>
+              <a:rPr sz="1250" b="1" i="0">
                 <a:solidFill>
                   <a:srgbClr val="FFFFFF"/>
                 </a:solidFill>
-                <a:latin typeface="Calibri"/>
-              </a:defRPr>
-            </a:pPr>
-            <a:r>
-              <a:rPr>
-                <a:latin typeface="Calibri"/>
+                <a:latin typeface="Segoe UI"/>
               </a:rPr>
               <a:t>SQS DLQ</a:t>
             </a:r>
@@ -7312,18 +6663,17 @@
           <p:nvPr/>
         </p:nvCxnSpPr>
         <p:spPr>
-          <a:xfrm>
-            <a:off x="2468880" y="2286000"/>
-            <a:ext cx="548640" cy="502920"/>
+          <a:xfrm flipV="1">
+            <a:off x="1485900" y="1755648"/>
+            <a:ext cx="0" cy="256032"/>
           </a:xfrm>
           <a:prstGeom prst="line">
             <a:avLst/>
           </a:prstGeom>
-          <a:ln w="25400">
+          <a:ln w="20320">
             <a:solidFill>
-              <a:srgbClr val="3D5366"/>
+              <a:srgbClr val="C97A1A"/>
             </a:solidFill>
-            <a:tailEnd type="triangle" w="med" len="med"/>
           </a:ln>
         </p:spPr>
         <p:style>
@@ -7348,18 +6698,17 @@
           <p:nvPr/>
         </p:nvCxnSpPr>
         <p:spPr>
-          <a:xfrm flipV="1">
-            <a:off x="2468880" y="2971800"/>
-            <a:ext cx="548640" cy="502920"/>
+          <a:xfrm>
+            <a:off x="1485900" y="1755648"/>
+            <a:ext cx="8092440" cy="0"/>
           </a:xfrm>
           <a:prstGeom prst="line">
             <a:avLst/>
           </a:prstGeom>
-          <a:ln w="25400">
+          <a:ln w="20320">
             <a:solidFill>
-              <a:srgbClr val="3D5366"/>
+              <a:srgbClr val="C97A1A"/>
             </a:solidFill>
-            <a:tailEnd type="triangle" w="med" len="med"/>
           </a:ln>
         </p:spPr>
         <p:style>
@@ -7385,15 +6734,15 @@
         </p:nvCxnSpPr>
         <p:spPr>
           <a:xfrm>
-            <a:off x="4754880" y="2880360"/>
-            <a:ext cx="502920" cy="0"/>
+            <a:off x="9578340" y="1755648"/>
+            <a:ext cx="0" cy="786384"/>
           </a:xfrm>
           <a:prstGeom prst="line">
             <a:avLst/>
           </a:prstGeom>
-          <a:ln w="25400">
+          <a:ln w="20320">
             <a:solidFill>
-              <a:srgbClr val="3D5366"/>
+              <a:srgbClr val="C97A1A"/>
             </a:solidFill>
             <a:tailEnd type="triangle" w="med" len="med"/>
           </a:ln>
@@ -7421,8 +6770,8 @@
         </p:nvSpPr>
         <p:spPr>
           <a:xfrm>
-            <a:off x="4000500" y="2587752"/>
-            <a:ext cx="2011680" cy="292608"/>
+            <a:off x="3977639" y="1481328"/>
+            <a:ext cx="3108960" cy="274320"/>
           </a:xfrm>
           <a:prstGeom prst="rect">
             <a:avLst/>
@@ -7435,19 +6784,15 @@
           </a:bodyPr>
           <a:lstStyle/>
           <a:p>
-            <a:pPr algn="ctr">
-              <a:defRPr sz="1050">
-                <a:solidFill>
-                  <a:srgbClr val="636E77"/>
-                </a:solidFill>
-                <a:latin typeface="Calibri"/>
-              </a:defRPr>
-            </a:pPr>
-            <a:r>
-              <a:rPr>
-                <a:latin typeface="Calibri"/>
-              </a:rPr>
-              <a:t>S3 event</a:t>
+            <a:pPr algn="ctr"/>
+            <a:r>
+              <a:rPr sz="1050" b="0" i="0">
+                <a:solidFill>
+                  <a:srgbClr val="C97A1A"/>
+                </a:solidFill>
+                <a:latin typeface="Segoe UI"/>
+              </a:rPr>
+              <a:t>pending row (sync write)</a:t>
             </a:r>
           </a:p>
         </p:txBody>
@@ -7460,240 +6805,15 @@
         </p:nvCxnSpPr>
         <p:spPr>
           <a:xfrm>
-            <a:off x="6995160" y="2880360"/>
-            <a:ext cx="502919" cy="0"/>
+            <a:off x="2331720" y="2377440"/>
+            <a:ext cx="548640" cy="553211"/>
           </a:xfrm>
           <a:prstGeom prst="line">
             <a:avLst/>
           </a:prstGeom>
-          <a:ln w="25400">
+          <a:ln w="22225">
             <a:solidFill>
-              <a:srgbClr val="3D5366"/>
-            </a:solidFill>
-            <a:tailEnd type="triangle" w="med" len="med"/>
-          </a:ln>
-        </p:spPr>
-        <p:style>
-          <a:lnRef idx="2">
-            <a:schemeClr val="accent1"/>
-          </a:lnRef>
-          <a:fillRef idx="0">
-            <a:schemeClr val="accent1"/>
-          </a:fillRef>
-          <a:effectRef idx="1">
-            <a:schemeClr val="accent1"/>
-          </a:effectRef>
-          <a:fontRef idx="minor">
-            <a:schemeClr val="tx1"/>
-          </a:fontRef>
-        </p:style>
-      </p:cxnSp>
-      <p:sp>
-        <p:nvSpPr>
-          <p:cNvPr id="19" name="TextBox 18"/>
-          <p:cNvSpPr txBox="1"/>
-          <p:nvPr/>
-        </p:nvSpPr>
-        <p:spPr>
-          <a:xfrm>
-            <a:off x="6240779" y="2587752"/>
-            <a:ext cx="2011680" cy="292608"/>
-          </a:xfrm>
-          <a:prstGeom prst="rect">
-            <a:avLst/>
-          </a:prstGeom>
-          <a:noFill/>
-        </p:spPr>
-        <p:txBody>
-          <a:bodyPr wrap="none" lIns="0" rIns="0">
-            <a:spAutoFit/>
-          </a:bodyPr>
-          <a:lstStyle/>
-          <a:p>
-            <a:pPr algn="ctr">
-              <a:defRPr sz="1050">
-                <a:solidFill>
-                  <a:srgbClr val="636E77"/>
-                </a:solidFill>
-                <a:latin typeface="Calibri"/>
-              </a:defRPr>
-            </a:pPr>
-            <a:r>
-              <a:rPr>
-                <a:latin typeface="Calibri"/>
-              </a:rPr>
-              <a:t>poll</a:t>
-            </a:r>
-          </a:p>
-        </p:txBody>
-      </p:sp>
-      <p:cxnSp>
-        <p:nvCxnSpPr>
-          <p:cNvPr id="20" name="Connector 19"/>
-          <p:cNvCxnSpPr/>
-          <p:nvPr/>
-        </p:nvCxnSpPr>
-        <p:spPr>
-          <a:xfrm>
-            <a:off x="8229600" y="3337560"/>
-            <a:ext cx="0" cy="411479"/>
-          </a:xfrm>
-          <a:prstGeom prst="line">
-            <a:avLst/>
-          </a:prstGeom>
-          <a:ln w="25400">
-            <a:solidFill>
-              <a:srgbClr val="3D5366"/>
-            </a:solidFill>
-            <a:tailEnd type="triangle" w="med" len="med"/>
-          </a:ln>
-        </p:spPr>
-        <p:style>
-          <a:lnRef idx="2">
-            <a:schemeClr val="accent1"/>
-          </a:lnRef>
-          <a:fillRef idx="0">
-            <a:schemeClr val="accent1"/>
-          </a:fillRef>
-          <a:effectRef idx="1">
-            <a:schemeClr val="accent1"/>
-          </a:effectRef>
-          <a:fontRef idx="minor">
-            <a:schemeClr val="tx1"/>
-          </a:fontRef>
-        </p:style>
-      </p:cxnSp>
-      <p:sp>
-        <p:nvSpPr>
-          <p:cNvPr id="21" name="TextBox 20"/>
-          <p:cNvSpPr txBox="1"/>
-          <p:nvPr/>
-        </p:nvSpPr>
-        <p:spPr>
-          <a:xfrm>
-            <a:off x="7223760" y="3250692"/>
-            <a:ext cx="2011680" cy="292608"/>
-          </a:xfrm>
-          <a:prstGeom prst="rect">
-            <a:avLst/>
-          </a:prstGeom>
-          <a:noFill/>
-        </p:spPr>
-        <p:txBody>
-          <a:bodyPr wrap="none" lIns="0" rIns="0">
-            <a:spAutoFit/>
-          </a:bodyPr>
-          <a:lstStyle/>
-          <a:p>
-            <a:pPr algn="ctr">
-              <a:defRPr sz="1050">
-                <a:solidFill>
-                  <a:srgbClr val="636E77"/>
-                </a:solidFill>
-                <a:latin typeface="Calibri"/>
-              </a:defRPr>
-            </a:pPr>
-            <a:r>
-              <a:rPr>
-                <a:latin typeface="Calibri"/>
-              </a:rPr>
-              <a:t>score</a:t>
-            </a:r>
-          </a:p>
-        </p:txBody>
-      </p:sp>
-      <p:cxnSp>
-        <p:nvCxnSpPr>
-          <p:cNvPr id="22" name="Connector 21"/>
-          <p:cNvCxnSpPr/>
-          <p:nvPr/>
-        </p:nvCxnSpPr>
-        <p:spPr>
-          <a:xfrm>
-            <a:off x="8961120" y="2880360"/>
-            <a:ext cx="502920" cy="0"/>
-          </a:xfrm>
-          <a:prstGeom prst="line">
-            <a:avLst/>
-          </a:prstGeom>
-          <a:ln w="25400">
-            <a:solidFill>
-              <a:srgbClr val="3D5366"/>
-            </a:solidFill>
-            <a:tailEnd type="triangle" w="med" len="med"/>
-          </a:ln>
-        </p:spPr>
-        <p:style>
-          <a:lnRef idx="2">
-            <a:schemeClr val="accent1"/>
-          </a:lnRef>
-          <a:fillRef idx="0">
-            <a:schemeClr val="accent1"/>
-          </a:fillRef>
-          <a:effectRef idx="1">
-            <a:schemeClr val="accent1"/>
-          </a:effectRef>
-          <a:fontRef idx="minor">
-            <a:schemeClr val="tx1"/>
-          </a:fontRef>
-        </p:style>
-      </p:cxnSp>
-      <p:sp>
-        <p:nvSpPr>
-          <p:cNvPr id="23" name="TextBox 22"/>
-          <p:cNvSpPr txBox="1"/>
-          <p:nvPr/>
-        </p:nvSpPr>
-        <p:spPr>
-          <a:xfrm>
-            <a:off x="8206740" y="2587752"/>
-            <a:ext cx="2011680" cy="292608"/>
-          </a:xfrm>
-          <a:prstGeom prst="rect">
-            <a:avLst/>
-          </a:prstGeom>
-          <a:noFill/>
-        </p:spPr>
-        <p:txBody>
-          <a:bodyPr wrap="none" lIns="0" rIns="0">
-            <a:spAutoFit/>
-          </a:bodyPr>
-          <a:lstStyle/>
-          <a:p>
-            <a:pPr algn="ctr">
-              <a:defRPr sz="1050">
-                <a:solidFill>
-                  <a:srgbClr val="636E77"/>
-                </a:solidFill>
-                <a:latin typeface="Calibri"/>
-              </a:defRPr>
-            </a:pPr>
-            <a:r>
-              <a:rPr>
-                <a:latin typeface="Calibri"/>
-              </a:rPr>
-              <a:t>store</a:t>
-            </a:r>
-          </a:p>
-        </p:txBody>
-      </p:sp>
-      <p:cxnSp>
-        <p:nvCxnSpPr>
-          <p:cNvPr id="24" name="Connector 23"/>
-          <p:cNvCxnSpPr/>
-          <p:nvPr/>
-        </p:nvCxnSpPr>
-        <p:spPr>
-          <a:xfrm>
-            <a:off x="10195560" y="3337560"/>
-            <a:ext cx="0" cy="411479"/>
-          </a:xfrm>
-          <a:prstGeom prst="line">
-            <a:avLst/>
-          </a:prstGeom>
-          <a:ln w="25400">
-            <a:solidFill>
-              <a:srgbClr val="3D5366"/>
+              <a:srgbClr val="4A5A6A"/>
             </a:solidFill>
             <a:tailEnd type="triangle" w="med" len="med"/>
           </a:ln>
@@ -7715,23 +6835,22 @@
       </p:cxnSp>
       <p:cxnSp>
         <p:nvCxnSpPr>
-          <p:cNvPr id="25" name="Connector 24"/>
+          <p:cNvPr id="19" name="Connector 18"/>
           <p:cNvCxnSpPr/>
           <p:nvPr/>
         </p:nvCxnSpPr>
         <p:spPr>
-          <a:xfrm>
-            <a:off x="6126480" y="3337560"/>
-            <a:ext cx="0" cy="685800"/>
+          <a:xfrm flipV="1">
+            <a:off x="2331720" y="2931566"/>
+            <a:ext cx="548640" cy="497434"/>
           </a:xfrm>
           <a:prstGeom prst="line">
             <a:avLst/>
           </a:prstGeom>
-          <a:ln w="25400">
+          <a:ln w="22225">
             <a:solidFill>
-              <a:srgbClr val="8B2E2E"/>
+              <a:srgbClr val="4A5A6A"/>
             </a:solidFill>
-            <a:prstDash val="dash"/>
             <a:tailEnd type="triangle" w="med" len="med"/>
           </a:ln>
         </p:spPr>
@@ -7750,16 +6869,52 @@
           </a:fontRef>
         </p:style>
       </p:cxnSp>
-      <p:sp>
-        <p:nvSpPr>
-          <p:cNvPr id="26" name="TextBox 25"/>
+      <p:cxnSp>
+        <p:nvCxnSpPr>
+          <p:cNvPr id="20" name="Connector 19"/>
+          <p:cNvCxnSpPr/>
+          <p:nvPr/>
+        </p:nvCxnSpPr>
+        <p:spPr>
+          <a:xfrm>
+            <a:off x="4434840" y="2930651"/>
+            <a:ext cx="457200" cy="0"/>
+          </a:xfrm>
+          <a:prstGeom prst="line">
+            <a:avLst/>
+          </a:prstGeom>
+          <a:ln w="22225">
+            <a:solidFill>
+              <a:srgbClr val="4A5A6A"/>
+            </a:solidFill>
+            <a:tailEnd type="triangle" w="med" len="med"/>
+          </a:ln>
+        </p:spPr>
+        <p:style>
+          <a:lnRef idx="2">
+            <a:schemeClr val="accent1"/>
+          </a:lnRef>
+          <a:fillRef idx="0">
+            <a:schemeClr val="accent1"/>
+          </a:fillRef>
+          <a:effectRef idx="1">
+            <a:schemeClr val="accent1"/>
+          </a:effectRef>
+          <a:fontRef idx="minor">
+            <a:schemeClr val="tx1"/>
+          </a:fontRef>
+        </p:style>
+      </p:cxnSp>
+      <p:sp>
+        <p:nvSpPr>
+          <p:cNvPr id="21" name="TextBox 20"/>
           <p:cNvSpPr txBox="1"/>
           <p:nvPr/>
         </p:nvSpPr>
         <p:spPr>
           <a:xfrm>
-            <a:off x="5120640" y="3387852"/>
-            <a:ext cx="2011680" cy="292608"/>
+            <a:off x="3657599" y="2286000"/>
+            <a:ext cx="2011680" cy="274320"/>
           </a:xfrm>
           <a:prstGeom prst="rect">
             <a:avLst/>
@@ -7772,23 +6927,197 @@
           </a:bodyPr>
           <a:lstStyle/>
           <a:p>
-            <a:pPr algn="ctr">
-              <a:defRPr sz="1050">
-                <a:solidFill>
-                  <a:srgbClr val="636E77"/>
-                </a:solidFill>
-                <a:latin typeface="Calibri"/>
-              </a:defRPr>
-            </a:pPr>
-            <a:r>
-              <a:rPr>
-                <a:latin typeface="Calibri"/>
-              </a:rPr>
-              <a:t>after retries</a:t>
-            </a:r>
-          </a:p>
-        </p:txBody>
-      </p:sp>
+            <a:pPr algn="ctr"/>
+            <a:r>
+              <a:rPr sz="1050" b="0" i="0">
+                <a:solidFill>
+                  <a:srgbClr val="626E79"/>
+                </a:solidFill>
+                <a:latin typeface="Segoe UI"/>
+              </a:rPr>
+              <a:t>S3 event</a:t>
+            </a:r>
+          </a:p>
+        </p:txBody>
+      </p:sp>
+      <p:cxnSp>
+        <p:nvCxnSpPr>
+          <p:cNvPr id="22" name="Connector 21"/>
+          <p:cNvCxnSpPr/>
+          <p:nvPr/>
+        </p:nvCxnSpPr>
+        <p:spPr>
+          <a:xfrm>
+            <a:off x="6446520" y="2930651"/>
+            <a:ext cx="457200" cy="0"/>
+          </a:xfrm>
+          <a:prstGeom prst="line">
+            <a:avLst/>
+          </a:prstGeom>
+          <a:ln w="22225">
+            <a:solidFill>
+              <a:srgbClr val="4A5A6A"/>
+            </a:solidFill>
+            <a:tailEnd type="triangle" w="med" len="med"/>
+          </a:ln>
+        </p:spPr>
+        <p:style>
+          <a:lnRef idx="2">
+            <a:schemeClr val="accent1"/>
+          </a:lnRef>
+          <a:fillRef idx="0">
+            <a:schemeClr val="accent1"/>
+          </a:fillRef>
+          <a:effectRef idx="1">
+            <a:schemeClr val="accent1"/>
+          </a:effectRef>
+          <a:fontRef idx="minor">
+            <a:schemeClr val="tx1"/>
+          </a:fontRef>
+        </p:style>
+      </p:cxnSp>
+      <p:sp>
+        <p:nvSpPr>
+          <p:cNvPr id="23" name="TextBox 22"/>
+          <p:cNvSpPr txBox="1"/>
+          <p:nvPr/>
+        </p:nvSpPr>
+        <p:spPr>
+          <a:xfrm>
+            <a:off x="5669279" y="2286000"/>
+            <a:ext cx="2011680" cy="274320"/>
+          </a:xfrm>
+          <a:prstGeom prst="rect">
+            <a:avLst/>
+          </a:prstGeom>
+          <a:noFill/>
+        </p:spPr>
+        <p:txBody>
+          <a:bodyPr wrap="none" lIns="0" rIns="0">
+            <a:spAutoFit/>
+          </a:bodyPr>
+          <a:lstStyle/>
+          <a:p>
+            <a:pPr algn="ctr"/>
+            <a:r>
+              <a:rPr sz="1050" b="0" i="0">
+                <a:solidFill>
+                  <a:srgbClr val="626E79"/>
+                </a:solidFill>
+                <a:latin typeface="Segoe UI"/>
+              </a:rPr>
+              <a:t>poll</a:t>
+            </a:r>
+          </a:p>
+        </p:txBody>
+      </p:sp>
+      <p:cxnSp>
+        <p:nvCxnSpPr>
+          <p:cNvPr id="24" name="Connector 23"/>
+          <p:cNvCxnSpPr/>
+          <p:nvPr/>
+        </p:nvCxnSpPr>
+        <p:spPr>
+          <a:xfrm>
+            <a:off x="7612379" y="3319272"/>
+            <a:ext cx="0" cy="384048"/>
+          </a:xfrm>
+          <a:prstGeom prst="line">
+            <a:avLst/>
+          </a:prstGeom>
+          <a:ln w="22225">
+            <a:solidFill>
+              <a:srgbClr val="0F6664"/>
+            </a:solidFill>
+            <a:tailEnd type="triangle" w="med" len="med"/>
+          </a:ln>
+        </p:spPr>
+        <p:style>
+          <a:lnRef idx="2">
+            <a:schemeClr val="accent1"/>
+          </a:lnRef>
+          <a:fillRef idx="0">
+            <a:schemeClr val="accent1"/>
+          </a:fillRef>
+          <a:effectRef idx="1">
+            <a:schemeClr val="accent1"/>
+          </a:effectRef>
+          <a:fontRef idx="minor">
+            <a:schemeClr val="tx1"/>
+          </a:fontRef>
+        </p:style>
+      </p:cxnSp>
+      <p:sp>
+        <p:nvSpPr>
+          <p:cNvPr id="25" name="TextBox 24"/>
+          <p:cNvSpPr txBox="1"/>
+          <p:nvPr/>
+        </p:nvSpPr>
+        <p:spPr>
+          <a:xfrm>
+            <a:off x="7676387" y="3310128"/>
+            <a:ext cx="1005840" cy="274320"/>
+          </a:xfrm>
+          <a:prstGeom prst="rect">
+            <a:avLst/>
+          </a:prstGeom>
+          <a:noFill/>
+        </p:spPr>
+        <p:txBody>
+          <a:bodyPr wrap="none" lIns="0" rIns="0">
+            <a:spAutoFit/>
+          </a:bodyPr>
+          <a:lstStyle/>
+          <a:p>
+            <a:pPr algn="ctr"/>
+            <a:r>
+              <a:rPr sz="1050" b="0" i="0">
+                <a:solidFill>
+                  <a:srgbClr val="626E79"/>
+                </a:solidFill>
+                <a:latin typeface="Segoe UI"/>
+              </a:rPr>
+              <a:t>score</a:t>
+            </a:r>
+          </a:p>
+        </p:txBody>
+      </p:sp>
+      <p:cxnSp>
+        <p:nvCxnSpPr>
+          <p:cNvPr id="26" name="Connector 25"/>
+          <p:cNvCxnSpPr/>
+          <p:nvPr/>
+        </p:nvCxnSpPr>
+        <p:spPr>
+          <a:xfrm>
+            <a:off x="8321040" y="2930651"/>
+            <a:ext cx="502920" cy="0"/>
+          </a:xfrm>
+          <a:prstGeom prst="line">
+            <a:avLst/>
+          </a:prstGeom>
+          <a:ln w="22225">
+            <a:solidFill>
+              <a:srgbClr val="0F6664"/>
+            </a:solidFill>
+            <a:tailEnd type="triangle" w="med" len="med"/>
+          </a:ln>
+        </p:spPr>
+        <p:style>
+          <a:lnRef idx="2">
+            <a:schemeClr val="accent1"/>
+          </a:lnRef>
+          <a:fillRef idx="0">
+            <a:schemeClr val="accent1"/>
+          </a:fillRef>
+          <a:effectRef idx="1">
+            <a:schemeClr val="accent1"/>
+          </a:effectRef>
+          <a:fontRef idx="minor">
+            <a:schemeClr val="tx1"/>
+          </a:fontRef>
+        </p:style>
+      </p:cxnSp>
       <p:sp>
         <p:nvSpPr>
           <p:cNvPr id="27" name="TextBox 26"/>
@@ -7797,8 +7126,359 @@
         </p:nvSpPr>
         <p:spPr>
           <a:xfrm>
-            <a:off x="548640" y="5120640"/>
-            <a:ext cx="10972800" cy="4754880"/>
+            <a:off x="7566660" y="2286000"/>
+            <a:ext cx="2011680" cy="274320"/>
+          </a:xfrm>
+          <a:prstGeom prst="rect">
+            <a:avLst/>
+          </a:prstGeom>
+          <a:noFill/>
+        </p:spPr>
+        <p:txBody>
+          <a:bodyPr wrap="none" lIns="0" rIns="0">
+            <a:spAutoFit/>
+          </a:bodyPr>
+          <a:lstStyle/>
+          <a:p>
+            <a:pPr algn="ctr"/>
+            <a:r>
+              <a:rPr sz="1050" b="0" i="0">
+                <a:solidFill>
+                  <a:srgbClr val="626E79"/>
+                </a:solidFill>
+                <a:latin typeface="Segoe UI"/>
+              </a:rPr>
+              <a:t>store result</a:t>
+            </a:r>
+          </a:p>
+        </p:txBody>
+      </p:sp>
+      <p:cxnSp>
+        <p:nvCxnSpPr>
+          <p:cNvPr id="28" name="Connector 27"/>
+          <p:cNvCxnSpPr/>
+          <p:nvPr/>
+        </p:nvCxnSpPr>
+        <p:spPr>
+          <a:xfrm>
+            <a:off x="9578340" y="3319272"/>
+            <a:ext cx="0" cy="384048"/>
+          </a:xfrm>
+          <a:prstGeom prst="line">
+            <a:avLst/>
+          </a:prstGeom>
+          <a:ln w="22225">
+            <a:solidFill>
+              <a:srgbClr val="4A5A6A"/>
+            </a:solidFill>
+            <a:tailEnd type="triangle" w="med" len="med"/>
+          </a:ln>
+        </p:spPr>
+        <p:style>
+          <a:lnRef idx="2">
+            <a:schemeClr val="accent1"/>
+          </a:lnRef>
+          <a:fillRef idx="0">
+            <a:schemeClr val="accent1"/>
+          </a:fillRef>
+          <a:effectRef idx="1">
+            <a:schemeClr val="accent1"/>
+          </a:effectRef>
+          <a:fontRef idx="minor">
+            <a:schemeClr val="tx1"/>
+          </a:fontRef>
+        </p:style>
+      </p:cxnSp>
+      <p:cxnSp>
+        <p:nvCxnSpPr>
+          <p:cNvPr id="29" name="Connector 28"/>
+          <p:cNvCxnSpPr/>
+          <p:nvPr/>
+        </p:nvCxnSpPr>
+        <p:spPr>
+          <a:xfrm>
+            <a:off x="5669279" y="3319272"/>
+            <a:ext cx="0" cy="384048"/>
+          </a:xfrm>
+          <a:prstGeom prst="line">
+            <a:avLst/>
+          </a:prstGeom>
+          <a:ln w="22225">
+            <a:solidFill>
+              <a:srgbClr val="9E3533"/>
+            </a:solidFill>
+            <a:prstDash val="dash"/>
+            <a:tailEnd type="triangle" w="med" len="med"/>
+          </a:ln>
+        </p:spPr>
+        <p:style>
+          <a:lnRef idx="2">
+            <a:schemeClr val="accent1"/>
+          </a:lnRef>
+          <a:fillRef idx="0">
+            <a:schemeClr val="accent1"/>
+          </a:fillRef>
+          <a:effectRef idx="1">
+            <a:schemeClr val="accent1"/>
+          </a:effectRef>
+          <a:fontRef idx="minor">
+            <a:schemeClr val="tx1"/>
+          </a:fontRef>
+        </p:style>
+      </p:cxnSp>
+      <p:sp>
+        <p:nvSpPr>
+          <p:cNvPr id="30" name="TextBox 29"/>
+          <p:cNvSpPr txBox="1"/>
+          <p:nvPr/>
+        </p:nvSpPr>
+        <p:spPr>
+          <a:xfrm>
+            <a:off x="5714999" y="3456432"/>
+            <a:ext cx="1463040" cy="274320"/>
+          </a:xfrm>
+          <a:prstGeom prst="rect">
+            <a:avLst/>
+          </a:prstGeom>
+          <a:noFill/>
+        </p:spPr>
+        <p:txBody>
+          <a:bodyPr wrap="none" lIns="0" rIns="0">
+            <a:spAutoFit/>
+          </a:bodyPr>
+          <a:lstStyle/>
+          <a:p>
+            <a:pPr algn="ctr"/>
+            <a:r>
+              <a:rPr sz="1050" b="0" i="0">
+                <a:solidFill>
+                  <a:srgbClr val="9E3533"/>
+                </a:solidFill>
+                <a:latin typeface="Segoe UI"/>
+              </a:rPr>
+              <a:t>after 3 attempts</a:t>
+            </a:r>
+          </a:p>
+        </p:txBody>
+      </p:sp>
+      <p:cxnSp>
+        <p:nvCxnSpPr>
+          <p:cNvPr id="31" name="Connector 30"/>
+          <p:cNvCxnSpPr/>
+          <p:nvPr/>
+        </p:nvCxnSpPr>
+        <p:spPr>
+          <a:xfrm>
+            <a:off x="640080" y="4636008"/>
+            <a:ext cx="292608" cy="0"/>
+          </a:xfrm>
+          <a:prstGeom prst="line">
+            <a:avLst/>
+          </a:prstGeom>
+          <a:ln w="25400">
+            <a:solidFill>
+              <a:srgbClr val="4A5A6A"/>
+            </a:solidFill>
+          </a:ln>
+        </p:spPr>
+        <p:style>
+          <a:lnRef idx="2">
+            <a:schemeClr val="accent1"/>
+          </a:lnRef>
+          <a:fillRef idx="0">
+            <a:schemeClr val="accent1"/>
+          </a:fillRef>
+          <a:effectRef idx="1">
+            <a:schemeClr val="accent1"/>
+          </a:effectRef>
+          <a:fontRef idx="minor">
+            <a:schemeClr val="tx1"/>
+          </a:fontRef>
+        </p:style>
+      </p:cxnSp>
+      <p:sp>
+        <p:nvSpPr>
+          <p:cNvPr id="32" name="TextBox 31"/>
+          <p:cNvSpPr txBox="1"/>
+          <p:nvPr/>
+        </p:nvSpPr>
+        <p:spPr>
+          <a:xfrm>
+            <a:off x="1024127" y="4498848"/>
+            <a:ext cx="2862072" cy="274320"/>
+          </a:xfrm>
+          <a:prstGeom prst="rect">
+            <a:avLst/>
+          </a:prstGeom>
+          <a:noFill/>
+        </p:spPr>
+        <p:txBody>
+          <a:bodyPr wrap="none">
+            <a:spAutoFit/>
+          </a:bodyPr>
+          <a:lstStyle/>
+          <a:p>
+            <a:r>
+              <a:rPr sz="1050" b="0" i="0">
+                <a:solidFill>
+                  <a:srgbClr val="626E79"/>
+                </a:solidFill>
+                <a:latin typeface="Segoe UI"/>
+              </a:rPr>
+              <a:t>pipeline flow</a:t>
+            </a:r>
+          </a:p>
+        </p:txBody>
+      </p:sp>
+      <p:cxnSp>
+        <p:nvCxnSpPr>
+          <p:cNvPr id="33" name="Connector 32"/>
+          <p:cNvCxnSpPr/>
+          <p:nvPr/>
+        </p:nvCxnSpPr>
+        <p:spPr>
+          <a:xfrm>
+            <a:off x="3886200" y="4636008"/>
+            <a:ext cx="292608" cy="0"/>
+          </a:xfrm>
+          <a:prstGeom prst="line">
+            <a:avLst/>
+          </a:prstGeom>
+          <a:ln w="25400">
+            <a:solidFill>
+              <a:srgbClr val="C97A1A"/>
+            </a:solidFill>
+          </a:ln>
+        </p:spPr>
+        <p:style>
+          <a:lnRef idx="2">
+            <a:schemeClr val="accent1"/>
+          </a:lnRef>
+          <a:fillRef idx="0">
+            <a:schemeClr val="accent1"/>
+          </a:fillRef>
+          <a:effectRef idx="1">
+            <a:schemeClr val="accent1"/>
+          </a:effectRef>
+          <a:fontRef idx="minor">
+            <a:schemeClr val="tx1"/>
+          </a:fontRef>
+        </p:style>
+      </p:cxnSp>
+      <p:sp>
+        <p:nvSpPr>
+          <p:cNvPr id="34" name="TextBox 33"/>
+          <p:cNvSpPr txBox="1"/>
+          <p:nvPr/>
+        </p:nvSpPr>
+        <p:spPr>
+          <a:xfrm>
+            <a:off x="4270248" y="4498848"/>
+            <a:ext cx="2862072" cy="274320"/>
+          </a:xfrm>
+          <a:prstGeom prst="rect">
+            <a:avLst/>
+          </a:prstGeom>
+          <a:noFill/>
+        </p:spPr>
+        <p:txBody>
+          <a:bodyPr wrap="none">
+            <a:spAutoFit/>
+          </a:bodyPr>
+          <a:lstStyle/>
+          <a:p>
+            <a:r>
+              <a:rPr sz="1050" b="0" i="0">
+                <a:solidFill>
+                  <a:srgbClr val="626E79"/>
+                </a:solidFill>
+                <a:latin typeface="Segoe UI"/>
+              </a:rPr>
+              <a:t>pending-row write (sync)</a:t>
+            </a:r>
+          </a:p>
+        </p:txBody>
+      </p:sp>
+      <p:cxnSp>
+        <p:nvCxnSpPr>
+          <p:cNvPr id="35" name="Connector 34"/>
+          <p:cNvCxnSpPr/>
+          <p:nvPr/>
+        </p:nvCxnSpPr>
+        <p:spPr>
+          <a:xfrm>
+            <a:off x="7132320" y="4636008"/>
+            <a:ext cx="292607" cy="0"/>
+          </a:xfrm>
+          <a:prstGeom prst="line">
+            <a:avLst/>
+          </a:prstGeom>
+          <a:ln w="25400">
+            <a:solidFill>
+              <a:srgbClr val="9E3533"/>
+            </a:solidFill>
+            <a:prstDash val="dash"/>
+          </a:ln>
+        </p:spPr>
+        <p:style>
+          <a:lnRef idx="2">
+            <a:schemeClr val="accent1"/>
+          </a:lnRef>
+          <a:fillRef idx="0">
+            <a:schemeClr val="accent1"/>
+          </a:fillRef>
+          <a:effectRef idx="1">
+            <a:schemeClr val="accent1"/>
+          </a:effectRef>
+          <a:fontRef idx="minor">
+            <a:schemeClr val="tx1"/>
+          </a:fontRef>
+        </p:style>
+      </p:cxnSp>
+      <p:sp>
+        <p:nvSpPr>
+          <p:cNvPr id="36" name="TextBox 35"/>
+          <p:cNvSpPr txBox="1"/>
+          <p:nvPr/>
+        </p:nvSpPr>
+        <p:spPr>
+          <a:xfrm>
+            <a:off x="7516368" y="4498848"/>
+            <a:ext cx="2862072" cy="274320"/>
+          </a:xfrm>
+          <a:prstGeom prst="rect">
+            <a:avLst/>
+          </a:prstGeom>
+          <a:noFill/>
+        </p:spPr>
+        <p:txBody>
+          <a:bodyPr wrap="none">
+            <a:spAutoFit/>
+          </a:bodyPr>
+          <a:lstStyle/>
+          <a:p>
+            <a:r>
+              <a:rPr sz="1050" b="0" i="0">
+                <a:solidFill>
+                  <a:srgbClr val="626E79"/>
+                </a:solidFill>
+                <a:latin typeface="Segoe UI"/>
+              </a:rPr>
+              <a:t>exhausted after retries</a:t>
+            </a:r>
+          </a:p>
+        </p:txBody>
+      </p:sp>
+      <p:sp>
+        <p:nvSpPr>
+          <p:cNvPr id="37" name="TextBox 36"/>
+          <p:cNvSpPr txBox="1"/>
+          <p:nvPr/>
+        </p:nvSpPr>
+        <p:spPr>
+          <a:xfrm>
+            <a:off x="640080" y="4937760"/>
+            <a:ext cx="10881360" cy="1188720"/>
           </a:xfrm>
           <a:prstGeom prst="rect">
             <a:avLst/>
@@ -7812,73 +7492,162 @@
           <a:lstStyle/>
           <a:p>
             <a:pPr>
+              <a:lnSpc>
+                <a:spcPct val="110000"/>
+              </a:lnSpc>
               <a:spcAft>
-                <a:spcPts val="1000"/>
+                <a:spcPts val="800"/>
               </a:spcAft>
-              <a:defRPr sz="1450">
-                <a:solidFill>
-                  <a:srgbClr val="202428"/>
-                </a:solidFill>
-                <a:latin typeface="Calibri"/>
-              </a:defRPr>
             </a:pPr>
             <a:r>
-              <a:rPr>
-                <a:latin typeface="Calibri"/>
-              </a:rPr>
-              <a:t>•  The API never calls OpenAI - it validates, writes to Postgres as 'pending', puts the object in S3, returns 202</a:t>
+              <a:rPr sz="1350" b="1" i="0">
+                <a:solidFill>
+                  <a:srgbClr val="168A86"/>
+                </a:solidFill>
+                <a:latin typeface="Segoe UI"/>
+              </a:rPr>
+              <a:t>▸  </a:t>
+            </a:r>
+            <a:r>
+              <a:rPr sz="1350" b="1" i="0">
+                <a:solidFill>
+                  <a:srgbClr val="14253A"/>
+                </a:solidFill>
+                <a:latin typeface="Segoe UI"/>
+              </a:rPr>
+              <a:t>The API never calls OpenAI</a:t>
+            </a:r>
+            <a:r>
+              <a:rPr sz="1350" b="0" i="0">
+                <a:solidFill>
+                  <a:srgbClr val="1E242B"/>
+                </a:solidFill>
+                <a:latin typeface="Segoe UI"/>
+              </a:rPr>
+              <a:t> — it writes a pending row to Postgres, puts the object in S3, and returns 202</a:t>
             </a:r>
           </a:p>
           <a:p>
             <a:pPr>
+              <a:lnSpc>
+                <a:spcPct val="110000"/>
+              </a:lnSpc>
               <a:spcAft>
-                <a:spcPts val="1000"/>
+                <a:spcPts val="800"/>
               </a:spcAft>
-              <a:defRPr sz="1450">
-                <a:solidFill>
-                  <a:srgbClr val="202428"/>
-                </a:solidFill>
-                <a:latin typeface="Calibri"/>
-              </a:defRPr>
             </a:pPr>
             <a:r>
-              <a:rPr>
-                <a:latin typeface="Calibri"/>
-              </a:rPr>
-              <a:t>•  A direct upload skips the API entirely - the same S3 -&gt; SQS -&gt; worker path picks it up</a:t>
+              <a:rPr sz="1350" b="1" i="0">
+                <a:solidFill>
+                  <a:srgbClr val="168A86"/>
+                </a:solidFill>
+                <a:latin typeface="Segoe UI"/>
+              </a:rPr>
+              <a:t>▸  </a:t>
+            </a:r>
+            <a:r>
+              <a:rPr sz="1350" b="1" i="0">
+                <a:solidFill>
+                  <a:srgbClr val="14253A"/>
+                </a:solidFill>
+                <a:latin typeface="Segoe UI"/>
+              </a:rPr>
+              <a:t>A direct upload skips the API entirely</a:t>
+            </a:r>
+            <a:r>
+              <a:rPr sz="1350" b="0" i="0">
+                <a:solidFill>
+                  <a:srgbClr val="1E242B"/>
+                </a:solidFill>
+                <a:latin typeface="Segoe UI"/>
+              </a:rPr>
+              <a:t> — the same S3 → SQS → worker path picks it up</a:t>
             </a:r>
           </a:p>
           <a:p>
             <a:pPr>
+              <a:lnSpc>
+                <a:spcPct val="110000"/>
+              </a:lnSpc>
               <a:spcAft>
-                <a:spcPts val="1000"/>
+                <a:spcPts val="800"/>
               </a:spcAft>
-              <a:defRPr sz="1450">
-                <a:solidFill>
-                  <a:srgbClr val="202428"/>
-                </a:solidFill>
-                <a:latin typeface="Calibri"/>
-              </a:defRPr>
             </a:pPr>
             <a:r>
-              <a:rPr>
-                <a:latin typeface="Calibri"/>
-              </a:rPr>
-              <a:t>•  One validation contract, one claim/scoring path, one place the DLQ can be reached from</a:t>
-            </a:r>
-          </a:p>
-        </p:txBody>
-      </p:sp>
-      <p:sp>
-        <p:nvSpPr>
-          <p:cNvPr id="28" name="TextBox 27"/>
+              <a:rPr sz="1350" b="1" i="0">
+                <a:solidFill>
+                  <a:srgbClr val="168A86"/>
+                </a:solidFill>
+                <a:latin typeface="Segoe UI"/>
+              </a:rPr>
+              <a:t>▸  </a:t>
+            </a:r>
+            <a:r>
+              <a:rPr sz="1350" b="0" i="0">
+                <a:solidFill>
+                  <a:srgbClr val="1E242B"/>
+                </a:solidFill>
+                <a:latin typeface="Segoe UI"/>
+              </a:rPr>
+              <a:t>One validation contract, one scoring path, one place the DLQ can be reached from</a:t>
+            </a:r>
+          </a:p>
+        </p:txBody>
+      </p:sp>
+      <p:sp>
+        <p:nvSpPr>
+          <p:cNvPr id="38" name="Rectangle 37"/>
+          <p:cNvSpPr/>
+          <p:nvPr/>
+        </p:nvSpPr>
+        <p:spPr>
+          <a:xfrm>
+            <a:off x="640080" y="6272784"/>
+            <a:ext cx="10911535" cy="9525"/>
+          </a:xfrm>
+          <a:prstGeom prst="rect">
+            <a:avLst/>
+          </a:prstGeom>
+          <a:solidFill>
+            <a:srgbClr val="E1E5EA"/>
+          </a:solidFill>
+          <a:ln>
+            <a:noFill/>
+          </a:ln>
+          <a:effectLst/>
+        </p:spPr>
+        <p:style>
+          <a:lnRef idx="1">
+            <a:schemeClr val="accent1"/>
+          </a:lnRef>
+          <a:fillRef idx="3">
+            <a:schemeClr val="accent1"/>
+          </a:fillRef>
+          <a:effectRef idx="2">
+            <a:schemeClr val="accent1"/>
+          </a:effectRef>
+          <a:fontRef idx="minor">
+            <a:schemeClr val="lt1"/>
+          </a:fontRef>
+        </p:style>
+        <p:txBody>
+          <a:bodyPr rtlCol="0" anchor="ctr"/>
+          <a:lstStyle/>
+          <a:p>
+            <a:pPr algn="ctr"/>
+          </a:p>
+        </p:txBody>
+      </p:sp>
+      <p:sp>
+        <p:nvSpPr>
+          <p:cNvPr id="39" name="TextBox 38"/>
           <p:cNvSpPr txBox="1"/>
           <p:nvPr/>
         </p:nvSpPr>
         <p:spPr>
           <a:xfrm>
-            <a:off x="548640" y="6492240"/>
-            <a:ext cx="9144000" cy="274320"/>
+            <a:off x="640080" y="6382512"/>
+            <a:ext cx="7315200" cy="292608"/>
           </a:xfrm>
           <a:prstGeom prst="rect">
             <a:avLst/>
@@ -7891,19 +7660,49 @@
           </a:bodyPr>
           <a:lstStyle/>
           <a:p>
-            <a:pPr>
-              <a:defRPr sz="1000">
-                <a:solidFill>
-                  <a:srgbClr val="636E77"/>
-                </a:solidFill>
-                <a:latin typeface="Calibri"/>
-              </a:defRPr>
-            </a:pPr>
-            <a:r>
-              <a:rPr>
-                <a:latin typeface="Calibri"/>
+            <a:r>
+              <a:rPr sz="1000" b="0" i="0">
+                <a:solidFill>
+                  <a:srgbClr val="626E79"/>
+                </a:solidFill>
+                <a:latin typeface="Segoe UI"/>
               </a:rPr>
               <a:t>ConvoScore  ·  Architecture</a:t>
+            </a:r>
+          </a:p>
+        </p:txBody>
+      </p:sp>
+      <p:sp>
+        <p:nvSpPr>
+          <p:cNvPr id="40" name="TextBox 39"/>
+          <p:cNvSpPr txBox="1"/>
+          <p:nvPr/>
+        </p:nvSpPr>
+        <p:spPr>
+          <a:xfrm>
+            <a:off x="10362895" y="6382512"/>
+            <a:ext cx="1188720" cy="292608"/>
+          </a:xfrm>
+          <a:prstGeom prst="rect">
+            <a:avLst/>
+          </a:prstGeom>
+          <a:noFill/>
+        </p:spPr>
+        <p:txBody>
+          <a:bodyPr wrap="none">
+            <a:spAutoFit/>
+          </a:bodyPr>
+          <a:lstStyle/>
+          <a:p>
+            <a:pPr algn="r"/>
+            <a:r>
+              <a:rPr sz="1000" b="0" i="0">
+                <a:solidFill>
+                  <a:srgbClr val="B7C2CC"/>
+                </a:solidFill>
+                <a:latin typeface="Segoe UI"/>
+              </a:rPr>
+              <a:t>03 / 10</a:t>
             </a:r>
           </a:p>
         </p:txBody>
@@ -7922,7 +7721,7 @@
     <p:bg>
       <p:bgPr>
         <a:solidFill>
-          <a:srgbClr val="F6F7F9"/>
+          <a:srgbClr val="F7F8FA"/>
         </a:solidFill>
         <a:effectLst/>
       </p:bgPr>
@@ -7942,8 +7741,8 @@
         </p:nvSpPr>
         <p:spPr>
           <a:xfrm>
-            <a:off x="548640" y="320040"/>
-            <a:ext cx="11064240" cy="365760"/>
+            <a:off x="640080" y="384048"/>
+            <a:ext cx="9601200" cy="292608"/>
           </a:xfrm>
           <a:prstGeom prst="rect">
             <a:avLst/>
@@ -7956,19 +7755,14 @@
           </a:bodyPr>
           <a:lstStyle/>
           <a:p>
-            <a:pPr>
-              <a:defRPr sz="1300" b="1">
-                <a:solidFill>
-                  <a:srgbClr val="1F8A8A"/>
-                </a:solidFill>
-                <a:latin typeface="Calibri"/>
-              </a:defRPr>
-            </a:pPr>
-            <a:r>
-              <a:rPr>
-                <a:latin typeface="Calibri"/>
-              </a:rPr>
-              <a:t>INGESTION PATH 1</a:t>
+            <a:r>
+              <a:rPr sz="1250" b="1" i="0" spc="160">
+                <a:solidFill>
+                  <a:srgbClr val="168A86"/>
+                </a:solidFill>
+                <a:latin typeface="Segoe UI"/>
+              </a:rPr>
+              <a:t>INGESTION</a:t>
             </a:r>
           </a:p>
         </p:txBody>
@@ -7981,8 +7775,8 @@
         </p:nvSpPr>
         <p:spPr>
           <a:xfrm>
-            <a:off x="502920" y="621792"/>
-            <a:ext cx="11155680" cy="822960"/>
+            <a:off x="612647" y="658368"/>
+            <a:ext cx="10607040" cy="640080"/>
           </a:xfrm>
           <a:prstGeom prst="rect">
             <a:avLst/>
@@ -7995,19 +7789,14 @@
           </a:bodyPr>
           <a:lstStyle/>
           <a:p>
-            <a:pPr>
-              <a:defRPr sz="3000" b="1">
-                <a:solidFill>
-                  <a:srgbClr val="162A3E"/>
-                </a:solidFill>
-                <a:latin typeface="Calibri"/>
-              </a:defRPr>
-            </a:pPr>
-            <a:r>
-              <a:rPr>
-                <a:latin typeface="Calibri"/>
-              </a:rPr>
-              <a:t>API ingestion, step by step</a:t>
+            <a:r>
+              <a:rPr sz="2700" b="1" i="0">
+                <a:solidFill>
+                  <a:srgbClr val="14253A"/>
+                </a:solidFill>
+                <a:latin typeface="Segoe UI"/>
+              </a:rPr>
+              <a:t>How conversations get in: two paths, one pipeline</a:t>
             </a:r>
           </a:p>
         </p:txBody>
@@ -8020,18 +7809,19 @@
         </p:nvSpPr>
         <p:spPr>
           <a:xfrm>
-            <a:off x="548640" y="1371600"/>
-            <a:ext cx="1828800" cy="38100"/>
+            <a:off x="640080" y="1353312"/>
+            <a:ext cx="1051560" cy="38100"/>
           </a:xfrm>
           <a:prstGeom prst="rect">
             <a:avLst/>
           </a:prstGeom>
           <a:solidFill>
-            <a:srgbClr val="1F8A8A"/>
+            <a:srgbClr val="168A86"/>
           </a:solidFill>
           <a:ln>
             <a:noFill/>
           </a:ln>
+          <a:effectLst/>
         </p:spPr>
         <p:style>
           <a:lnRef idx="1">
@@ -8057,14 +7847,193 @@
       </p:sp>
       <p:sp>
         <p:nvSpPr>
-          <p:cNvPr id="5" name="TextBox 4"/>
+          <p:cNvPr id="5" name="Rounded Rectangle 4"/>
+          <p:cNvSpPr/>
+          <p:nvPr/>
+        </p:nvSpPr>
+        <p:spPr>
+          <a:xfrm>
+            <a:off x="640080" y="1737360"/>
+            <a:ext cx="5074920" cy="3794760"/>
+          </a:xfrm>
+          <a:prstGeom prst="roundRect">
+            <a:avLst>
+              <a:gd name="adj" fmla="val 3500"/>
+            </a:avLst>
+          </a:prstGeom>
+          <a:solidFill>
+            <a:srgbClr val="FFFFFF"/>
+          </a:solidFill>
+          <a:ln w="9525">
+            <a:solidFill>
+              <a:srgbClr val="E1E5EA"/>
+            </a:solidFill>
+          </a:ln>
+          <a:effectLst/>
+        </p:spPr>
+        <p:style>
+          <a:lnRef idx="1">
+            <a:schemeClr val="accent1"/>
+          </a:lnRef>
+          <a:fillRef idx="3">
+            <a:schemeClr val="accent1"/>
+          </a:fillRef>
+          <a:effectRef idx="2">
+            <a:schemeClr val="accent1"/>
+          </a:effectRef>
+          <a:fontRef idx="minor">
+            <a:schemeClr val="lt1"/>
+          </a:fontRef>
+        </p:style>
+        <p:txBody>
+          <a:bodyPr rtlCol="0" anchor="ctr"/>
+          <a:lstStyle/>
+          <a:p>
+            <a:pPr algn="ctr"/>
+          </a:p>
+        </p:txBody>
+      </p:sp>
+      <p:sp>
+        <p:nvSpPr>
+          <p:cNvPr id="6" name="Rectangle 5"/>
+          <p:cNvSpPr/>
+          <p:nvPr/>
+        </p:nvSpPr>
+        <p:spPr>
+          <a:xfrm>
+            <a:off x="786384" y="1737360"/>
+            <a:ext cx="4782312" cy="40640"/>
+          </a:xfrm>
+          <a:prstGeom prst="rect">
+            <a:avLst/>
+          </a:prstGeom>
+          <a:solidFill>
+            <a:srgbClr val="168A86"/>
+          </a:solidFill>
+          <a:ln>
+            <a:noFill/>
+          </a:ln>
+          <a:effectLst/>
+        </p:spPr>
+        <p:style>
+          <a:lnRef idx="1">
+            <a:schemeClr val="accent1"/>
+          </a:lnRef>
+          <a:fillRef idx="3">
+            <a:schemeClr val="accent1"/>
+          </a:fillRef>
+          <a:effectRef idx="2">
+            <a:schemeClr val="accent1"/>
+          </a:effectRef>
+          <a:fontRef idx="minor">
+            <a:schemeClr val="lt1"/>
+          </a:fontRef>
+        </p:style>
+        <p:txBody>
+          <a:bodyPr rtlCol="0" anchor="ctr"/>
+          <a:lstStyle/>
+          <a:p>
+            <a:pPr algn="ctr"/>
+          </a:p>
+        </p:txBody>
+      </p:sp>
+      <p:sp>
+        <p:nvSpPr>
+          <p:cNvPr id="7" name="TextBox 6"/>
           <p:cNvSpPr txBox="1"/>
           <p:nvPr/>
         </p:nvSpPr>
         <p:spPr>
           <a:xfrm>
-            <a:off x="548640" y="1645920"/>
-            <a:ext cx="6400800" cy="4754880"/>
+            <a:off x="914400" y="1920240"/>
+            <a:ext cx="4572000" cy="365760"/>
+          </a:xfrm>
+          <a:prstGeom prst="rect">
+            <a:avLst/>
+          </a:prstGeom>
+          <a:noFill/>
+        </p:spPr>
+        <p:txBody>
+          <a:bodyPr wrap="none">
+            <a:spAutoFit/>
+          </a:bodyPr>
+          <a:lstStyle/>
+          <a:p>
+            <a:r>
+              <a:rPr sz="1600" b="1" i="0">
+                <a:solidFill>
+                  <a:srgbClr val="0F6664"/>
+                </a:solidFill>
+                <a:latin typeface="Segoe UI"/>
+              </a:rPr>
+              <a:t>Path 1 — API</a:t>
+            </a:r>
+          </a:p>
+        </p:txBody>
+      </p:sp>
+      <p:sp>
+        <p:nvSpPr>
+          <p:cNvPr id="8" name="Oval 7"/>
+          <p:cNvSpPr/>
+          <p:nvPr/>
+        </p:nvSpPr>
+        <p:spPr>
+          <a:xfrm>
+            <a:off x="914400" y="2450592"/>
+            <a:ext cx="329184" cy="329184"/>
+          </a:xfrm>
+          <a:prstGeom prst="ellipse">
+            <a:avLst/>
+          </a:prstGeom>
+          <a:solidFill>
+            <a:srgbClr val="168A86"/>
+          </a:solidFill>
+          <a:ln>
+            <a:noFill/>
+          </a:ln>
+          <a:effectLst/>
+        </p:spPr>
+        <p:style>
+          <a:lnRef idx="1">
+            <a:schemeClr val="accent1"/>
+          </a:lnRef>
+          <a:fillRef idx="3">
+            <a:schemeClr val="accent1"/>
+          </a:fillRef>
+          <a:effectRef idx="2">
+            <a:schemeClr val="accent1"/>
+          </a:effectRef>
+          <a:fontRef idx="minor">
+            <a:schemeClr val="lt1"/>
+          </a:fontRef>
+        </p:style>
+        <p:txBody>
+          <a:bodyPr rtlCol="0" anchor="ctr" wrap="none" lIns="0" rIns="0"/>
+          <a:lstStyle/>
+          <a:p>
+            <a:pPr algn="ctr"/>
+            <a:r>
+              <a:rPr sz="1300" b="1" i="0">
+                <a:solidFill>
+                  <a:srgbClr val="FFFFFF"/>
+                </a:solidFill>
+                <a:latin typeface="Segoe UI"/>
+              </a:rPr>
+              <a:t>1</a:t>
+            </a:r>
+          </a:p>
+        </p:txBody>
+      </p:sp>
+      <p:sp>
+        <p:nvSpPr>
+          <p:cNvPr id="9" name="TextBox 8"/>
+          <p:cNvSpPr txBox="1"/>
+          <p:nvPr/>
+        </p:nvSpPr>
+        <p:spPr>
+          <a:xfrm>
+            <a:off x="1389887" y="2368296"/>
+            <a:ext cx="4050791" cy="777240"/>
           </a:xfrm>
           <a:prstGeom prst="rect">
             <a:avLst/>
@@ -8078,130 +8047,308 @@
           <a:lstStyle/>
           <a:p>
             <a:pPr>
-              <a:spcAft>
-                <a:spcPts val="1000"/>
-              </a:spcAft>
-              <a:defRPr sz="1650">
-                <a:solidFill>
-                  <a:srgbClr val="202428"/>
-                </a:solidFill>
-                <a:latin typeface="Calibri"/>
-              </a:defRPr>
+              <a:lnSpc>
+                <a:spcPct val="105000"/>
+              </a:lnSpc>
             </a:pPr>
             <a:r>
-              <a:rPr>
-                <a:latin typeface="Calibri"/>
-              </a:rPr>
-              <a:t>•  Client sends POST /conversations with {"text": "..."}</a:t>
-            </a:r>
-          </a:p>
+              <a:rPr sz="1350" b="0" i="0">
+                <a:solidFill>
+                  <a:srgbClr val="1E242B"/>
+                </a:solidFill>
+                <a:latin typeface="Segoe UI"/>
+              </a:rPr>
+              <a:t>POST /conversations with the conversation text</a:t>
+            </a:r>
+          </a:p>
+        </p:txBody>
+      </p:sp>
+      <p:sp>
+        <p:nvSpPr>
+          <p:cNvPr id="10" name="Oval 9"/>
+          <p:cNvSpPr/>
+          <p:nvPr/>
+        </p:nvSpPr>
+        <p:spPr>
+          <a:xfrm>
+            <a:off x="914400" y="3364992"/>
+            <a:ext cx="329184" cy="329184"/>
+          </a:xfrm>
+          <a:prstGeom prst="ellipse">
+            <a:avLst/>
+          </a:prstGeom>
+          <a:solidFill>
+            <a:srgbClr val="168A86"/>
+          </a:solidFill>
+          <a:ln>
+            <a:noFill/>
+          </a:ln>
+          <a:effectLst/>
+        </p:spPr>
+        <p:style>
+          <a:lnRef idx="1">
+            <a:schemeClr val="accent1"/>
+          </a:lnRef>
+          <a:fillRef idx="3">
+            <a:schemeClr val="accent1"/>
+          </a:fillRef>
+          <a:effectRef idx="2">
+            <a:schemeClr val="accent1"/>
+          </a:effectRef>
+          <a:fontRef idx="minor">
+            <a:schemeClr val="lt1"/>
+          </a:fontRef>
+        </p:style>
+        <p:txBody>
+          <a:bodyPr rtlCol="0" anchor="ctr" wrap="none" lIns="0" rIns="0"/>
+          <a:lstStyle/>
+          <a:p>
+            <a:pPr algn="ctr"/>
+            <a:r>
+              <a:rPr sz="1300" b="1" i="0">
+                <a:solidFill>
+                  <a:srgbClr val="FFFFFF"/>
+                </a:solidFill>
+                <a:latin typeface="Segoe UI"/>
+              </a:rPr>
+              <a:t>2</a:t>
+            </a:r>
+          </a:p>
+        </p:txBody>
+      </p:sp>
+      <p:sp>
+        <p:nvSpPr>
+          <p:cNvPr id="11" name="TextBox 10"/>
+          <p:cNvSpPr txBox="1"/>
+          <p:nvPr/>
+        </p:nvSpPr>
+        <p:spPr>
+          <a:xfrm>
+            <a:off x="1389887" y="3282696"/>
+            <a:ext cx="4050791" cy="777240"/>
+          </a:xfrm>
+          <a:prstGeom prst="rect">
+            <a:avLst/>
+          </a:prstGeom>
+          <a:noFill/>
+        </p:spPr>
+        <p:txBody>
+          <a:bodyPr wrap="square">
+            <a:spAutoFit/>
+          </a:bodyPr>
+          <a:lstStyle/>
           <a:p>
             <a:pPr>
-              <a:spcAft>
-                <a:spcPts val="1000"/>
-              </a:spcAft>
-              <a:defRPr sz="1650">
-                <a:solidFill>
-                  <a:srgbClr val="202428"/>
-                </a:solidFill>
-                <a:latin typeface="Calibri"/>
-              </a:defRPr>
+              <a:lnSpc>
+                <a:spcPct val="105000"/>
+              </a:lnSpc>
             </a:pPr>
             <a:r>
-              <a:rPr>
-                <a:latin typeface="Calibri"/>
-              </a:rPr>
-              <a:t>•  Request body is validated once, through the same Pydantic model the worker also uses (rejects missing/empty/whitespace-only/non-string/over-20,000-character text)</a:t>
-            </a:r>
-          </a:p>
+              <a:rPr sz="1350" b="0" i="0">
+                <a:solidFill>
+                  <a:srgbClr val="1E242B"/>
+                </a:solidFill>
+                <a:latin typeface="Segoe UI"/>
+              </a:rPr>
+              <a:t>Validated once; a “pending” row is written to Postgres immediately</a:t>
+            </a:r>
+          </a:p>
+        </p:txBody>
+      </p:sp>
+      <p:sp>
+        <p:nvSpPr>
+          <p:cNvPr id="12" name="Oval 11"/>
+          <p:cNvSpPr/>
+          <p:nvPr/>
+        </p:nvSpPr>
+        <p:spPr>
+          <a:xfrm>
+            <a:off x="914400" y="4279392"/>
+            <a:ext cx="329184" cy="329184"/>
+          </a:xfrm>
+          <a:prstGeom prst="ellipse">
+            <a:avLst/>
+          </a:prstGeom>
+          <a:solidFill>
+            <a:srgbClr val="168A86"/>
+          </a:solidFill>
+          <a:ln>
+            <a:noFill/>
+          </a:ln>
+          <a:effectLst/>
+        </p:spPr>
+        <p:style>
+          <a:lnRef idx="1">
+            <a:schemeClr val="accent1"/>
+          </a:lnRef>
+          <a:fillRef idx="3">
+            <a:schemeClr val="accent1"/>
+          </a:fillRef>
+          <a:effectRef idx="2">
+            <a:schemeClr val="accent1"/>
+          </a:effectRef>
+          <a:fontRef idx="minor">
+            <a:schemeClr val="lt1"/>
+          </a:fontRef>
+        </p:style>
+        <p:txBody>
+          <a:bodyPr rtlCol="0" anchor="ctr" wrap="none" lIns="0" rIns="0"/>
+          <a:lstStyle/>
+          <a:p>
+            <a:pPr algn="ctr"/>
+            <a:r>
+              <a:rPr sz="1300" b="1" i="0">
+                <a:solidFill>
+                  <a:srgbClr val="FFFFFF"/>
+                </a:solidFill>
+                <a:latin typeface="Segoe UI"/>
+              </a:rPr>
+              <a:t>3</a:t>
+            </a:r>
+          </a:p>
+        </p:txBody>
+      </p:sp>
+      <p:sp>
+        <p:nvSpPr>
+          <p:cNvPr id="13" name="TextBox 12"/>
+          <p:cNvSpPr txBox="1"/>
+          <p:nvPr/>
+        </p:nvSpPr>
+        <p:spPr>
+          <a:xfrm>
+            <a:off x="1389887" y="4197096"/>
+            <a:ext cx="4050791" cy="777240"/>
+          </a:xfrm>
+          <a:prstGeom prst="rect">
+            <a:avLst/>
+          </a:prstGeom>
+          <a:noFill/>
+        </p:spPr>
+        <p:txBody>
+          <a:bodyPr wrap="square">
+            <a:spAutoFit/>
+          </a:bodyPr>
+          <a:lstStyle/>
           <a:p>
             <a:pPr>
-              <a:spcAft>
-                <a:spcPts val="1000"/>
-              </a:spcAft>
-              <a:defRPr sz="1650">
-                <a:solidFill>
-                  <a:srgbClr val="202428"/>
-                </a:solidFill>
-                <a:latin typeface="Calibri"/>
-              </a:defRPr>
+              <a:lnSpc>
+                <a:spcPct val="105000"/>
+              </a:lnSpc>
             </a:pPr>
             <a:r>
-              <a:rPr>
-                <a:latin typeface="Calibri"/>
-              </a:rPr>
-              <a:t>•  A 'pending' row is inserted in Postgres first - the id exists before anything touches S3</a:t>
-            </a:r>
-          </a:p>
-          <a:p>
-            <a:pPr>
-              <a:spcAft>
-                <a:spcPts val="1000"/>
-              </a:spcAft>
-              <a:defRPr sz="1650">
-                <a:solidFill>
-                  <a:srgbClr val="202428"/>
-                </a:solidFill>
-                <a:latin typeface="Calibri"/>
-              </a:defRPr>
-            </a:pPr>
-            <a:r>
-              <a:rPr>
-                <a:latin typeface="Calibri"/>
-              </a:rPr>
-              <a:t>•  The conversation is written to S3 under incoming/{id}.json</a:t>
-            </a:r>
-          </a:p>
-          <a:p>
-            <a:pPr>
-              <a:spcAft>
-                <a:spcPts val="1000"/>
-              </a:spcAft>
-              <a:defRPr sz="1650">
-                <a:solidFill>
-                  <a:srgbClr val="202428"/>
-                </a:solidFill>
-                <a:latin typeface="Calibri"/>
-              </a:defRPr>
-            </a:pPr>
-            <a:r>
-              <a:rPr>
-                <a:latin typeface="Calibri"/>
-              </a:rPr>
-              <a:t>•  API returns 202 with the id and a status URL - it does not wait for scoring</a:t>
-            </a:r>
-          </a:p>
-          <a:p>
-            <a:pPr>
-              <a:spcAft>
-                <a:spcPts val="1000"/>
-              </a:spcAft>
-              <a:defRPr sz="1650">
-                <a:solidFill>
-                  <a:srgbClr val="202428"/>
-                </a:solidFill>
-                <a:latin typeface="Calibri"/>
-              </a:defRPr>
-            </a:pPr>
-            <a:r>
-              <a:rPr>
-                <a:latin typeface="Calibri"/>
-              </a:rPr>
-              <a:t>•  If S3 write fails: a bounded HEAD check decides the outcome - object actually landed -&gt; still 202; definitely never landed -&gt; a visible failed/enqueue_failed row, never a silent delete of evidence; genuinely unknown -&gt; the row stays visible and pending, client gets a retryable 503</a:t>
-            </a:r>
-          </a:p>
-        </p:txBody>
-      </p:sp>
-      <p:sp>
-        <p:nvSpPr>
-          <p:cNvPr id="6" name="TextBox 5"/>
+              <a:rPr sz="1350" b="0" i="0">
+                <a:solidFill>
+                  <a:srgbClr val="1E242B"/>
+                </a:solidFill>
+                <a:latin typeface="Segoe UI"/>
+              </a:rPr>
+              <a:t>Conversation is written to S3; API returns 202 without waiting for scoring</a:t>
+            </a:r>
+          </a:p>
+        </p:txBody>
+      </p:sp>
+      <p:sp>
+        <p:nvSpPr>
+          <p:cNvPr id="14" name="Rounded Rectangle 13"/>
+          <p:cNvSpPr/>
+          <p:nvPr/>
+        </p:nvSpPr>
+        <p:spPr>
+          <a:xfrm>
+            <a:off x="6172200" y="1737360"/>
+            <a:ext cx="5074920" cy="3794760"/>
+          </a:xfrm>
+          <a:prstGeom prst="roundRect">
+            <a:avLst>
+              <a:gd name="adj" fmla="val 3500"/>
+            </a:avLst>
+          </a:prstGeom>
+          <a:solidFill>
+            <a:srgbClr val="FFFFFF"/>
+          </a:solidFill>
+          <a:ln w="9525">
+            <a:solidFill>
+              <a:srgbClr val="E1E5EA"/>
+            </a:solidFill>
+          </a:ln>
+          <a:effectLst/>
+        </p:spPr>
+        <p:style>
+          <a:lnRef idx="1">
+            <a:schemeClr val="accent1"/>
+          </a:lnRef>
+          <a:fillRef idx="3">
+            <a:schemeClr val="accent1"/>
+          </a:fillRef>
+          <a:effectRef idx="2">
+            <a:schemeClr val="accent1"/>
+          </a:effectRef>
+          <a:fontRef idx="minor">
+            <a:schemeClr val="lt1"/>
+          </a:fontRef>
+        </p:style>
+        <p:txBody>
+          <a:bodyPr rtlCol="0" anchor="ctr"/>
+          <a:lstStyle/>
+          <a:p>
+            <a:pPr algn="ctr"/>
+          </a:p>
+        </p:txBody>
+      </p:sp>
+      <p:sp>
+        <p:nvSpPr>
+          <p:cNvPr id="15" name="Rectangle 14"/>
+          <p:cNvSpPr/>
+          <p:nvPr/>
+        </p:nvSpPr>
+        <p:spPr>
+          <a:xfrm>
+            <a:off x="6318504" y="1737360"/>
+            <a:ext cx="4782312" cy="40640"/>
+          </a:xfrm>
+          <a:prstGeom prst="rect">
+            <a:avLst/>
+          </a:prstGeom>
+          <a:solidFill>
+            <a:srgbClr val="C97A1A"/>
+          </a:solidFill>
+          <a:ln>
+            <a:noFill/>
+          </a:ln>
+          <a:effectLst/>
+        </p:spPr>
+        <p:style>
+          <a:lnRef idx="1">
+            <a:schemeClr val="accent1"/>
+          </a:lnRef>
+          <a:fillRef idx="3">
+            <a:schemeClr val="accent1"/>
+          </a:fillRef>
+          <a:effectRef idx="2">
+            <a:schemeClr val="accent1"/>
+          </a:effectRef>
+          <a:fontRef idx="minor">
+            <a:schemeClr val="lt1"/>
+          </a:fontRef>
+        </p:style>
+        <p:txBody>
+          <a:bodyPr rtlCol="0" anchor="ctr"/>
+          <a:lstStyle/>
+          <a:p>
+            <a:pPr algn="ctr"/>
+          </a:p>
+        </p:txBody>
+      </p:sp>
+      <p:sp>
+        <p:nvSpPr>
+          <p:cNvPr id="16" name="TextBox 15"/>
           <p:cNvSpPr txBox="1"/>
           <p:nvPr/>
         </p:nvSpPr>
         <p:spPr>
           <a:xfrm>
-            <a:off x="548640" y="6492240"/>
-            <a:ext cx="9144000" cy="274320"/>
+            <a:off x="6446520" y="1920240"/>
+            <a:ext cx="4572000" cy="365760"/>
           </a:xfrm>
           <a:prstGeom prst="rect">
             <a:avLst/>
@@ -8214,19 +8361,458 @@
           </a:bodyPr>
           <a:lstStyle/>
           <a:p>
+            <a:r>
+              <a:rPr sz="1600" b="1" i="0">
+                <a:solidFill>
+                  <a:srgbClr val="C97A1A"/>
+                </a:solidFill>
+                <a:latin typeface="Segoe UI"/>
+              </a:rPr>
+              <a:t>Path 2 — Direct S3 upload</a:t>
+            </a:r>
+          </a:p>
+        </p:txBody>
+      </p:sp>
+      <p:sp>
+        <p:nvSpPr>
+          <p:cNvPr id="17" name="Oval 16"/>
+          <p:cNvSpPr/>
+          <p:nvPr/>
+        </p:nvSpPr>
+        <p:spPr>
+          <a:xfrm>
+            <a:off x="6446520" y="2450592"/>
+            <a:ext cx="329184" cy="329184"/>
+          </a:xfrm>
+          <a:prstGeom prst="ellipse">
+            <a:avLst/>
+          </a:prstGeom>
+          <a:solidFill>
+            <a:srgbClr val="C97A1A"/>
+          </a:solidFill>
+          <a:ln>
+            <a:noFill/>
+          </a:ln>
+          <a:effectLst/>
+        </p:spPr>
+        <p:style>
+          <a:lnRef idx="1">
+            <a:schemeClr val="accent1"/>
+          </a:lnRef>
+          <a:fillRef idx="3">
+            <a:schemeClr val="accent1"/>
+          </a:fillRef>
+          <a:effectRef idx="2">
+            <a:schemeClr val="accent1"/>
+          </a:effectRef>
+          <a:fontRef idx="minor">
+            <a:schemeClr val="lt1"/>
+          </a:fontRef>
+        </p:style>
+        <p:txBody>
+          <a:bodyPr rtlCol="0" anchor="ctr" wrap="none" lIns="0" rIns="0"/>
+          <a:lstStyle/>
+          <a:p>
+            <a:pPr algn="ctr"/>
+            <a:r>
+              <a:rPr sz="1300" b="1" i="0">
+                <a:solidFill>
+                  <a:srgbClr val="FFFFFF"/>
+                </a:solidFill>
+                <a:latin typeface="Segoe UI"/>
+              </a:rPr>
+              <a:t>1</a:t>
+            </a:r>
+          </a:p>
+        </p:txBody>
+      </p:sp>
+      <p:sp>
+        <p:nvSpPr>
+          <p:cNvPr id="18" name="TextBox 17"/>
+          <p:cNvSpPr txBox="1"/>
+          <p:nvPr/>
+        </p:nvSpPr>
+        <p:spPr>
+          <a:xfrm>
+            <a:off x="6922008" y="2368296"/>
+            <a:ext cx="4050791" cy="777240"/>
+          </a:xfrm>
+          <a:prstGeom prst="rect">
+            <a:avLst/>
+          </a:prstGeom>
+          <a:noFill/>
+        </p:spPr>
+        <p:txBody>
+          <a:bodyPr wrap="square">
+            <a:spAutoFit/>
+          </a:bodyPr>
+          <a:lstStyle/>
+          <a:p>
             <a:pPr>
-              <a:defRPr sz="1000">
-                <a:solidFill>
-                  <a:srgbClr val="636E77"/>
-                </a:solidFill>
-                <a:latin typeface="Calibri"/>
-              </a:defRPr>
+              <a:lnSpc>
+                <a:spcPct val="105000"/>
+              </a:lnSpc>
             </a:pPr>
             <a:r>
-              <a:rPr>
-                <a:latin typeface="Calibri"/>
-              </a:rPr>
-              <a:t>ConvoScore  ·  API ingestion</a:t>
+              <a:rPr sz="1350" b="0" i="0">
+                <a:solidFill>
+                  <a:srgbClr val="1E242B"/>
+                </a:solidFill>
+                <a:latin typeface="Segoe UI"/>
+              </a:rPr>
+              <a:t>A file lands in S3 under incoming/ — no API call at all</a:t>
+            </a:r>
+          </a:p>
+        </p:txBody>
+      </p:sp>
+      <p:sp>
+        <p:nvSpPr>
+          <p:cNvPr id="19" name="Oval 18"/>
+          <p:cNvSpPr/>
+          <p:nvPr/>
+        </p:nvSpPr>
+        <p:spPr>
+          <a:xfrm>
+            <a:off x="6446520" y="3364992"/>
+            <a:ext cx="329184" cy="329184"/>
+          </a:xfrm>
+          <a:prstGeom prst="ellipse">
+            <a:avLst/>
+          </a:prstGeom>
+          <a:solidFill>
+            <a:srgbClr val="C97A1A"/>
+          </a:solidFill>
+          <a:ln>
+            <a:noFill/>
+          </a:ln>
+          <a:effectLst/>
+        </p:spPr>
+        <p:style>
+          <a:lnRef idx="1">
+            <a:schemeClr val="accent1"/>
+          </a:lnRef>
+          <a:fillRef idx="3">
+            <a:schemeClr val="accent1"/>
+          </a:fillRef>
+          <a:effectRef idx="2">
+            <a:schemeClr val="accent1"/>
+          </a:effectRef>
+          <a:fontRef idx="minor">
+            <a:schemeClr val="lt1"/>
+          </a:fontRef>
+        </p:style>
+        <p:txBody>
+          <a:bodyPr rtlCol="0" anchor="ctr" wrap="none" lIns="0" rIns="0"/>
+          <a:lstStyle/>
+          <a:p>
+            <a:pPr algn="ctr"/>
+            <a:r>
+              <a:rPr sz="1300" b="1" i="0">
+                <a:solidFill>
+                  <a:srgbClr val="FFFFFF"/>
+                </a:solidFill>
+                <a:latin typeface="Segoe UI"/>
+              </a:rPr>
+              <a:t>2</a:t>
+            </a:r>
+          </a:p>
+        </p:txBody>
+      </p:sp>
+      <p:sp>
+        <p:nvSpPr>
+          <p:cNvPr id="20" name="TextBox 19"/>
+          <p:cNvSpPr txBox="1"/>
+          <p:nvPr/>
+        </p:nvSpPr>
+        <p:spPr>
+          <a:xfrm>
+            <a:off x="6922008" y="3282696"/>
+            <a:ext cx="4050791" cy="777240"/>
+          </a:xfrm>
+          <a:prstGeom prst="rect">
+            <a:avLst/>
+          </a:prstGeom>
+          <a:noFill/>
+        </p:spPr>
+        <p:txBody>
+          <a:bodyPr wrap="square">
+            <a:spAutoFit/>
+          </a:bodyPr>
+          <a:lstStyle/>
+          <a:p>
+            <a:pPr>
+              <a:lnSpc>
+                <a:spcPct val="105000"/>
+              </a:lnSpc>
+            </a:pPr>
+            <a:r>
+              <a:rPr sz="1350" b="0" i="0">
+                <a:solidFill>
+                  <a:srgbClr val="1E242B"/>
+                </a:solidFill>
+                <a:latin typeface="Segoe UI"/>
+              </a:rPr>
+              <a:t>An S3 event notification delivers straight to SQS</a:t>
+            </a:r>
+          </a:p>
+        </p:txBody>
+      </p:sp>
+      <p:sp>
+        <p:nvSpPr>
+          <p:cNvPr id="21" name="Oval 20"/>
+          <p:cNvSpPr/>
+          <p:nvPr/>
+        </p:nvSpPr>
+        <p:spPr>
+          <a:xfrm>
+            <a:off x="6446520" y="4279392"/>
+            <a:ext cx="329184" cy="329184"/>
+          </a:xfrm>
+          <a:prstGeom prst="ellipse">
+            <a:avLst/>
+          </a:prstGeom>
+          <a:solidFill>
+            <a:srgbClr val="C97A1A"/>
+          </a:solidFill>
+          <a:ln>
+            <a:noFill/>
+          </a:ln>
+          <a:effectLst/>
+        </p:spPr>
+        <p:style>
+          <a:lnRef idx="1">
+            <a:schemeClr val="accent1"/>
+          </a:lnRef>
+          <a:fillRef idx="3">
+            <a:schemeClr val="accent1"/>
+          </a:fillRef>
+          <a:effectRef idx="2">
+            <a:schemeClr val="accent1"/>
+          </a:effectRef>
+          <a:fontRef idx="minor">
+            <a:schemeClr val="lt1"/>
+          </a:fontRef>
+        </p:style>
+        <p:txBody>
+          <a:bodyPr rtlCol="0" anchor="ctr" wrap="none" lIns="0" rIns="0"/>
+          <a:lstStyle/>
+          <a:p>
+            <a:pPr algn="ctr"/>
+            <a:r>
+              <a:rPr sz="1300" b="1" i="0">
+                <a:solidFill>
+                  <a:srgbClr val="FFFFFF"/>
+                </a:solidFill>
+                <a:latin typeface="Segoe UI"/>
+              </a:rPr>
+              <a:t>3</a:t>
+            </a:r>
+          </a:p>
+        </p:txBody>
+      </p:sp>
+      <p:sp>
+        <p:nvSpPr>
+          <p:cNvPr id="22" name="TextBox 21"/>
+          <p:cNvSpPr txBox="1"/>
+          <p:nvPr/>
+        </p:nvSpPr>
+        <p:spPr>
+          <a:xfrm>
+            <a:off x="6922008" y="4197096"/>
+            <a:ext cx="4050791" cy="777240"/>
+          </a:xfrm>
+          <a:prstGeom prst="rect">
+            <a:avLst/>
+          </a:prstGeom>
+          <a:noFill/>
+        </p:spPr>
+        <p:txBody>
+          <a:bodyPr wrap="square">
+            <a:spAutoFit/>
+          </a:bodyPr>
+          <a:lstStyle/>
+          <a:p>
+            <a:pPr>
+              <a:lnSpc>
+                <a:spcPct val="105000"/>
+              </a:lnSpc>
+            </a:pPr>
+            <a:r>
+              <a:rPr sz="1350" b="0" i="0">
+                <a:solidFill>
+                  <a:srgbClr val="1E242B"/>
+                </a:solidFill>
+                <a:latin typeface="Segoe UI"/>
+              </a:rPr>
+              <a:t>The worker creates the row itself, keyed by the S3 object key</a:t>
+            </a:r>
+          </a:p>
+        </p:txBody>
+      </p:sp>
+      <p:sp>
+        <p:nvSpPr>
+          <p:cNvPr id="23" name="Rounded Rectangle 22"/>
+          <p:cNvSpPr/>
+          <p:nvPr/>
+        </p:nvSpPr>
+        <p:spPr>
+          <a:xfrm>
+            <a:off x="640080" y="5650992"/>
+            <a:ext cx="10881360" cy="457200"/>
+          </a:xfrm>
+          <a:prstGeom prst="roundRect">
+            <a:avLst>
+              <a:gd name="adj" fmla="val 25000"/>
+            </a:avLst>
+          </a:prstGeom>
+          <a:solidFill>
+            <a:srgbClr val="14253A"/>
+          </a:solidFill>
+          <a:ln>
+            <a:noFill/>
+          </a:ln>
+          <a:effectLst/>
+        </p:spPr>
+        <p:style>
+          <a:lnRef idx="1">
+            <a:schemeClr val="accent1"/>
+          </a:lnRef>
+          <a:fillRef idx="3">
+            <a:schemeClr val="accent1"/>
+          </a:fillRef>
+          <a:effectRef idx="2">
+            <a:schemeClr val="accent1"/>
+          </a:effectRef>
+          <a:fontRef idx="minor">
+            <a:schemeClr val="lt1"/>
+          </a:fontRef>
+        </p:style>
+        <p:txBody>
+          <a:bodyPr rtlCol="0" anchor="ctr"/>
+          <a:lstStyle/>
+          <a:p>
+            <a:pPr algn="ctr"/>
+            <a:r>
+              <a:rPr sz="1300" b="1" i="0">
+                <a:solidFill>
+                  <a:srgbClr val="FFFFFF"/>
+                </a:solidFill>
+                <a:latin typeface="Segoe UI"/>
+              </a:rPr>
+              <a:t>Both converge on the same S3 → SQS → worker pipeline — one validation contract, one scoring code path</a:t>
+            </a:r>
+          </a:p>
+        </p:txBody>
+      </p:sp>
+      <p:sp>
+        <p:nvSpPr>
+          <p:cNvPr id="24" name="Rectangle 23"/>
+          <p:cNvSpPr/>
+          <p:nvPr/>
+        </p:nvSpPr>
+        <p:spPr>
+          <a:xfrm>
+            <a:off x="640080" y="6272784"/>
+            <a:ext cx="10911535" cy="9525"/>
+          </a:xfrm>
+          <a:prstGeom prst="rect">
+            <a:avLst/>
+          </a:prstGeom>
+          <a:solidFill>
+            <a:srgbClr val="E1E5EA"/>
+          </a:solidFill>
+          <a:ln>
+            <a:noFill/>
+          </a:ln>
+          <a:effectLst/>
+        </p:spPr>
+        <p:style>
+          <a:lnRef idx="1">
+            <a:schemeClr val="accent1"/>
+          </a:lnRef>
+          <a:fillRef idx="3">
+            <a:schemeClr val="accent1"/>
+          </a:fillRef>
+          <a:effectRef idx="2">
+            <a:schemeClr val="accent1"/>
+          </a:effectRef>
+          <a:fontRef idx="minor">
+            <a:schemeClr val="lt1"/>
+          </a:fontRef>
+        </p:style>
+        <p:txBody>
+          <a:bodyPr rtlCol="0" anchor="ctr"/>
+          <a:lstStyle/>
+          <a:p>
+            <a:pPr algn="ctr"/>
+          </a:p>
+        </p:txBody>
+      </p:sp>
+      <p:sp>
+        <p:nvSpPr>
+          <p:cNvPr id="25" name="TextBox 24"/>
+          <p:cNvSpPr txBox="1"/>
+          <p:nvPr/>
+        </p:nvSpPr>
+        <p:spPr>
+          <a:xfrm>
+            <a:off x="640080" y="6382512"/>
+            <a:ext cx="7315200" cy="292608"/>
+          </a:xfrm>
+          <a:prstGeom prst="rect">
+            <a:avLst/>
+          </a:prstGeom>
+          <a:noFill/>
+        </p:spPr>
+        <p:txBody>
+          <a:bodyPr wrap="none">
+            <a:spAutoFit/>
+          </a:bodyPr>
+          <a:lstStyle/>
+          <a:p>
+            <a:r>
+              <a:rPr sz="1000" b="0" i="0">
+                <a:solidFill>
+                  <a:srgbClr val="626E79"/>
+                </a:solidFill>
+                <a:latin typeface="Segoe UI"/>
+              </a:rPr>
+              <a:t>ConvoScore  ·  Ingestion paths</a:t>
+            </a:r>
+          </a:p>
+        </p:txBody>
+      </p:sp>
+      <p:sp>
+        <p:nvSpPr>
+          <p:cNvPr id="26" name="TextBox 25"/>
+          <p:cNvSpPr txBox="1"/>
+          <p:nvPr/>
+        </p:nvSpPr>
+        <p:spPr>
+          <a:xfrm>
+            <a:off x="10362895" y="6382512"/>
+            <a:ext cx="1188720" cy="292608"/>
+          </a:xfrm>
+          <a:prstGeom prst="rect">
+            <a:avLst/>
+          </a:prstGeom>
+          <a:noFill/>
+        </p:spPr>
+        <p:txBody>
+          <a:bodyPr wrap="none">
+            <a:spAutoFit/>
+          </a:bodyPr>
+          <a:lstStyle/>
+          <a:p>
+            <a:pPr algn="r"/>
+            <a:r>
+              <a:rPr sz="1000" b="0" i="0">
+                <a:solidFill>
+                  <a:srgbClr val="B7C2CC"/>
+                </a:solidFill>
+                <a:latin typeface="Segoe UI"/>
+              </a:rPr>
+              <a:t>04 / 10</a:t>
             </a:r>
           </a:p>
         </p:txBody>
@@ -8245,7 +8831,7 @@
     <p:bg>
       <p:bgPr>
         <a:solidFill>
-          <a:srgbClr val="F6F7F9"/>
+          <a:srgbClr val="F7F8FA"/>
         </a:solidFill>
         <a:effectLst/>
       </p:bgPr>
@@ -8265,8 +8851,8 @@
         </p:nvSpPr>
         <p:spPr>
           <a:xfrm>
-            <a:off x="548640" y="320040"/>
-            <a:ext cx="11064240" cy="365760"/>
+            <a:off x="640080" y="384048"/>
+            <a:ext cx="9601200" cy="292608"/>
           </a:xfrm>
           <a:prstGeom prst="rect">
             <a:avLst/>
@@ -8279,19 +8865,14 @@
           </a:bodyPr>
           <a:lstStyle/>
           <a:p>
-            <a:pPr>
-              <a:defRPr sz="1300" b="1">
-                <a:solidFill>
-                  <a:srgbClr val="1F8A8A"/>
-                </a:solidFill>
-                <a:latin typeface="Calibri"/>
-              </a:defRPr>
-            </a:pPr>
-            <a:r>
-              <a:rPr>
-                <a:latin typeface="Calibri"/>
-              </a:rPr>
-              <a:t>INGESTION PATH 2</a:t>
+            <a:r>
+              <a:rPr sz="1250" b="1" i="0" spc="160">
+                <a:solidFill>
+                  <a:srgbClr val="168A86"/>
+                </a:solidFill>
+                <a:latin typeface="Segoe UI"/>
+              </a:rPr>
+              <a:t>SCORING</a:t>
             </a:r>
           </a:p>
         </p:txBody>
@@ -8304,8 +8885,8 @@
         </p:nvSpPr>
         <p:spPr>
           <a:xfrm>
-            <a:off x="502920" y="621792"/>
-            <a:ext cx="11155680" cy="822960"/>
+            <a:off x="612647" y="658368"/>
+            <a:ext cx="10607040" cy="640080"/>
           </a:xfrm>
           <a:prstGeom prst="rect">
             <a:avLst/>
@@ -8318,19 +8899,14 @@
           </a:bodyPr>
           <a:lstStyle/>
           <a:p>
-            <a:pPr>
-              <a:defRPr sz="3000" b="1">
-                <a:solidFill>
-                  <a:srgbClr val="162A3E"/>
-                </a:solidFill>
-                <a:latin typeface="Calibri"/>
-              </a:defRPr>
-            </a:pPr>
-            <a:r>
-              <a:rPr>
-                <a:latin typeface="Calibri"/>
-              </a:rPr>
-              <a:t>Direct S3 ingestion, step by step</a:t>
+            <a:r>
+              <a:rPr sz="2200" b="1" i="0">
+                <a:solidFill>
+                  <a:srgbClr val="14253A"/>
+                </a:solidFill>
+                <a:latin typeface="Segoe UI"/>
+              </a:rPr>
+              <a:t>How scoring is triggered — and what happens when it fails</a:t>
             </a:r>
           </a:p>
         </p:txBody>
@@ -8343,18 +8919,19 @@
         </p:nvSpPr>
         <p:spPr>
           <a:xfrm>
-            <a:off x="548640" y="1371600"/>
-            <a:ext cx="1828800" cy="38100"/>
+            <a:off x="640080" y="1353312"/>
+            <a:ext cx="1051560" cy="38100"/>
           </a:xfrm>
           <a:prstGeom prst="rect">
             <a:avLst/>
           </a:prstGeom>
           <a:solidFill>
-            <a:srgbClr val="1F8A8A"/>
+            <a:srgbClr val="168A86"/>
           </a:solidFill>
           <a:ln>
             <a:noFill/>
           </a:ln>
+          <a:effectLst/>
         </p:spPr>
         <p:style>
           <a:lnRef idx="1">
@@ -8380,14 +8957,739 @@
       </p:sp>
       <p:sp>
         <p:nvSpPr>
-          <p:cNvPr id="5" name="TextBox 4"/>
+          <p:cNvPr id="5" name="Rounded Rectangle 4"/>
+          <p:cNvSpPr/>
+          <p:nvPr/>
+        </p:nvSpPr>
+        <p:spPr>
+          <a:xfrm>
+            <a:off x="822960" y="2331720"/>
+            <a:ext cx="1645920" cy="777240"/>
+          </a:xfrm>
+          <a:prstGeom prst="roundRect">
+            <a:avLst>
+              <a:gd name="adj" fmla="val 12000"/>
+            </a:avLst>
+          </a:prstGeom>
+          <a:solidFill>
+            <a:srgbClr val="4A5A6A"/>
+          </a:solidFill>
+          <a:ln>
+            <a:noFill/>
+          </a:ln>
+          <a:effectLst/>
+        </p:spPr>
+        <p:style>
+          <a:lnRef idx="1">
+            <a:schemeClr val="accent1"/>
+          </a:lnRef>
+          <a:fillRef idx="3">
+            <a:schemeClr val="accent1"/>
+          </a:fillRef>
+          <a:effectRef idx="2">
+            <a:schemeClr val="accent1"/>
+          </a:effectRef>
+          <a:fontRef idx="minor">
+            <a:schemeClr val="lt1"/>
+          </a:fontRef>
+        </p:style>
+        <p:txBody>
+          <a:bodyPr rtlCol="0" anchor="ctr" wrap="square" lIns="50800" rIns="50800"/>
+          <a:lstStyle/>
+          <a:p>
+            <a:pPr algn="ctr">
+              <a:lnSpc>
+                <a:spcPct val="100000"/>
+              </a:lnSpc>
+            </a:pPr>
+            <a:r>
+              <a:rPr sz="1250" b="1" i="0">
+                <a:solidFill>
+                  <a:srgbClr val="FFFFFF"/>
+                </a:solidFill>
+                <a:latin typeface="Segoe UI"/>
+              </a:rPr>
+              <a:t>SQS
+processing queue</a:t>
+            </a:r>
+          </a:p>
+        </p:txBody>
+      </p:sp>
+      <p:sp>
+        <p:nvSpPr>
+          <p:cNvPr id="6" name="Rounded Rectangle 5"/>
+          <p:cNvSpPr/>
+          <p:nvPr/>
+        </p:nvSpPr>
+        <p:spPr>
+          <a:xfrm>
+            <a:off x="3200400" y="2331720"/>
+            <a:ext cx="1645920" cy="777240"/>
+          </a:xfrm>
+          <a:prstGeom prst="roundRect">
+            <a:avLst>
+              <a:gd name="adj" fmla="val 12000"/>
+            </a:avLst>
+          </a:prstGeom>
+          <a:solidFill>
+            <a:srgbClr val="0F6664"/>
+          </a:solidFill>
+          <a:ln>
+            <a:noFill/>
+          </a:ln>
+          <a:effectLst/>
+        </p:spPr>
+        <p:style>
+          <a:lnRef idx="1">
+            <a:schemeClr val="accent1"/>
+          </a:lnRef>
+          <a:fillRef idx="3">
+            <a:schemeClr val="accent1"/>
+          </a:fillRef>
+          <a:effectRef idx="2">
+            <a:schemeClr val="accent1"/>
+          </a:effectRef>
+          <a:fontRef idx="minor">
+            <a:schemeClr val="lt1"/>
+          </a:fontRef>
+        </p:style>
+        <p:txBody>
+          <a:bodyPr rtlCol="0" anchor="ctr" wrap="square" lIns="50800" rIns="50800"/>
+          <a:lstStyle/>
+          <a:p>
+            <a:pPr algn="ctr">
+              <a:lnSpc>
+                <a:spcPct val="100000"/>
+              </a:lnSpc>
+            </a:pPr>
+            <a:r>
+              <a:rPr sz="1250" b="1" i="0">
+                <a:solidFill>
+                  <a:srgbClr val="FFFFFF"/>
+                </a:solidFill>
+                <a:latin typeface="Segoe UI"/>
+              </a:rPr>
+              <a:t>Worker</a:t>
+            </a:r>
+          </a:p>
+        </p:txBody>
+      </p:sp>
+      <p:sp>
+        <p:nvSpPr>
+          <p:cNvPr id="7" name="Rounded Rectangle 6"/>
+          <p:cNvSpPr/>
+          <p:nvPr/>
+        </p:nvSpPr>
+        <p:spPr>
+          <a:xfrm>
+            <a:off x="3200400" y="3520440"/>
+            <a:ext cx="1645920" cy="685800"/>
+          </a:xfrm>
+          <a:prstGeom prst="roundRect">
+            <a:avLst>
+              <a:gd name="adj" fmla="val 12000"/>
+            </a:avLst>
+          </a:prstGeom>
+          <a:solidFill>
+            <a:srgbClr val="14253A"/>
+          </a:solidFill>
+          <a:ln>
+            <a:noFill/>
+          </a:ln>
+          <a:effectLst/>
+        </p:spPr>
+        <p:style>
+          <a:lnRef idx="1">
+            <a:schemeClr val="accent1"/>
+          </a:lnRef>
+          <a:fillRef idx="3">
+            <a:schemeClr val="accent1"/>
+          </a:fillRef>
+          <a:effectRef idx="2">
+            <a:schemeClr val="accent1"/>
+          </a:effectRef>
+          <a:fontRef idx="minor">
+            <a:schemeClr val="lt1"/>
+          </a:fontRef>
+        </p:style>
+        <p:txBody>
+          <a:bodyPr rtlCol="0" anchor="ctr" wrap="square" lIns="50800" rIns="50800"/>
+          <a:lstStyle/>
+          <a:p>
+            <a:pPr algn="ctr">
+              <a:lnSpc>
+                <a:spcPct val="100000"/>
+              </a:lnSpc>
+            </a:pPr>
+            <a:r>
+              <a:rPr sz="1250" b="1" i="0">
+                <a:solidFill>
+                  <a:srgbClr val="FFFFFF"/>
+                </a:solidFill>
+                <a:latin typeface="Segoe UI"/>
+              </a:rPr>
+              <a:t>OpenAI</a:t>
+            </a:r>
+          </a:p>
+        </p:txBody>
+      </p:sp>
+      <p:sp>
+        <p:nvSpPr>
+          <p:cNvPr id="8" name="Rounded Rectangle 7"/>
+          <p:cNvSpPr/>
+          <p:nvPr/>
+        </p:nvSpPr>
+        <p:spPr>
+          <a:xfrm>
+            <a:off x="8138160" y="2331720"/>
+            <a:ext cx="1737360" cy="777240"/>
+          </a:xfrm>
+          <a:prstGeom prst="roundRect">
+            <a:avLst>
+              <a:gd name="adj" fmla="val 12000"/>
+            </a:avLst>
+          </a:prstGeom>
+          <a:solidFill>
+            <a:srgbClr val="14253A"/>
+          </a:solidFill>
+          <a:ln>
+            <a:noFill/>
+          </a:ln>
+          <a:effectLst/>
+        </p:spPr>
+        <p:style>
+          <a:lnRef idx="1">
+            <a:schemeClr val="accent1"/>
+          </a:lnRef>
+          <a:fillRef idx="3">
+            <a:schemeClr val="accent1"/>
+          </a:fillRef>
+          <a:effectRef idx="2">
+            <a:schemeClr val="accent1"/>
+          </a:effectRef>
+          <a:fontRef idx="minor">
+            <a:schemeClr val="lt1"/>
+          </a:fontRef>
+        </p:style>
+        <p:txBody>
+          <a:bodyPr rtlCol="0" anchor="ctr" wrap="square" lIns="50800" rIns="50800"/>
+          <a:lstStyle/>
+          <a:p>
+            <a:pPr algn="ctr">
+              <a:lnSpc>
+                <a:spcPct val="100000"/>
+              </a:lnSpc>
+            </a:pPr>
+            <a:r>
+              <a:rPr sz="1250" b="1" i="0">
+                <a:solidFill>
+                  <a:srgbClr val="FFFFFF"/>
+                </a:solidFill>
+                <a:latin typeface="Segoe UI"/>
+              </a:rPr>
+              <a:t>PostgreSQL</a:t>
+            </a:r>
+          </a:p>
+        </p:txBody>
+      </p:sp>
+      <p:sp>
+        <p:nvSpPr>
+          <p:cNvPr id="9" name="Rounded Rectangle 8"/>
+          <p:cNvSpPr/>
+          <p:nvPr/>
+        </p:nvSpPr>
+        <p:spPr>
+          <a:xfrm>
+            <a:off x="822960" y="3520440"/>
+            <a:ext cx="1645920" cy="685800"/>
+          </a:xfrm>
+          <a:prstGeom prst="roundRect">
+            <a:avLst>
+              <a:gd name="adj" fmla="val 12000"/>
+            </a:avLst>
+          </a:prstGeom>
+          <a:solidFill>
+            <a:srgbClr val="9E3533"/>
+          </a:solidFill>
+          <a:ln>
+            <a:noFill/>
+          </a:ln>
+          <a:effectLst/>
+        </p:spPr>
+        <p:style>
+          <a:lnRef idx="1">
+            <a:schemeClr val="accent1"/>
+          </a:lnRef>
+          <a:fillRef idx="3">
+            <a:schemeClr val="accent1"/>
+          </a:fillRef>
+          <a:effectRef idx="2">
+            <a:schemeClr val="accent1"/>
+          </a:effectRef>
+          <a:fontRef idx="minor">
+            <a:schemeClr val="lt1"/>
+          </a:fontRef>
+        </p:style>
+        <p:txBody>
+          <a:bodyPr rtlCol="0" anchor="ctr" wrap="square" lIns="50800" rIns="50800"/>
+          <a:lstStyle/>
+          <a:p>
+            <a:pPr algn="ctr">
+              <a:lnSpc>
+                <a:spcPct val="100000"/>
+              </a:lnSpc>
+            </a:pPr>
+            <a:r>
+              <a:rPr sz="1250" b="1" i="0">
+                <a:solidFill>
+                  <a:srgbClr val="FFFFFF"/>
+                </a:solidFill>
+                <a:latin typeface="Segoe UI"/>
+              </a:rPr>
+              <a:t>SQS DLQ</a:t>
+            </a:r>
+          </a:p>
+        </p:txBody>
+      </p:sp>
+      <p:cxnSp>
+        <p:nvCxnSpPr>
+          <p:cNvPr id="10" name="Connector 9"/>
+          <p:cNvCxnSpPr/>
+          <p:nvPr/>
+        </p:nvCxnSpPr>
+        <p:spPr>
+          <a:xfrm flipV="1">
+            <a:off x="4023360" y="2057400"/>
+            <a:ext cx="0" cy="274320"/>
+          </a:xfrm>
+          <a:prstGeom prst="line">
+            <a:avLst/>
+          </a:prstGeom>
+          <a:ln w="20320">
+            <a:solidFill>
+              <a:srgbClr val="4A5A6A"/>
+            </a:solidFill>
+            <a:prstDash val="dash"/>
+          </a:ln>
+        </p:spPr>
+        <p:style>
+          <a:lnRef idx="2">
+            <a:schemeClr val="accent1"/>
+          </a:lnRef>
+          <a:fillRef idx="0">
+            <a:schemeClr val="accent1"/>
+          </a:fillRef>
+          <a:effectRef idx="1">
+            <a:schemeClr val="accent1"/>
+          </a:effectRef>
+          <a:fontRef idx="minor">
+            <a:schemeClr val="tx1"/>
+          </a:fontRef>
+        </p:style>
+      </p:cxnSp>
+      <p:cxnSp>
+        <p:nvCxnSpPr>
+          <p:cNvPr id="11" name="Connector 10"/>
+          <p:cNvCxnSpPr/>
+          <p:nvPr/>
+        </p:nvCxnSpPr>
+        <p:spPr>
+          <a:xfrm flipH="1">
+            <a:off x="1645920" y="2057400"/>
+            <a:ext cx="2377440" cy="0"/>
+          </a:xfrm>
+          <a:prstGeom prst="line">
+            <a:avLst/>
+          </a:prstGeom>
+          <a:ln w="20320">
+            <a:solidFill>
+              <a:srgbClr val="4A5A6A"/>
+            </a:solidFill>
+            <a:prstDash val="dash"/>
+          </a:ln>
+        </p:spPr>
+        <p:style>
+          <a:lnRef idx="2">
+            <a:schemeClr val="accent1"/>
+          </a:lnRef>
+          <a:fillRef idx="0">
+            <a:schemeClr val="accent1"/>
+          </a:fillRef>
+          <a:effectRef idx="1">
+            <a:schemeClr val="accent1"/>
+          </a:effectRef>
+          <a:fontRef idx="minor">
+            <a:schemeClr val="tx1"/>
+          </a:fontRef>
+        </p:style>
+      </p:cxnSp>
+      <p:cxnSp>
+        <p:nvCxnSpPr>
+          <p:cNvPr id="12" name="Connector 11"/>
+          <p:cNvCxnSpPr/>
+          <p:nvPr/>
+        </p:nvCxnSpPr>
+        <p:spPr>
+          <a:xfrm>
+            <a:off x="1645920" y="2057400"/>
+            <a:ext cx="0" cy="274320"/>
+          </a:xfrm>
+          <a:prstGeom prst="line">
+            <a:avLst/>
+          </a:prstGeom>
+          <a:ln w="20320">
+            <a:solidFill>
+              <a:srgbClr val="4A5A6A"/>
+            </a:solidFill>
+            <a:prstDash val="dash"/>
+            <a:tailEnd type="triangle" w="med" len="med"/>
+          </a:ln>
+        </p:spPr>
+        <p:style>
+          <a:lnRef idx="2">
+            <a:schemeClr val="accent1"/>
+          </a:lnRef>
+          <a:fillRef idx="0">
+            <a:schemeClr val="accent1"/>
+          </a:fillRef>
+          <a:effectRef idx="1">
+            <a:schemeClr val="accent1"/>
+          </a:effectRef>
+          <a:fontRef idx="minor">
+            <a:schemeClr val="tx1"/>
+          </a:fontRef>
+        </p:style>
+      </p:cxnSp>
+      <p:sp>
+        <p:nvSpPr>
+          <p:cNvPr id="13" name="TextBox 12"/>
           <p:cNvSpPr txBox="1"/>
           <p:nvPr/>
         </p:nvSpPr>
         <p:spPr>
           <a:xfrm>
-            <a:off x="548640" y="1645920"/>
-            <a:ext cx="6400800" cy="4754880"/>
+            <a:off x="1645920" y="1783080"/>
+            <a:ext cx="2377440" cy="274320"/>
+          </a:xfrm>
+          <a:prstGeom prst="rect">
+            <a:avLst/>
+          </a:prstGeom>
+          <a:noFill/>
+        </p:spPr>
+        <p:txBody>
+          <a:bodyPr wrap="none" lIns="0" rIns="0">
+            <a:spAutoFit/>
+          </a:bodyPr>
+          <a:lstStyle/>
+          <a:p>
+            <a:pPr algn="ctr"/>
+            <a:r>
+              <a:rPr sz="1050" b="0" i="0">
+                <a:solidFill>
+                  <a:srgbClr val="4A5A6A"/>
+                </a:solidFill>
+                <a:latin typeface="Segoe UI"/>
+              </a:rPr>
+              <a:t>retry (visibility timeout)</a:t>
+            </a:r>
+          </a:p>
+        </p:txBody>
+      </p:sp>
+      <p:cxnSp>
+        <p:nvCxnSpPr>
+          <p:cNvPr id="14" name="Connector 13"/>
+          <p:cNvCxnSpPr/>
+          <p:nvPr/>
+        </p:nvCxnSpPr>
+        <p:spPr>
+          <a:xfrm>
+            <a:off x="2468880" y="2720339"/>
+            <a:ext cx="731520" cy="0"/>
+          </a:xfrm>
+          <a:prstGeom prst="line">
+            <a:avLst/>
+          </a:prstGeom>
+          <a:ln w="22225">
+            <a:solidFill>
+              <a:srgbClr val="4A5A6A"/>
+            </a:solidFill>
+            <a:tailEnd type="triangle" w="med" len="med"/>
+          </a:ln>
+        </p:spPr>
+        <p:style>
+          <a:lnRef idx="2">
+            <a:schemeClr val="accent1"/>
+          </a:lnRef>
+          <a:fillRef idx="0">
+            <a:schemeClr val="accent1"/>
+          </a:fillRef>
+          <a:effectRef idx="1">
+            <a:schemeClr val="accent1"/>
+          </a:effectRef>
+          <a:fontRef idx="minor">
+            <a:schemeClr val="tx1"/>
+          </a:fontRef>
+        </p:style>
+      </p:cxnSp>
+      <p:sp>
+        <p:nvSpPr>
+          <p:cNvPr id="15" name="TextBox 14"/>
+          <p:cNvSpPr txBox="1"/>
+          <p:nvPr/>
+        </p:nvSpPr>
+        <p:spPr>
+          <a:xfrm>
+            <a:off x="1828800" y="2029968"/>
+            <a:ext cx="2011680" cy="274320"/>
+          </a:xfrm>
+          <a:prstGeom prst="rect">
+            <a:avLst/>
+          </a:prstGeom>
+          <a:noFill/>
+        </p:spPr>
+        <p:txBody>
+          <a:bodyPr wrap="none" lIns="0" rIns="0">
+            <a:spAutoFit/>
+          </a:bodyPr>
+          <a:lstStyle/>
+          <a:p>
+            <a:pPr algn="ctr"/>
+            <a:r>
+              <a:rPr sz="1050" b="0" i="0">
+                <a:solidFill>
+                  <a:srgbClr val="626E79"/>
+                </a:solidFill>
+                <a:latin typeface="Segoe UI"/>
+              </a:rPr>
+              <a:t>poll</a:t>
+            </a:r>
+          </a:p>
+        </p:txBody>
+      </p:sp>
+      <p:cxnSp>
+        <p:nvCxnSpPr>
+          <p:cNvPr id="16" name="Connector 15"/>
+          <p:cNvCxnSpPr/>
+          <p:nvPr/>
+        </p:nvCxnSpPr>
+        <p:spPr>
+          <a:xfrm>
+            <a:off x="4023360" y="3108960"/>
+            <a:ext cx="0" cy="411480"/>
+          </a:xfrm>
+          <a:prstGeom prst="line">
+            <a:avLst/>
+          </a:prstGeom>
+          <a:ln w="22225">
+            <a:solidFill>
+              <a:srgbClr val="0F6664"/>
+            </a:solidFill>
+            <a:tailEnd type="triangle" w="med" len="med"/>
+          </a:ln>
+        </p:spPr>
+        <p:style>
+          <a:lnRef idx="2">
+            <a:schemeClr val="accent1"/>
+          </a:lnRef>
+          <a:fillRef idx="0">
+            <a:schemeClr val="accent1"/>
+          </a:fillRef>
+          <a:effectRef idx="1">
+            <a:schemeClr val="accent1"/>
+          </a:effectRef>
+          <a:fontRef idx="minor">
+            <a:schemeClr val="tx1"/>
+          </a:fontRef>
+        </p:style>
+      </p:cxnSp>
+      <p:sp>
+        <p:nvSpPr>
+          <p:cNvPr id="17" name="TextBox 16"/>
+          <p:cNvSpPr txBox="1"/>
+          <p:nvPr/>
+        </p:nvSpPr>
+        <p:spPr>
+          <a:xfrm>
+            <a:off x="4114800" y="3127248"/>
+            <a:ext cx="914400" cy="274320"/>
+          </a:xfrm>
+          <a:prstGeom prst="rect">
+            <a:avLst/>
+          </a:prstGeom>
+          <a:noFill/>
+        </p:spPr>
+        <p:txBody>
+          <a:bodyPr wrap="none" lIns="0" rIns="0">
+            <a:spAutoFit/>
+          </a:bodyPr>
+          <a:lstStyle/>
+          <a:p>
+            <a:pPr algn="ctr"/>
+            <a:r>
+              <a:rPr sz="1050" b="0" i="0">
+                <a:solidFill>
+                  <a:srgbClr val="626E79"/>
+                </a:solidFill>
+                <a:latin typeface="Segoe UI"/>
+              </a:rPr>
+              <a:t>score</a:t>
+            </a:r>
+          </a:p>
+        </p:txBody>
+      </p:sp>
+      <p:cxnSp>
+        <p:nvCxnSpPr>
+          <p:cNvPr id="18" name="Connector 17"/>
+          <p:cNvCxnSpPr/>
+          <p:nvPr/>
+        </p:nvCxnSpPr>
+        <p:spPr>
+          <a:xfrm>
+            <a:off x="4846320" y="2720339"/>
+            <a:ext cx="3291840" cy="0"/>
+          </a:xfrm>
+          <a:prstGeom prst="line">
+            <a:avLst/>
+          </a:prstGeom>
+          <a:ln w="22225">
+            <a:solidFill>
+              <a:srgbClr val="0F6664"/>
+            </a:solidFill>
+            <a:tailEnd type="triangle" w="med" len="med"/>
+          </a:ln>
+        </p:spPr>
+        <p:style>
+          <a:lnRef idx="2">
+            <a:schemeClr val="accent1"/>
+          </a:lnRef>
+          <a:fillRef idx="0">
+            <a:schemeClr val="accent1"/>
+          </a:fillRef>
+          <a:effectRef idx="1">
+            <a:schemeClr val="accent1"/>
+          </a:effectRef>
+          <a:fontRef idx="minor">
+            <a:schemeClr val="tx1"/>
+          </a:fontRef>
+        </p:style>
+      </p:cxnSp>
+      <p:sp>
+        <p:nvSpPr>
+          <p:cNvPr id="19" name="TextBox 18"/>
+          <p:cNvSpPr txBox="1"/>
+          <p:nvPr/>
+        </p:nvSpPr>
+        <p:spPr>
+          <a:xfrm>
+            <a:off x="4846320" y="2029968"/>
+            <a:ext cx="3291840" cy="274320"/>
+          </a:xfrm>
+          <a:prstGeom prst="rect">
+            <a:avLst/>
+          </a:prstGeom>
+          <a:noFill/>
+        </p:spPr>
+        <p:txBody>
+          <a:bodyPr wrap="none" lIns="0" rIns="0">
+            <a:spAutoFit/>
+          </a:bodyPr>
+          <a:lstStyle/>
+          <a:p>
+            <a:pPr algn="ctr"/>
+            <a:r>
+              <a:rPr sz="1050" b="0" i="0">
+                <a:solidFill>
+                  <a:srgbClr val="626E79"/>
+                </a:solidFill>
+                <a:latin typeface="Segoe UI"/>
+              </a:rPr>
+              <a:t>commit result</a:t>
+            </a:r>
+          </a:p>
+        </p:txBody>
+      </p:sp>
+      <p:cxnSp>
+        <p:nvCxnSpPr>
+          <p:cNvPr id="20" name="Connector 19"/>
+          <p:cNvCxnSpPr/>
+          <p:nvPr/>
+        </p:nvCxnSpPr>
+        <p:spPr>
+          <a:xfrm>
+            <a:off x="1645920" y="3108960"/>
+            <a:ext cx="0" cy="411480"/>
+          </a:xfrm>
+          <a:prstGeom prst="line">
+            <a:avLst/>
+          </a:prstGeom>
+          <a:ln w="22225">
+            <a:solidFill>
+              <a:srgbClr val="9E3533"/>
+            </a:solidFill>
+            <a:prstDash val="dash"/>
+            <a:tailEnd type="triangle" w="med" len="med"/>
+          </a:ln>
+        </p:spPr>
+        <p:style>
+          <a:lnRef idx="2">
+            <a:schemeClr val="accent1"/>
+          </a:lnRef>
+          <a:fillRef idx="0">
+            <a:schemeClr val="accent1"/>
+          </a:fillRef>
+          <a:effectRef idx="1">
+            <a:schemeClr val="accent1"/>
+          </a:effectRef>
+          <a:fontRef idx="minor">
+            <a:schemeClr val="tx1"/>
+          </a:fontRef>
+        </p:style>
+      </p:cxnSp>
+      <p:sp>
+        <p:nvSpPr>
+          <p:cNvPr id="21" name="TextBox 20"/>
+          <p:cNvSpPr txBox="1"/>
+          <p:nvPr/>
+        </p:nvSpPr>
+        <p:spPr>
+          <a:xfrm>
+            <a:off x="1645919" y="3310128"/>
+            <a:ext cx="1371600" cy="274320"/>
+          </a:xfrm>
+          <a:prstGeom prst="rect">
+            <a:avLst/>
+          </a:prstGeom>
+          <a:noFill/>
+        </p:spPr>
+        <p:txBody>
+          <a:bodyPr wrap="none" lIns="0" rIns="0">
+            <a:spAutoFit/>
+          </a:bodyPr>
+          <a:lstStyle/>
+          <a:p>
+            <a:pPr algn="ctr"/>
+            <a:r>
+              <a:rPr sz="1050" b="0" i="0">
+                <a:solidFill>
+                  <a:srgbClr val="9E3533"/>
+                </a:solidFill>
+                <a:latin typeface="Segoe UI"/>
+              </a:rPr>
+              <a:t>after 3 attempts</a:t>
+            </a:r>
+          </a:p>
+        </p:txBody>
+      </p:sp>
+      <p:sp>
+        <p:nvSpPr>
+          <p:cNvPr id="22" name="TextBox 21"/>
+          <p:cNvSpPr txBox="1"/>
+          <p:nvPr/>
+        </p:nvSpPr>
+        <p:spPr>
+          <a:xfrm>
+            <a:off x="640080" y="4526280"/>
+            <a:ext cx="10881360" cy="1645920"/>
           </a:xfrm>
           <a:prstGeom prst="rect">
             <a:avLst/>
@@ -8401,130 +9703,162 @@
           <a:lstStyle/>
           <a:p>
             <a:pPr>
+              <a:lnSpc>
+                <a:spcPct val="110000"/>
+              </a:lnSpc>
               <a:spcAft>
-                <a:spcPts val="1000"/>
+                <a:spcPts val="1100"/>
               </a:spcAft>
-              <a:defRPr sz="1700">
-                <a:solidFill>
-                  <a:srgbClr val="202428"/>
-                </a:solidFill>
-                <a:latin typeface="Calibri"/>
-              </a:defRPr>
             </a:pPr>
             <a:r>
-              <a:rPr>
-                <a:latin typeface="Calibri"/>
-              </a:rPr>
-              <a:t>•  Anything else (a script, a colleague, a batch job) puts a JSON object under incoming/ in the S3 bucket</a:t>
+              <a:rPr sz="1400" b="1" i="0">
+                <a:solidFill>
+                  <a:srgbClr val="168A86"/>
+                </a:solidFill>
+                <a:latin typeface="Segoe UI"/>
+              </a:rPr>
+              <a:t>▸  </a:t>
+            </a:r>
+            <a:r>
+              <a:rPr sz="1400" b="1" i="0">
+                <a:solidFill>
+                  <a:srgbClr val="14253A"/>
+                </a:solidFill>
+                <a:latin typeface="Segoe UI"/>
+              </a:rPr>
+              <a:t>The worker polls SQS continuously</a:t>
+            </a:r>
+            <a:r>
+              <a:rPr sz="1400" b="0" i="0">
+                <a:solidFill>
+                  <a:srgbClr val="1E242B"/>
+                </a:solidFill>
+                <a:latin typeface="Segoe UI"/>
+              </a:rPr>
+              <a:t> — a message stays invisible while it's being worked, and reappears automatically if not finished in time</a:t>
             </a:r>
           </a:p>
           <a:p>
             <a:pPr>
+              <a:lnSpc>
+                <a:spcPct val="110000"/>
+              </a:lnSpc>
               <a:spcAft>
-                <a:spcPts val="1000"/>
+                <a:spcPts val="1100"/>
               </a:spcAft>
-              <a:defRPr sz="1700">
-                <a:solidFill>
-                  <a:srgbClr val="202428"/>
-                </a:solidFill>
-                <a:latin typeface="Calibri"/>
-              </a:defRPr>
             </a:pPr>
             <a:r>
-              <a:rPr>
-                <a:latin typeface="Calibri"/>
-              </a:rPr>
-              <a:t>•  The bucket has a notification wired to the SQS processing queue for that prefix</a:t>
+              <a:rPr sz="1400" b="1" i="0">
+                <a:solidFill>
+                  <a:srgbClr val="168A86"/>
+                </a:solidFill>
+                <a:latin typeface="Segoe UI"/>
+              </a:rPr>
+              <a:t>▸  </a:t>
+            </a:r>
+            <a:r>
+              <a:rPr sz="1400" b="0" i="0">
+                <a:solidFill>
+                  <a:srgbClr val="1E242B"/>
+                </a:solidFill>
+                <a:latin typeface="Segoe UI"/>
+              </a:rPr>
+              <a:t>A transient failure is retried automatically; after 3 attempts SQS moves the message to the DLQ on its own</a:t>
             </a:r>
           </a:p>
           <a:p>
             <a:pPr>
+              <a:lnSpc>
+                <a:spcPct val="110000"/>
+              </a:lnSpc>
               <a:spcAft>
-                <a:spcPts val="1000"/>
+                <a:spcPts val="1100"/>
               </a:spcAft>
-              <a:defRPr sz="1700">
-                <a:solidFill>
-                  <a:srgbClr val="202428"/>
-                </a:solidFill>
-                <a:latin typeface="Calibri"/>
-              </a:defRPr>
             </a:pPr>
             <a:r>
-              <a:rPr>
-                <a:latin typeface="Calibri"/>
-              </a:rPr>
-              <a:t>•  S3 emits an ObjectCreated event -&gt; SQS delivers it to the worker - no API involved at all</a:t>
-            </a:r>
-          </a:p>
-          <a:p>
-            <a:pPr>
-              <a:spcAft>
-                <a:spcPts val="1000"/>
-              </a:spcAft>
-              <a:defRPr sz="1700">
-                <a:solidFill>
-                  <a:srgbClr val="202428"/>
-                </a:solidFill>
-                <a:latin typeface="Calibri"/>
-              </a:defRPr>
-            </a:pPr>
-            <a:r>
-              <a:rPr>
-                <a:latin typeface="Calibri"/>
-              </a:rPr>
-              <a:t>•  The worker looks up the row by source_key (the S3 key) - none exists yet, so it creates one</a:t>
-            </a:r>
-          </a:p>
-          <a:p>
-            <a:pPr>
-              <a:spcAft>
-                <a:spcPts val="1000"/>
-              </a:spcAft>
-              <a:defRPr sz="1700">
-                <a:solidFill>
-                  <a:srgbClr val="202428"/>
-                </a:solidFill>
-                <a:latin typeface="Calibri"/>
-              </a:defRPr>
-            </a:pPr>
-            <a:r>
-              <a:rPr>
-                <a:latin typeface="Calibri"/>
-              </a:rPr>
-              <a:t>•  From here it's the identical code path as the API case: validate, claim, score, store</a:t>
-            </a:r>
-          </a:p>
-          <a:p>
-            <a:pPr>
-              <a:spcAft>
-                <a:spcPts val="1000"/>
-              </a:spcAft>
-              <a:defRPr sz="1700">
-                <a:solidFill>
-                  <a:srgbClr val="202428"/>
-                </a:solidFill>
-                <a:latin typeface="Calibri"/>
-              </a:defRPr>
-            </a:pPr>
-            <a:r>
-              <a:rPr>
-                <a:latin typeface="Calibri"/>
-              </a:rPr>
-              <a:t>•  Same S3 key uploaded twice -&gt; the UNIQUE constraint on source_key means the second upload finds the existing row instead of creating a duplicate</a:t>
-            </a:r>
-          </a:p>
-        </p:txBody>
-      </p:sp>
-      <p:sp>
-        <p:nvSpPr>
-          <p:cNvPr id="6" name="TextBox 5"/>
+              <a:rPr sz="1400" b="1" i="0">
+                <a:solidFill>
+                  <a:srgbClr val="168A86"/>
+                </a:solidFill>
+                <a:latin typeface="Segoe UI"/>
+              </a:rPr>
+              <a:t>▸  </a:t>
+            </a:r>
+            <a:r>
+              <a:rPr sz="1400" b="1" i="0">
+                <a:solidFill>
+                  <a:srgbClr val="14253A"/>
+                </a:solidFill>
+                <a:latin typeface="Segoe UI"/>
+              </a:rPr>
+              <a:t>Duplicate deliveries and out-of-order retries are both handled</a:t>
+            </a:r>
+            <a:r>
+              <a:rPr sz="1400" b="0" i="0">
+                <a:solidFill>
+                  <a:srgbClr val="1E242B"/>
+                </a:solidFill>
+                <a:latin typeface="Segoe UI"/>
+              </a:rPr>
+              <a:t> — the same object never scores into two rows, and a stale attempt can't overwrite a newer result</a:t>
+            </a:r>
+          </a:p>
+        </p:txBody>
+      </p:sp>
+      <p:sp>
+        <p:nvSpPr>
+          <p:cNvPr id="23" name="Rectangle 22"/>
+          <p:cNvSpPr/>
+          <p:nvPr/>
+        </p:nvSpPr>
+        <p:spPr>
+          <a:xfrm>
+            <a:off x="640080" y="6272784"/>
+            <a:ext cx="10911535" cy="9525"/>
+          </a:xfrm>
+          <a:prstGeom prst="rect">
+            <a:avLst/>
+          </a:prstGeom>
+          <a:solidFill>
+            <a:srgbClr val="E1E5EA"/>
+          </a:solidFill>
+          <a:ln>
+            <a:noFill/>
+          </a:ln>
+          <a:effectLst/>
+        </p:spPr>
+        <p:style>
+          <a:lnRef idx="1">
+            <a:schemeClr val="accent1"/>
+          </a:lnRef>
+          <a:fillRef idx="3">
+            <a:schemeClr val="accent1"/>
+          </a:fillRef>
+          <a:effectRef idx="2">
+            <a:schemeClr val="accent1"/>
+          </a:effectRef>
+          <a:fontRef idx="minor">
+            <a:schemeClr val="lt1"/>
+          </a:fontRef>
+        </p:style>
+        <p:txBody>
+          <a:bodyPr rtlCol="0" anchor="ctr"/>
+          <a:lstStyle/>
+          <a:p>
+            <a:pPr algn="ctr"/>
+          </a:p>
+        </p:txBody>
+      </p:sp>
+      <p:sp>
+        <p:nvSpPr>
+          <p:cNvPr id="24" name="TextBox 23"/>
           <p:cNvSpPr txBox="1"/>
           <p:nvPr/>
         </p:nvSpPr>
         <p:spPr>
           <a:xfrm>
-            <a:off x="548640" y="6492240"/>
-            <a:ext cx="9144000" cy="274320"/>
+            <a:off x="640080" y="6382512"/>
+            <a:ext cx="7315200" cy="292608"/>
           </a:xfrm>
           <a:prstGeom prst="rect">
             <a:avLst/>
@@ -8537,19 +9871,49 @@
           </a:bodyPr>
           <a:lstStyle/>
           <a:p>
-            <a:pPr>
-              <a:defRPr sz="1000">
-                <a:solidFill>
-                  <a:srgbClr val="636E77"/>
-                </a:solidFill>
-                <a:latin typeface="Calibri"/>
-              </a:defRPr>
-            </a:pPr>
-            <a:r>
-              <a:rPr>
-                <a:latin typeface="Calibri"/>
-              </a:rPr>
-              <a:t>ConvoScore  ·  Direct S3 ingestion</a:t>
+            <a:r>
+              <a:rPr sz="1000" b="0" i="0">
+                <a:solidFill>
+                  <a:srgbClr val="626E79"/>
+                </a:solidFill>
+                <a:latin typeface="Segoe UI"/>
+              </a:rPr>
+              <a:t>ConvoScore  ·  Scoring trigger</a:t>
+            </a:r>
+          </a:p>
+        </p:txBody>
+      </p:sp>
+      <p:sp>
+        <p:nvSpPr>
+          <p:cNvPr id="25" name="TextBox 24"/>
+          <p:cNvSpPr txBox="1"/>
+          <p:nvPr/>
+        </p:nvSpPr>
+        <p:spPr>
+          <a:xfrm>
+            <a:off x="10362895" y="6382512"/>
+            <a:ext cx="1188720" cy="292608"/>
+          </a:xfrm>
+          <a:prstGeom prst="rect">
+            <a:avLst/>
+          </a:prstGeom>
+          <a:noFill/>
+        </p:spPr>
+        <p:txBody>
+          <a:bodyPr wrap="none">
+            <a:spAutoFit/>
+          </a:bodyPr>
+          <a:lstStyle/>
+          <a:p>
+            <a:pPr algn="r"/>
+            <a:r>
+              <a:rPr sz="1000" b="0" i="0">
+                <a:solidFill>
+                  <a:srgbClr val="B7C2CC"/>
+                </a:solidFill>
+                <a:latin typeface="Segoe UI"/>
+              </a:rPr>
+              <a:t>05 / 10</a:t>
             </a:r>
           </a:p>
         </p:txBody>
@@ -8568,7 +9932,7 @@
     <p:bg>
       <p:bgPr>
         <a:solidFill>
-          <a:srgbClr val="F6F7F9"/>
+          <a:srgbClr val="F7F8FA"/>
         </a:solidFill>
         <a:effectLst/>
       </p:bgPr>
@@ -8588,8 +9952,8 @@
         </p:nvSpPr>
         <p:spPr>
           <a:xfrm>
-            <a:off x="548640" y="320040"/>
-            <a:ext cx="11064240" cy="365760"/>
+            <a:off x="640080" y="384048"/>
+            <a:ext cx="9601200" cy="292608"/>
           </a:xfrm>
           <a:prstGeom prst="rect">
             <a:avLst/>
@@ -8602,19 +9966,14 @@
           </a:bodyPr>
           <a:lstStyle/>
           <a:p>
-            <a:pPr>
-              <a:defRPr sz="1300" b="1">
-                <a:solidFill>
-                  <a:srgbClr val="1F8A8A"/>
-                </a:solidFill>
-                <a:latin typeface="Calibri"/>
-              </a:defRPr>
-            </a:pPr>
-            <a:r>
-              <a:rPr>
-                <a:latin typeface="Calibri"/>
-              </a:rPr>
-              <a:t>WORKER INTERNALS</a:t>
+            <a:r>
+              <a:rPr sz="1250" b="1" i="0" spc="160">
+                <a:solidFill>
+                  <a:srgbClr val="168A86"/>
+                </a:solidFill>
+                <a:latin typeface="Segoe UI"/>
+              </a:rPr>
+              <a:t>SCORING SAFELY</a:t>
             </a:r>
           </a:p>
         </p:txBody>
@@ -8627,8 +9986,8 @@
         </p:nvSpPr>
         <p:spPr>
           <a:xfrm>
-            <a:off x="502920" y="621792"/>
-            <a:ext cx="11155680" cy="822960"/>
+            <a:off x="612647" y="658368"/>
+            <a:ext cx="10607040" cy="640080"/>
           </a:xfrm>
           <a:prstGeom prst="rect">
             <a:avLst/>
@@ -8641,19 +10000,14 @@
           </a:bodyPr>
           <a:lstStyle/>
           <a:p>
-            <a:pPr>
-              <a:defRPr sz="3000" b="1">
-                <a:solidFill>
-                  <a:srgbClr val="162A3E"/>
-                </a:solidFill>
-                <a:latin typeface="Calibri"/>
-              </a:defRPr>
-            </a:pPr>
-            <a:r>
-              <a:rPr>
-                <a:latin typeface="Calibri"/>
-              </a:rPr>
-              <a:t>Visibility, retries, DLQ, and claim fencing</a:t>
+            <a:r>
+              <a:rPr sz="2200" b="1" i="0">
+                <a:solidFill>
+                  <a:srgbClr val="14253A"/>
+                </a:solidFill>
+                <a:latin typeface="Segoe UI"/>
+              </a:rPr>
+              <a:t>OpenAI: structured output, bounded retries, isolated secret</a:t>
             </a:r>
           </a:p>
         </p:txBody>
@@ -8666,18 +10020,19 @@
         </p:nvSpPr>
         <p:spPr>
           <a:xfrm>
-            <a:off x="548640" y="1371600"/>
-            <a:ext cx="1828800" cy="38100"/>
+            <a:off x="640080" y="1353312"/>
+            <a:ext cx="1051560" cy="38100"/>
           </a:xfrm>
           <a:prstGeom prst="rect">
             <a:avLst/>
           </a:prstGeom>
           <a:solidFill>
-            <a:srgbClr val="1F8A8A"/>
+            <a:srgbClr val="168A86"/>
           </a:solidFill>
           <a:ln>
             <a:noFill/>
           </a:ln>
+          <a:effectLst/>
         </p:spPr>
         <p:style>
           <a:lnRef idx="1">
@@ -8709,8 +10064,8 @@
         </p:nvSpPr>
         <p:spPr>
           <a:xfrm>
-            <a:off x="548640" y="1645920"/>
-            <a:ext cx="6400800" cy="4754880"/>
+            <a:off x="640080" y="1783080"/>
+            <a:ext cx="10424160" cy="4206240"/>
           </a:xfrm>
           <a:prstGeom prst="rect">
             <a:avLst/>
@@ -8724,130 +10079,199 @@
           <a:lstStyle/>
           <a:p>
             <a:pPr>
+              <a:lnSpc>
+                <a:spcPct val="110000"/>
+              </a:lnSpc>
               <a:spcAft>
-                <a:spcPts val="1000"/>
+                <a:spcPts val="2000"/>
               </a:spcAft>
-              <a:defRPr sz="1500">
-                <a:solidFill>
-                  <a:srgbClr val="202428"/>
-                </a:solidFill>
-                <a:latin typeface="Calibri"/>
-              </a:defRPr>
             </a:pPr>
             <a:r>
-              <a:rPr>
-                <a:latin typeface="Calibri"/>
-              </a:rPr>
-              <a:t>•  SQS visibility timeout (60s) hides a message while it's being worked - if the worker doesn't delete it in time, SQS makes it visible again automatically</a:t>
+              <a:rPr sz="1800" b="1" i="0">
+                <a:solidFill>
+                  <a:srgbClr val="168A86"/>
+                </a:solidFill>
+                <a:latin typeface="Segoe UI"/>
+              </a:rPr>
+              <a:t>▸  </a:t>
+            </a:r>
+            <a:r>
+              <a:rPr sz="1800" b="1" i="0">
+                <a:solidFill>
+                  <a:srgbClr val="14253A"/>
+                </a:solidFill>
+                <a:latin typeface="Segoe UI"/>
+              </a:rPr>
+              <a:t>The model returns a validated structured result</a:t>
+            </a:r>
+            <a:r>
+              <a:rPr sz="1800" b="0" i="0">
+                <a:solidFill>
+                  <a:srgbClr val="1E242B"/>
+                </a:solidFill>
+                <a:latin typeface="Segoe UI"/>
+              </a:rPr>
+              <a:t> — sentiment, a 0–1 risk score, a one-sentence rationale — not text parsed out of free-form output</a:t>
             </a:r>
           </a:p>
           <a:p>
             <a:pPr>
+              <a:lnSpc>
+                <a:spcPct val="110000"/>
+              </a:lnSpc>
               <a:spcAft>
-                <a:spcPts val="1000"/>
+                <a:spcPts val="2000"/>
               </a:spcAft>
-              <a:defRPr sz="1500">
-                <a:solidFill>
-                  <a:srgbClr val="202428"/>
-                </a:solidFill>
-                <a:latin typeface="Calibri"/>
-              </a:defRPr>
             </a:pPr>
             <a:r>
-              <a:rPr>
-                <a:latin typeface="Calibri"/>
-              </a:rPr>
-              <a:t>•  maxReceiveCount = 3: after 3 delivery attempts without success, SQS moves the message to a dead-letter queue on its own - the worker never has to implement that part</a:t>
+              <a:rPr sz="1800" b="1" i="0">
+                <a:solidFill>
+                  <a:srgbClr val="168A86"/>
+                </a:solidFill>
+                <a:latin typeface="Segoe UI"/>
+              </a:rPr>
+              <a:t>▸  </a:t>
+            </a:r>
+            <a:r>
+              <a:rPr sz="1800" b="0" i="0">
+                <a:solidFill>
+                  <a:srgbClr val="1E242B"/>
+                </a:solidFill>
+                <a:latin typeface="Segoe UI"/>
+              </a:rPr>
+              <a:t>Requests are bounded by a timeout and a small number of automatic retries, so one slow or failing call can't stall the worker indefinitely</a:t>
             </a:r>
           </a:p>
           <a:p>
             <a:pPr>
+              <a:lnSpc>
+                <a:spcPct val="110000"/>
+              </a:lnSpc>
               <a:spcAft>
-                <a:spcPts val="1000"/>
+                <a:spcPts val="2000"/>
               </a:spcAft>
-              <a:defRPr sz="1500">
-                <a:solidFill>
-                  <a:srgbClr val="202428"/>
-                </a:solidFill>
-                <a:latin typeface="Calibri"/>
-              </a:defRPr>
             </a:pPr>
             <a:r>
-              <a:rPr>
-                <a:latin typeface="Calibri"/>
-              </a:rPr>
-              <a:t>•  A transient scoring failure is logged and left undeleted every attempt, not just the last one - on the final attempt the row is marked failed/transient_exhausted and still left undeleted, so SQS's own redrive (not our code) is what reaches the DLQ</a:t>
+              <a:rPr sz="1800" b="1" i="0">
+                <a:solidFill>
+                  <a:srgbClr val="168A86"/>
+                </a:solidFill>
+                <a:latin typeface="Segoe UI"/>
+              </a:rPr>
+              <a:t>▸  </a:t>
+            </a:r>
+            <a:r>
+              <a:rPr sz="1800" b="1" i="0">
+                <a:solidFill>
+                  <a:srgbClr val="14253A"/>
+                </a:solidFill>
+                <a:latin typeface="Segoe UI"/>
+              </a:rPr>
+              <a:t>A refusal is treated as a scoring failure like any other, and its explanation text is never stored or logged</a:t>
+            </a:r>
+            <a:r>
+              <a:rPr sz="1800" b="0" i="0">
+                <a:solidFill>
+                  <a:srgbClr val="1E242B"/>
+                </a:solidFill>
+                <a:latin typeface="Segoe UI"/>
+              </a:rPr>
+              <a:t> — it can echo back part of the flagged input</a:t>
             </a:r>
           </a:p>
           <a:p>
             <a:pPr>
+              <a:lnSpc>
+                <a:spcPct val="110000"/>
+              </a:lnSpc>
               <a:spcAft>
-                <a:spcPts val="1000"/>
+                <a:spcPts val="2000"/>
               </a:spcAft>
-              <a:defRPr sz="1500">
-                <a:solidFill>
-                  <a:srgbClr val="202428"/>
-                </a:solidFill>
-                <a:latin typeface="Calibri"/>
-              </a:defRPr>
             </a:pPr>
             <a:r>
-              <a:rPr>
-                <a:latin typeface="Calibri"/>
-              </a:rPr>
-              <a:t>•  Idempotency: source_key is UNIQUE - a duplicate delivery of the same object finds the same row</a:t>
-            </a:r>
-          </a:p>
-          <a:p>
-            <a:pPr>
-              <a:spcAft>
-                <a:spcPts val="1000"/>
-              </a:spcAft>
-              <a:defRPr sz="1500">
-                <a:solidFill>
-                  <a:srgbClr val="202428"/>
-                </a:solidFill>
-                <a:latin typeface="Calibri"/>
-              </a:defRPr>
-            </a:pPr>
-            <a:r>
-              <a:rPr>
-                <a:latin typeface="Calibri"/>
-              </a:rPr>
-              <a:t>•  Claim fencing: every claim gets a fresh processing_token; a superseded (older, slower) attempt can never overwrite what a newer attempt already wrote - it's rejected at the database level</a:t>
-            </a:r>
-          </a:p>
-          <a:p>
-            <a:pPr>
-              <a:spcAft>
-                <a:spcPts val="1000"/>
-              </a:spcAft>
-              <a:defRPr sz="1500">
-                <a:solidFill>
-                  <a:srgbClr val="202428"/>
-                </a:solidFill>
-                <a:latin typeface="Calibri"/>
-              </a:defRPr>
-            </a:pPr>
-            <a:r>
-              <a:rPr>
-                <a:latin typeface="Calibri"/>
-              </a:rPr>
-              <a:t>•  Remaining, honestly stated: a crash between 'OpenAI answered' and 'the guarded commit landed' can still cause one extra paid OpenAI call - SQS is at-least-once and an LLM call can't be made atomic with a DB commit</a:t>
-            </a:r>
-          </a:p>
-        </p:txBody>
-      </p:sp>
-      <p:sp>
-        <p:nvSpPr>
-          <p:cNvPr id="6" name="TextBox 5"/>
+              <a:rPr sz="1800" b="1" i="0">
+                <a:solidFill>
+                  <a:srgbClr val="168A86"/>
+                </a:solidFill>
+                <a:latin typeface="Segoe UI"/>
+              </a:rPr>
+              <a:t>▸  </a:t>
+            </a:r>
+            <a:r>
+              <a:rPr sz="1800" b="1" i="0">
+                <a:solidFill>
+                  <a:srgbClr val="14253A"/>
+                </a:solidFill>
+                <a:latin typeface="Segoe UI"/>
+              </a:rPr>
+              <a:t>The OpenAI API key is only ever injected into the worker</a:t>
+            </a:r>
+            <a:r>
+              <a:rPr sz="1800" b="0" i="0">
+                <a:solidFill>
+                  <a:srgbClr val="1E242B"/>
+                </a:solidFill>
+                <a:latin typeface="Segoe UI"/>
+              </a:rPr>
+              <a:t> — the API service never receives it, because the API never calls OpenAI</a:t>
+            </a:r>
+          </a:p>
+        </p:txBody>
+      </p:sp>
+      <p:sp>
+        <p:nvSpPr>
+          <p:cNvPr id="6" name="Rectangle 5"/>
+          <p:cNvSpPr/>
+          <p:nvPr/>
+        </p:nvSpPr>
+        <p:spPr>
+          <a:xfrm>
+            <a:off x="640080" y="6272784"/>
+            <a:ext cx="10911535" cy="9525"/>
+          </a:xfrm>
+          <a:prstGeom prst="rect">
+            <a:avLst/>
+          </a:prstGeom>
+          <a:solidFill>
+            <a:srgbClr val="E1E5EA"/>
+          </a:solidFill>
+          <a:ln>
+            <a:noFill/>
+          </a:ln>
+          <a:effectLst/>
+        </p:spPr>
+        <p:style>
+          <a:lnRef idx="1">
+            <a:schemeClr val="accent1"/>
+          </a:lnRef>
+          <a:fillRef idx="3">
+            <a:schemeClr val="accent1"/>
+          </a:fillRef>
+          <a:effectRef idx="2">
+            <a:schemeClr val="accent1"/>
+          </a:effectRef>
+          <a:fontRef idx="minor">
+            <a:schemeClr val="lt1"/>
+          </a:fontRef>
+        </p:style>
+        <p:txBody>
+          <a:bodyPr rtlCol="0" anchor="ctr"/>
+          <a:lstStyle/>
+          <a:p>
+            <a:pPr algn="ctr"/>
+          </a:p>
+        </p:txBody>
+      </p:sp>
+      <p:sp>
+        <p:nvSpPr>
+          <p:cNvPr id="7" name="TextBox 6"/>
           <p:cNvSpPr txBox="1"/>
           <p:nvPr/>
         </p:nvSpPr>
         <p:spPr>
           <a:xfrm>
-            <a:off x="548640" y="6492240"/>
-            <a:ext cx="9144000" cy="274320"/>
+            <a:off x="640080" y="6382512"/>
+            <a:ext cx="7315200" cy="292608"/>
           </a:xfrm>
           <a:prstGeom prst="rect">
             <a:avLst/>
@@ -8860,19 +10284,49 @@
           </a:bodyPr>
           <a:lstStyle/>
           <a:p>
-            <a:pPr>
-              <a:defRPr sz="1000">
-                <a:solidFill>
-                  <a:srgbClr val="636E77"/>
-                </a:solidFill>
-                <a:latin typeface="Calibri"/>
-              </a:defRPr>
-            </a:pPr>
-            <a:r>
-              <a:rPr>
-                <a:latin typeface="Calibri"/>
-              </a:rPr>
-              <a:t>ConvoScore  ·  Worker, SQS, idempotency</a:t>
+            <a:r>
+              <a:rPr sz="1000" b="0" i="0">
+                <a:solidFill>
+                  <a:srgbClr val="626E79"/>
+                </a:solidFill>
+                <a:latin typeface="Segoe UI"/>
+              </a:rPr>
+              <a:t>ConvoScore  ·  OpenAI integration</a:t>
+            </a:r>
+          </a:p>
+        </p:txBody>
+      </p:sp>
+      <p:sp>
+        <p:nvSpPr>
+          <p:cNvPr id="8" name="TextBox 7"/>
+          <p:cNvSpPr txBox="1"/>
+          <p:nvPr/>
+        </p:nvSpPr>
+        <p:spPr>
+          <a:xfrm>
+            <a:off x="10362895" y="6382512"/>
+            <a:ext cx="1188720" cy="292608"/>
+          </a:xfrm>
+          <a:prstGeom prst="rect">
+            <a:avLst/>
+          </a:prstGeom>
+          <a:noFill/>
+        </p:spPr>
+        <p:txBody>
+          <a:bodyPr wrap="none">
+            <a:spAutoFit/>
+          </a:bodyPr>
+          <a:lstStyle/>
+          <a:p>
+            <a:pPr algn="r"/>
+            <a:r>
+              <a:rPr sz="1000" b="0" i="0">
+                <a:solidFill>
+                  <a:srgbClr val="B7C2CC"/>
+                </a:solidFill>
+                <a:latin typeface="Segoe UI"/>
+              </a:rPr>
+              <a:t>06 / 10</a:t>
             </a:r>
           </a:p>
         </p:txBody>
@@ -8891,7 +10345,7 @@
     <p:bg>
       <p:bgPr>
         <a:solidFill>
-          <a:srgbClr val="F6F7F9"/>
+          <a:srgbClr val="F7F8FA"/>
         </a:solidFill>
         <a:effectLst/>
       </p:bgPr>
@@ -8911,8 +10365,8 @@
         </p:nvSpPr>
         <p:spPr>
           <a:xfrm>
-            <a:off x="548640" y="320040"/>
-            <a:ext cx="11064240" cy="365760"/>
+            <a:off x="640080" y="384048"/>
+            <a:ext cx="9601200" cy="292608"/>
           </a:xfrm>
           <a:prstGeom prst="rect">
             <a:avLst/>
@@ -8925,19 +10379,14 @@
           </a:bodyPr>
           <a:lstStyle/>
           <a:p>
-            <a:pPr>
-              <a:defRPr sz="1300" b="1">
-                <a:solidFill>
-                  <a:srgbClr val="1F8A8A"/>
-                </a:solidFill>
-                <a:latin typeface="Calibri"/>
-              </a:defRPr>
-            </a:pPr>
-            <a:r>
-              <a:rPr>
-                <a:latin typeface="Calibri"/>
-              </a:rPr>
-              <a:t>SCORING</a:t>
+            <a:r>
+              <a:rPr sz="1250" b="1" i="0" spc="160">
+                <a:solidFill>
+                  <a:srgbClr val="168A86"/>
+                </a:solidFill>
+                <a:latin typeface="Segoe UI"/>
+              </a:rPr>
+              <a:t>STORAGE &amp; REVIEW</a:t>
             </a:r>
           </a:p>
         </p:txBody>
@@ -8950,8 +10399,8 @@
         </p:nvSpPr>
         <p:spPr>
           <a:xfrm>
-            <a:off x="502920" y="621792"/>
-            <a:ext cx="11155680" cy="822960"/>
+            <a:off x="612647" y="658368"/>
+            <a:ext cx="10607040" cy="640080"/>
           </a:xfrm>
           <a:prstGeom prst="rect">
             <a:avLst/>
@@ -8964,19 +10413,14 @@
           </a:bodyPr>
           <a:lstStyle/>
           <a:p>
-            <a:pPr>
-              <a:defRPr sz="3000" b="1">
-                <a:solidFill>
-                  <a:srgbClr val="162A3E"/>
-                </a:solidFill>
-                <a:latin typeface="Calibri"/>
-              </a:defRPr>
-            </a:pPr>
-            <a:r>
-              <a:rPr>
-                <a:latin typeface="Calibri"/>
-              </a:rPr>
-              <a:t>OpenAI integration</a:t>
+            <a:r>
+              <a:rPr sz="2700" b="1" i="0">
+                <a:solidFill>
+                  <a:srgbClr val="14253A"/>
+                </a:solidFill>
+                <a:latin typeface="Segoe UI"/>
+              </a:rPr>
+              <a:t>PostgreSQL durability, and a human in the loop</a:t>
             </a:r>
           </a:p>
         </p:txBody>
@@ -8989,18 +10433,19 @@
         </p:nvSpPr>
         <p:spPr>
           <a:xfrm>
-            <a:off x="548640" y="1371600"/>
-            <a:ext cx="1828800" cy="38100"/>
+            <a:off x="640080" y="1353312"/>
+            <a:ext cx="1051560" cy="38100"/>
           </a:xfrm>
           <a:prstGeom prst="rect">
             <a:avLst/>
           </a:prstGeom>
           <a:solidFill>
-            <a:srgbClr val="1F8A8A"/>
+            <a:srgbClr val="168A86"/>
           </a:solidFill>
           <a:ln>
             <a:noFill/>
           </a:ln>
+          <a:effectLst/>
         </p:spPr>
         <p:style>
           <a:lnRef idx="1">
@@ -9032,8 +10477,8 @@
         </p:nvSpPr>
         <p:spPr>
           <a:xfrm>
-            <a:off x="548640" y="1645920"/>
-            <a:ext cx="6400800" cy="4754880"/>
+            <a:off x="640080" y="1783080"/>
+            <a:ext cx="5943600" cy="4023360"/>
           </a:xfrm>
           <a:prstGeom prst="rect">
             <a:avLst/>
@@ -9047,111 +10492,200 @@
           <a:lstStyle/>
           <a:p>
             <a:pPr>
+              <a:lnSpc>
+                <a:spcPct val="110000"/>
+              </a:lnSpc>
               <a:spcAft>
-                <a:spcPts val="1000"/>
+                <a:spcPts val="2000"/>
               </a:spcAft>
-              <a:defRPr sz="1600">
-                <a:solidFill>
-                  <a:srgbClr val="202428"/>
-                </a:solidFill>
-                <a:latin typeface="Calibri"/>
-              </a:defRPr>
             </a:pPr>
             <a:r>
-              <a:rPr>
-                <a:latin typeface="Calibri"/>
-              </a:rPr>
-              <a:t>•  Structured output: the model returns sentiment, a 0.0-1.0 risk score, and a one-sentence rationale - validated against a Pydantic schema, not parsed out of free text</a:t>
+              <a:rPr sz="1650" b="1" i="0">
+                <a:solidFill>
+                  <a:srgbClr val="168A86"/>
+                </a:solidFill>
+                <a:latin typeface="Segoe UI"/>
+              </a:rPr>
+              <a:t>▸  </a:t>
+            </a:r>
+            <a:r>
+              <a:rPr sz="1650" b="1" i="0">
+                <a:solidFill>
+                  <a:srgbClr val="14253A"/>
+                </a:solidFill>
+                <a:latin typeface="Segoe UI"/>
+              </a:rPr>
+              <a:t>One table, one clear state machine</a:t>
+            </a:r>
+            <a:r>
+              <a:rPr sz="1650" b="0" i="0">
+                <a:solidFill>
+                  <a:srgbClr val="1E242B"/>
+                </a:solidFill>
+                <a:latin typeface="Segoe UI"/>
+              </a:rPr>
+              <a:t> — pending → processing → completed, or failed</a:t>
             </a:r>
           </a:p>
           <a:p>
             <a:pPr>
+              <a:lnSpc>
+                <a:spcPct val="110000"/>
+              </a:lnSpc>
               <a:spcAft>
-                <a:spcPts val="1000"/>
+                <a:spcPts val="2000"/>
               </a:spcAft>
-              <a:defRPr sz="1600">
-                <a:solidFill>
-                  <a:srgbClr val="202428"/>
-                </a:solidFill>
-                <a:latin typeface="Calibri"/>
-              </a:defRPr>
             </a:pPr>
             <a:r>
-              <a:rPr>
-                <a:latin typeface="Calibri"/>
-              </a:rPr>
-              <a:t>•  20s request timeout; tenacity-driven retries with exponential backoff (one retry mechanism, not two - the SDK's own built-in retries are explicitly disabled)</a:t>
+              <a:rPr sz="1650" b="1" i="0">
+                <a:solidFill>
+                  <a:srgbClr val="168A86"/>
+                </a:solidFill>
+                <a:latin typeface="Segoe UI"/>
+              </a:rPr>
+              <a:t>▸  </a:t>
+            </a:r>
+            <a:r>
+              <a:rPr sz="1650" b="1" i="0">
+                <a:solidFill>
+                  <a:srgbClr val="14253A"/>
+                </a:solidFill>
+                <a:latin typeface="Segoe UI"/>
+              </a:rPr>
+              <a:t>Postgres runs as a StatefulSet with a PersistentVolumeClaim</a:t>
+            </a:r>
+            <a:r>
+              <a:rPr sz="1650" b="0" i="0">
+                <a:solidFill>
+                  <a:srgbClr val="1E242B"/>
+                </a:solidFill>
+                <a:latin typeface="Segoe UI"/>
+              </a:rPr>
+              <a:t> — restart the pods and the data, including timestamps, survives unchanged</a:t>
             </a:r>
           </a:p>
           <a:p>
             <a:pPr>
+              <a:lnSpc>
+                <a:spcPct val="110000"/>
+              </a:lnSpc>
               <a:spcAft>
-                <a:spcPts val="1000"/>
+                <a:spcPts val="2000"/>
               </a:spcAft>
-              <a:defRPr sz="1600">
-                <a:solidFill>
-                  <a:srgbClr val="202428"/>
-                </a:solidFill>
-                <a:latin typeface="Calibri"/>
-              </a:defRPr>
             </a:pPr>
             <a:r>
-              <a:rPr>
-                <a:latin typeface="Calibri"/>
-              </a:rPr>
-              <a:t>•  Every result captures the model name, prompt version, input/output token counts, and an estimated cost in USD (a hardcoded per-model price table - an estimate, not a billing feed)</a:t>
-            </a:r>
-          </a:p>
-          <a:p>
-            <a:pPr>
-              <a:spcAft>
-                <a:spcPts val="1000"/>
-              </a:spcAft>
-              <a:defRPr sz="1600">
-                <a:solidFill>
-                  <a:srgbClr val="202428"/>
-                </a:solidFill>
-                <a:latin typeface="Calibri"/>
-              </a:defRPr>
-            </a:pPr>
-            <a:r>
-              <a:rPr>
-                <a:latin typeface="Calibri"/>
-              </a:rPr>
-              <a:t>•  A model refusal is treated like any other scoring failure and retried the same way - and its own explanation text is never stored or logged, since a refusal can echo back part of the flagged input</a:t>
-            </a:r>
-          </a:p>
-          <a:p>
-            <a:pPr>
-              <a:spcAft>
-                <a:spcPts val="1000"/>
-              </a:spcAft>
-              <a:defRPr sz="1600">
-                <a:solidFill>
-                  <a:srgbClr val="202428"/>
-                </a:solidFill>
-                <a:latin typeface="Calibri"/>
-              </a:defRPr>
-            </a:pPr>
-            <a:r>
-              <a:rPr>
-                <a:latin typeface="Calibri"/>
-              </a:rPr>
-              <a:t>•  The OpenAI key reaches only the worker, as a Kubernetes Secret created out-of-band - the API never receives it, because the API never calls OpenAI</a:t>
-            </a:r>
-          </a:p>
-        </p:txBody>
-      </p:sp>
-      <p:sp>
-        <p:nvSpPr>
-          <p:cNvPr id="6" name="TextBox 5"/>
+              <a:rPr sz="1650" b="1" i="0">
+                <a:solidFill>
+                  <a:srgbClr val="168A86"/>
+                </a:solidFill>
+                <a:latin typeface="Segoe UI"/>
+              </a:rPr>
+              <a:t>▸  </a:t>
+            </a:r>
+            <a:r>
+              <a:rPr sz="1650" b="1" i="0">
+                <a:solidFill>
+                  <a:srgbClr val="14253A"/>
+                </a:solidFill>
+                <a:latin typeface="Segoe UI"/>
+              </a:rPr>
+              <a:t>Review is two server-rendered pages</a:t>
+            </a:r>
+            <a:r>
+              <a:rPr sz="1650" b="0" i="0">
+                <a:solidFill>
+                  <a:srgbClr val="1E242B"/>
+                </a:solidFill>
+                <a:latin typeface="Segoe UI"/>
+              </a:rPr>
+              <a:t> — a list and a detail view — no separate frontend to build or ship</a:t>
+            </a:r>
+          </a:p>
+        </p:txBody>
+      </p:sp>
+      <p:pic>
+        <p:nvPicPr>
+          <p:cNvPr id="6" name="Picture 5" descr="review-detail.png"/>
+          <p:cNvPicPr>
+            <a:picLocks noChangeAspect="1"/>
+          </p:cNvPicPr>
+          <p:nvPr/>
+        </p:nvPicPr>
+        <p:blipFill>
+          <a:blip r:embed="rId2"/>
+          <a:stretch>
+            <a:fillRect/>
+          </a:stretch>
+        </p:blipFill>
+        <p:spPr>
+          <a:xfrm>
+            <a:off x="6903720" y="2131695"/>
+            <a:ext cx="4617720" cy="3463290"/>
+          </a:xfrm>
+          <a:prstGeom prst="rect">
+            <a:avLst/>
+          </a:prstGeom>
+          <a:ln w="12700">
+            <a:solidFill>
+              <a:srgbClr val="E1E5EA"/>
+            </a:solidFill>
+          </a:ln>
+        </p:spPr>
+      </p:pic>
+      <p:sp>
+        <p:nvSpPr>
+          <p:cNvPr id="7" name="Rectangle 6"/>
+          <p:cNvSpPr/>
+          <p:nvPr/>
+        </p:nvSpPr>
+        <p:spPr>
+          <a:xfrm>
+            <a:off x="640080" y="6272784"/>
+            <a:ext cx="10911535" cy="9525"/>
+          </a:xfrm>
+          <a:prstGeom prst="rect">
+            <a:avLst/>
+          </a:prstGeom>
+          <a:solidFill>
+            <a:srgbClr val="E1E5EA"/>
+          </a:solidFill>
+          <a:ln>
+            <a:noFill/>
+          </a:ln>
+          <a:effectLst/>
+        </p:spPr>
+        <p:style>
+          <a:lnRef idx="1">
+            <a:schemeClr val="accent1"/>
+          </a:lnRef>
+          <a:fillRef idx="3">
+            <a:schemeClr val="accent1"/>
+          </a:fillRef>
+          <a:effectRef idx="2">
+            <a:schemeClr val="accent1"/>
+          </a:effectRef>
+          <a:fontRef idx="minor">
+            <a:schemeClr val="lt1"/>
+          </a:fontRef>
+        </p:style>
+        <p:txBody>
+          <a:bodyPr rtlCol="0" anchor="ctr"/>
+          <a:lstStyle/>
+          <a:p>
+            <a:pPr algn="ctr"/>
+          </a:p>
+        </p:txBody>
+      </p:sp>
+      <p:sp>
+        <p:nvSpPr>
+          <p:cNvPr id="8" name="TextBox 7"/>
           <p:cNvSpPr txBox="1"/>
           <p:nvPr/>
         </p:nvSpPr>
         <p:spPr>
           <a:xfrm>
-            <a:off x="548640" y="6492240"/>
-            <a:ext cx="9144000" cy="274320"/>
+            <a:off x="640080" y="6382512"/>
+            <a:ext cx="7315200" cy="292608"/>
           </a:xfrm>
           <a:prstGeom prst="rect">
             <a:avLst/>
@@ -9164,19 +10698,49 @@
           </a:bodyPr>
           <a:lstStyle/>
           <a:p>
-            <a:pPr>
-              <a:defRPr sz="1000">
-                <a:solidFill>
-                  <a:srgbClr val="636E77"/>
-                </a:solidFill>
-                <a:latin typeface="Calibri"/>
-              </a:defRPr>
-            </a:pPr>
-            <a:r>
-              <a:rPr>
-                <a:latin typeface="Calibri"/>
-              </a:rPr>
-              <a:t>ConvoScore  ·  OpenAI integration</a:t>
+            <a:r>
+              <a:rPr sz="1000" b="0" i="0">
+                <a:solidFill>
+                  <a:srgbClr val="626E79"/>
+                </a:solidFill>
+                <a:latin typeface="Segoe UI"/>
+              </a:rPr>
+              <a:t>ConvoScore  ·  Storage and review</a:t>
+            </a:r>
+          </a:p>
+        </p:txBody>
+      </p:sp>
+      <p:sp>
+        <p:nvSpPr>
+          <p:cNvPr id="9" name="TextBox 8"/>
+          <p:cNvSpPr txBox="1"/>
+          <p:nvPr/>
+        </p:nvSpPr>
+        <p:spPr>
+          <a:xfrm>
+            <a:off x="10362895" y="6382512"/>
+            <a:ext cx="1188720" cy="292608"/>
+          </a:xfrm>
+          <a:prstGeom prst="rect">
+            <a:avLst/>
+          </a:prstGeom>
+          <a:noFill/>
+        </p:spPr>
+        <p:txBody>
+          <a:bodyPr wrap="none">
+            <a:spAutoFit/>
+          </a:bodyPr>
+          <a:lstStyle/>
+          <a:p>
+            <a:pPr algn="r"/>
+            <a:r>
+              <a:rPr sz="1000" b="0" i="0">
+                <a:solidFill>
+                  <a:srgbClr val="B7C2CC"/>
+                </a:solidFill>
+                <a:latin typeface="Segoe UI"/>
+              </a:rPr>
+              <a:t>07 / 10</a:t>
             </a:r>
           </a:p>
         </p:txBody>
@@ -9195,7 +10759,7 @@
     <p:bg>
       <p:bgPr>
         <a:solidFill>
-          <a:srgbClr val="F6F7F9"/>
+          <a:srgbClr val="F7F8FA"/>
         </a:solidFill>
         <a:effectLst/>
       </p:bgPr>
@@ -9215,8 +10779,8 @@
         </p:nvSpPr>
         <p:spPr>
           <a:xfrm>
-            <a:off x="548640" y="320040"/>
-            <a:ext cx="11064240" cy="365760"/>
+            <a:off x="640080" y="384048"/>
+            <a:ext cx="9601200" cy="292608"/>
           </a:xfrm>
           <a:prstGeom prst="rect">
             <a:avLst/>
@@ -9229,19 +10793,14 @@
           </a:bodyPr>
           <a:lstStyle/>
           <a:p>
-            <a:pPr>
-              <a:defRPr sz="1300" b="1">
-                <a:solidFill>
-                  <a:srgbClr val="1F8A8A"/>
-                </a:solidFill>
-                <a:latin typeface="Calibri"/>
-              </a:defRPr>
-            </a:pPr>
-            <a:r>
-              <a:rPr>
-                <a:latin typeface="Calibri"/>
-              </a:rPr>
-              <a:t>STORAGE AND REVIEW</a:t>
+            <a:r>
+              <a:rPr sz="1250" b="1" i="0" spc="160">
+                <a:solidFill>
+                  <a:srgbClr val="168A86"/>
+                </a:solidFill>
+                <a:latin typeface="Segoe UI"/>
+              </a:rPr>
+              <a:t>OBSERVABILITY</a:t>
             </a:r>
           </a:p>
         </p:txBody>
@@ -9254,8 +10813,8 @@
         </p:nvSpPr>
         <p:spPr>
           <a:xfrm>
-            <a:off x="502920" y="621792"/>
-            <a:ext cx="11155680" cy="822960"/>
+            <a:off x="612647" y="658368"/>
+            <a:ext cx="10607040" cy="640080"/>
           </a:xfrm>
           <a:prstGeom prst="rect">
             <a:avLst/>
@@ -9268,19 +10827,14 @@
           </a:bodyPr>
           <a:lstStyle/>
           <a:p>
-            <a:pPr>
-              <a:defRPr sz="3000" b="1">
-                <a:solidFill>
-                  <a:srgbClr val="162A3E"/>
-                </a:solidFill>
-                <a:latin typeface="Calibri"/>
-              </a:defRPr>
-            </a:pPr>
-            <a:r>
-              <a:rPr>
-                <a:latin typeface="Calibri"/>
-              </a:rPr>
-              <a:t>PostgreSQL, durability, and the review UI</a:t>
+            <a:r>
+              <a:rPr sz="2200" b="1" i="0">
+                <a:solidFill>
+                  <a:srgbClr val="14253A"/>
+                </a:solidFill>
+                <a:latin typeface="Segoe UI"/>
+              </a:rPr>
+              <a:t>Logs, metrics, a dashboard — and a failure induced on purpose</a:t>
             </a:r>
           </a:p>
         </p:txBody>
@@ -9293,18 +10847,19 @@
         </p:nvSpPr>
         <p:spPr>
           <a:xfrm>
-            <a:off x="548640" y="1371600"/>
-            <a:ext cx="1828800" cy="38100"/>
+            <a:off x="640080" y="1353312"/>
+            <a:ext cx="1051560" cy="38100"/>
           </a:xfrm>
           <a:prstGeom prst="rect">
             <a:avLst/>
           </a:prstGeom>
           <a:solidFill>
-            <a:srgbClr val="1F8A8A"/>
+            <a:srgbClr val="168A86"/>
           </a:solidFill>
           <a:ln>
             <a:noFill/>
           </a:ln>
+          <a:effectLst/>
         </p:spPr>
         <p:style>
           <a:lnRef idx="1">
@@ -9336,8 +10891,8 @@
         </p:nvSpPr>
         <p:spPr>
           <a:xfrm>
-            <a:off x="548640" y="1645920"/>
-            <a:ext cx="6126480" cy="4754880"/>
+            <a:off x="640080" y="1783080"/>
+            <a:ext cx="5943600" cy="4114800"/>
           </a:xfrm>
           <a:prstGeom prst="rect">
             <a:avLst/>
@@ -9351,85 +10906,111 @@
           <a:lstStyle/>
           <a:p>
             <a:pPr>
+              <a:lnSpc>
+                <a:spcPct val="110000"/>
+              </a:lnSpc>
               <a:spcAft>
-                <a:spcPts val="1000"/>
+                <a:spcPts val="1800"/>
               </a:spcAft>
-              <a:defRPr sz="1700">
-                <a:solidFill>
-                  <a:srgbClr val="202428"/>
-                </a:solidFill>
-                <a:latin typeface="Calibri"/>
-              </a:defRPr>
             </a:pPr>
             <a:r>
-              <a:rPr>
-                <a:latin typeface="Calibri"/>
-              </a:rPr>
-              <a:t>•  One table, one state machine: pending -&gt; processing -&gt; completed, or -&gt; failed (validation / transient_exhausted / enqueue_failed)</a:t>
+              <a:rPr sz="1550" b="1" i="0">
+                <a:solidFill>
+                  <a:srgbClr val="168A86"/>
+                </a:solidFill>
+                <a:latin typeface="Segoe UI"/>
+              </a:rPr>
+              <a:t>▸  </a:t>
+            </a:r>
+            <a:r>
+              <a:rPr sz="1550" b="0" i="0">
+                <a:solidFill>
+                  <a:srgbClr val="1E242B"/>
+                </a:solidFill>
+                <a:latin typeface="Segoe UI"/>
+              </a:rPr>
+              <a:t>Structured JSON logs and Prometheus metrics cover latency, processing outcomes, DLQ depth, and OpenAI tokens/cost</a:t>
             </a:r>
           </a:p>
           <a:p>
             <a:pPr>
+              <a:lnSpc>
+                <a:spcPct val="110000"/>
+              </a:lnSpc>
               <a:spcAft>
-                <a:spcPts val="1000"/>
+                <a:spcPts val="1800"/>
               </a:spcAft>
-              <a:defRPr sz="1700">
-                <a:solidFill>
-                  <a:srgbClr val="202428"/>
-                </a:solidFill>
-                <a:latin typeface="Calibri"/>
-              </a:defRPr>
             </a:pPr>
             <a:r>
-              <a:rPr>
-                <a:latin typeface="Calibri"/>
-              </a:rPr>
-              <a:t>•  PostgreSQL runs as a StatefulSet backed by a PersistentVolumeClaim</a:t>
+              <a:rPr sz="1550" b="1" i="0">
+                <a:solidFill>
+                  <a:srgbClr val="168A86"/>
+                </a:solidFill>
+                <a:latin typeface="Segoe UI"/>
+              </a:rPr>
+              <a:t>▸  </a:t>
+            </a:r>
+            <a:r>
+              <a:rPr sz="1550" b="1" i="0">
+                <a:solidFill>
+                  <a:srgbClr val="14253A"/>
+                </a:solidFill>
+                <a:latin typeface="Segoe UI"/>
+              </a:rPr>
+              <a:t>A deterministic trigger fails one conversation on purpose</a:t>
+            </a:r>
+            <a:r>
+              <a:rPr sz="1550" b="0" i="0">
+                <a:solidFill>
+                  <a:srgbClr val="1E242B"/>
+                </a:solidFill>
+                <a:latin typeface="Segoe UI"/>
+              </a:rPr>
+              <a:t> — it retries 3 times and lands in the DLQ, while a healthy conversation submitted alongside it completes normally the whole time</a:t>
             </a:r>
           </a:p>
           <a:p>
             <a:pPr>
+              <a:lnSpc>
+                <a:spcPct val="110000"/>
+              </a:lnSpc>
               <a:spcAft>
-                <a:spcPts val="1000"/>
+                <a:spcPts val="1800"/>
               </a:spcAft>
-              <a:defRPr sz="1700">
-                <a:solidFill>
-                  <a:srgbClr val="202428"/>
-                </a:solidFill>
-                <a:latin typeface="Calibri"/>
-              </a:defRPr>
             </a:pPr>
             <a:r>
-              <a:rPr>
-                <a:latin typeface="Calibri"/>
-              </a:rPr>
-              <a:t>•  Durability is demonstrated, not just claimed: the restart demo captures a completed row's full result before deleting the API, worker, and Postgres pods, then proves the row is byte-for-byte identical afterward - including the completed_at timestamp</a:t>
-            </a:r>
-          </a:p>
-          <a:p>
-            <a:pPr>
-              <a:spcAft>
-                <a:spcPts val="1000"/>
-              </a:spcAft>
-              <a:defRPr sz="1700">
-                <a:solidFill>
-                  <a:srgbClr val="202428"/>
-                </a:solidFill>
-                <a:latin typeface="Calibri"/>
-              </a:defRPr>
-            </a:pPr>
-            <a:r>
-              <a:rPr>
-                <a:latin typeface="Calibri"/>
-              </a:rPr>
-              <a:t>•  Human review is two server-rendered pages: a list (status, sentiment, risk, created) and a detail view (full result, timestamps, failure reason if any) - no separate frontend build</a:t>
+              <a:rPr sz="1550" b="1" i="0">
+                <a:solidFill>
+                  <a:srgbClr val="168A86"/>
+                </a:solidFill>
+                <a:latin typeface="Segoe UI"/>
+              </a:rPr>
+              <a:t>▸  </a:t>
+            </a:r>
+            <a:r>
+              <a:rPr sz="1550" b="1" i="0">
+                <a:solidFill>
+                  <a:srgbClr val="14253A"/>
+                </a:solidFill>
+                <a:latin typeface="Segoe UI"/>
+              </a:rPr>
+              <a:t>The dashboard and alerts show it live</a:t>
+            </a:r>
+            <a:r>
+              <a:rPr sz="1550" b="0" i="0">
+                <a:solidFill>
+                  <a:srgbClr val="1E242B"/>
+                </a:solidFill>
+                <a:latin typeface="Segoe UI"/>
+              </a:rPr>
+              <a:t> — DLQ depth rises during the failure, and the alert clears once the message is drained</a:t>
             </a:r>
           </a:p>
         </p:txBody>
       </p:sp>
       <p:pic>
         <p:nvPicPr>
-          <p:cNvPr id="6" name="Picture 5" descr="review-detail.png"/>
+          <p:cNvPr id="6" name="Picture 5" descr="grafana-dashboard.png"/>
           <p:cNvPicPr>
             <a:picLocks noChangeAspect="1"/>
           </p:cNvPicPr>
@@ -9443,29 +11024,102 @@
         </p:blipFill>
         <p:spPr>
           <a:xfrm>
-            <a:off x="6858000" y="2240280"/>
-            <a:ext cx="4754880" cy="3566160"/>
+            <a:off x="6976456" y="1691640"/>
+            <a:ext cx="4426527" cy="3246120"/>
           </a:xfrm>
           <a:prstGeom prst="rect">
             <a:avLst/>
           </a:prstGeom>
           <a:ln w="12700">
             <a:solidFill>
-              <a:srgbClr val="D8DCE0"/>
+              <a:srgbClr val="E1E5EA"/>
             </a:solidFill>
           </a:ln>
         </p:spPr>
       </p:pic>
-      <p:sp>
-        <p:nvSpPr>
-          <p:cNvPr id="7" name="TextBox 6"/>
+      <p:pic>
+        <p:nvPicPr>
+          <p:cNvPr id="7" name="Picture 6" descr="prometheus-alerts.png"/>
+          <p:cNvPicPr>
+            <a:picLocks noChangeAspect="1"/>
+          </p:cNvPicPr>
+          <p:nvPr/>
+        </p:nvPicPr>
+        <p:blipFill>
+          <a:blip r:embed="rId3"/>
+          <a:stretch>
+            <a:fillRect/>
+          </a:stretch>
+        </p:blipFill>
+        <p:spPr>
+          <a:xfrm>
+            <a:off x="7717536" y="5074920"/>
+            <a:ext cx="2944368" cy="1051560"/>
+          </a:xfrm>
+          <a:prstGeom prst="rect">
+            <a:avLst/>
+          </a:prstGeom>
+          <a:ln w="12700">
+            <a:solidFill>
+              <a:srgbClr val="E1E5EA"/>
+            </a:solidFill>
+          </a:ln>
+        </p:spPr>
+      </p:pic>
+      <p:sp>
+        <p:nvSpPr>
+          <p:cNvPr id="8" name="Rectangle 7"/>
+          <p:cNvSpPr/>
+          <p:nvPr/>
+        </p:nvSpPr>
+        <p:spPr>
+          <a:xfrm>
+            <a:off x="640080" y="6272784"/>
+            <a:ext cx="10911535" cy="9525"/>
+          </a:xfrm>
+          <a:prstGeom prst="rect">
+            <a:avLst/>
+          </a:prstGeom>
+          <a:solidFill>
+            <a:srgbClr val="E1E5EA"/>
+          </a:solidFill>
+          <a:ln>
+            <a:noFill/>
+          </a:ln>
+          <a:effectLst/>
+        </p:spPr>
+        <p:style>
+          <a:lnRef idx="1">
+            <a:schemeClr val="accent1"/>
+          </a:lnRef>
+          <a:fillRef idx="3">
+            <a:schemeClr val="accent1"/>
+          </a:fillRef>
+          <a:effectRef idx="2">
+            <a:schemeClr val="accent1"/>
+          </a:effectRef>
+          <a:fontRef idx="minor">
+            <a:schemeClr val="lt1"/>
+          </a:fontRef>
+        </p:style>
+        <p:txBody>
+          <a:bodyPr rtlCol="0" anchor="ctr"/>
+          <a:lstStyle/>
+          <a:p>
+            <a:pPr algn="ctr"/>
+          </a:p>
+        </p:txBody>
+      </p:sp>
+      <p:sp>
+        <p:nvSpPr>
+          <p:cNvPr id="9" name="TextBox 8"/>
           <p:cNvSpPr txBox="1"/>
           <p:nvPr/>
         </p:nvSpPr>
         <p:spPr>
           <a:xfrm>
-            <a:off x="548640" y="6492240"/>
-            <a:ext cx="9144000" cy="274320"/>
+            <a:off x="640080" y="6382512"/>
+            <a:ext cx="7315200" cy="292608"/>
           </a:xfrm>
           <a:prstGeom prst="rect">
             <a:avLst/>
@@ -9478,19 +11132,49 @@
           </a:bodyPr>
           <a:lstStyle/>
           <a:p>
-            <a:pPr>
-              <a:defRPr sz="1000">
-                <a:solidFill>
-                  <a:srgbClr val="636E77"/>
-                </a:solidFill>
-                <a:latin typeface="Calibri"/>
-              </a:defRPr>
-            </a:pPr>
-            <a:r>
-              <a:rPr>
-                <a:latin typeface="Calibri"/>
-              </a:rPr>
-              <a:t>ConvoScore  ·  Persistence and review</a:t>
+            <a:r>
+              <a:rPr sz="1000" b="0" i="0">
+                <a:solidFill>
+                  <a:srgbClr val="626E79"/>
+                </a:solidFill>
+                <a:latin typeface="Segoe UI"/>
+              </a:rPr>
+              <a:t>ConvoScore  ·  Observability</a:t>
+            </a:r>
+          </a:p>
+        </p:txBody>
+      </p:sp>
+      <p:sp>
+        <p:nvSpPr>
+          <p:cNvPr id="10" name="TextBox 9"/>
+          <p:cNvSpPr txBox="1"/>
+          <p:nvPr/>
+        </p:nvSpPr>
+        <p:spPr>
+          <a:xfrm>
+            <a:off x="10362895" y="6382512"/>
+            <a:ext cx="1188720" cy="292608"/>
+          </a:xfrm>
+          <a:prstGeom prst="rect">
+            <a:avLst/>
+          </a:prstGeom>
+          <a:noFill/>
+        </p:spPr>
+        <p:txBody>
+          <a:bodyPr wrap="none">
+            <a:spAutoFit/>
+          </a:bodyPr>
+          <a:lstStyle/>
+          <a:p>
+            <a:pPr algn="r"/>
+            <a:r>
+              <a:rPr sz="1000" b="0" i="0">
+                <a:solidFill>
+                  <a:srgbClr val="B7C2CC"/>
+                </a:solidFill>
+                <a:latin typeface="Segoe UI"/>
+              </a:rPr>
+              <a:t>08 / 10</a:t>
             </a:r>
           </a:p>
         </p:txBody>
@@ -9509,7 +11193,7 @@
     <p:bg>
       <p:bgPr>
         <a:solidFill>
-          <a:srgbClr val="F6F7F9"/>
+          <a:srgbClr val="F7F8FA"/>
         </a:solidFill>
         <a:effectLst/>
       </p:bgPr>
@@ -9529,8 +11213,8 @@
         </p:nvSpPr>
         <p:spPr>
           <a:xfrm>
-            <a:off x="548640" y="320040"/>
-            <a:ext cx="11064240" cy="365760"/>
+            <a:off x="640080" y="384048"/>
+            <a:ext cx="9601200" cy="292608"/>
           </a:xfrm>
           <a:prstGeom prst="rect">
             <a:avLst/>
@@ -9543,19 +11227,14 @@
           </a:bodyPr>
           <a:lstStyle/>
           <a:p>
-            <a:pPr>
-              <a:defRPr sz="1300" b="1">
-                <a:solidFill>
-                  <a:srgbClr val="1F8A8A"/>
-                </a:solidFill>
-                <a:latin typeface="Calibri"/>
-              </a:defRPr>
-            </a:pPr>
-            <a:r>
-              <a:rPr>
-                <a:latin typeface="Calibri"/>
-              </a:rPr>
-              <a:t>DEPLOYMENT</a:t>
+            <a:r>
+              <a:rPr sz="1250" b="1" i="0" spc="160">
+                <a:solidFill>
+                  <a:srgbClr val="168A86"/>
+                </a:solidFill>
+                <a:latin typeface="Segoe UI"/>
+              </a:rPr>
+              <a:t>INFRASTRUCTURE</a:t>
             </a:r>
           </a:p>
         </p:txBody>
@@ -9568,8 +11247,8 @@
         </p:nvSpPr>
         <p:spPr>
           <a:xfrm>
-            <a:off x="502920" y="621792"/>
-            <a:ext cx="11155680" cy="822960"/>
+            <a:off x="612647" y="658368"/>
+            <a:ext cx="10607040" cy="640080"/>
           </a:xfrm>
           <a:prstGeom prst="rect">
             <a:avLst/>
@@ -9582,19 +11261,14 @@
           </a:bodyPr>
           <a:lstStyle/>
           <a:p>
-            <a:pPr>
-              <a:defRPr sz="3000" b="1">
-                <a:solidFill>
-                  <a:srgbClr val="162A3E"/>
-                </a:solidFill>
-                <a:latin typeface="Calibri"/>
-              </a:defRPr>
-            </a:pPr>
-            <a:r>
-              <a:rPr>
-                <a:latin typeface="Calibri"/>
-              </a:rPr>
-              <a:t>Kubernetes: one image, two commands</a:t>
+            <a:r>
+              <a:rPr sz="2200" b="1" i="0">
+                <a:solidFill>
+                  <a:srgbClr val="14253A"/>
+                </a:solidFill>
+                <a:latin typeface="Segoe UI"/>
+              </a:rPr>
+              <a:t>Terraform, one image, Helm, and secrets kept out of the chart</a:t>
             </a:r>
           </a:p>
         </p:txBody>
@@ -9607,18 +11281,19 @@
         </p:nvSpPr>
         <p:spPr>
           <a:xfrm>
-            <a:off x="548640" y="1371600"/>
-            <a:ext cx="1828800" cy="38100"/>
+            <a:off x="640080" y="1353312"/>
+            <a:ext cx="1051560" cy="38100"/>
           </a:xfrm>
           <a:prstGeom prst="rect">
             <a:avLst/>
           </a:prstGeom>
           <a:solidFill>
-            <a:srgbClr val="1F8A8A"/>
+            <a:srgbClr val="168A86"/>
           </a:solidFill>
           <a:ln>
             <a:noFill/>
           </a:ln>
+          <a:effectLst/>
         </p:spPr>
         <p:style>
           <a:lnRef idx="1">
@@ -9650,8 +11325,8 @@
         </p:nvSpPr>
         <p:spPr>
           <a:xfrm>
-            <a:off x="548640" y="1645920"/>
-            <a:ext cx="6400800" cy="4754880"/>
+            <a:off x="640080" y="1783080"/>
+            <a:ext cx="10607040" cy="4206240"/>
           </a:xfrm>
           <a:prstGeom prst="rect">
             <a:avLst/>
@@ -9665,111 +11340,190 @@
           <a:lstStyle/>
           <a:p>
             <a:pPr>
+              <a:lnSpc>
+                <a:spcPct val="110000"/>
+              </a:lnSpc>
               <a:spcAft>
-                <a:spcPts val="1000"/>
+                <a:spcPts val="1700"/>
               </a:spcAft>
-              <a:defRPr sz="1550">
-                <a:solidFill>
-                  <a:srgbClr val="202428"/>
-                </a:solidFill>
-                <a:latin typeface="Calibri"/>
-              </a:defRPr>
             </a:pPr>
             <a:r>
-              <a:rPr>
-                <a:latin typeface="Calibri"/>
-              </a:rPr>
-              <a:t>•  Multi-stage Docker build: a builder stage installs dependencies into a venv; the runtime stage copies only that venv plus app/ - no git metadata, tests, or Terraform state</a:t>
+              <a:rPr sz="1650" b="1" i="0">
+                <a:solidFill>
+                  <a:srgbClr val="168A86"/>
+                </a:solidFill>
+                <a:latin typeface="Segoe UI"/>
+              </a:rPr>
+              <a:t>▸  </a:t>
+            </a:r>
+            <a:r>
+              <a:rPr sz="1650" b="0" i="0">
+                <a:solidFill>
+                  <a:srgbClr val="1E242B"/>
+                </a:solidFill>
+                <a:latin typeface="Segoe UI"/>
+              </a:rPr>
+              <a:t>Terraform provisions the S3 bucket, the processing queue, its DLQ, and the event notification wiring them together</a:t>
             </a:r>
           </a:p>
           <a:p>
             <a:pPr>
+              <a:lnSpc>
+                <a:spcPct val="110000"/>
+              </a:lnSpc>
               <a:spcAft>
-                <a:spcPts val="1000"/>
+                <a:spcPts val="1700"/>
               </a:spcAft>
-              <a:defRPr sz="1550">
-                <a:solidFill>
-                  <a:srgbClr val="202428"/>
-                </a:solidFill>
-                <a:latin typeface="Calibri"/>
-              </a:defRPr>
             </a:pPr>
             <a:r>
-              <a:rPr>
-                <a:latin typeface="Calibri"/>
-              </a:rPr>
-              <a:t>•  One image, two entrypoints - `python -m uvicorn app.main:app` for the API, `python -m app.worker` for the worker - the Helm chart just overrides the container command</a:t>
+              <a:rPr sz="1650" b="1" i="0">
+                <a:solidFill>
+                  <a:srgbClr val="168A86"/>
+                </a:solidFill>
+                <a:latin typeface="Segoe UI"/>
+              </a:rPr>
+              <a:t>▸  </a:t>
+            </a:r>
+            <a:r>
+              <a:rPr sz="1650" b="1" i="0">
+                <a:solidFill>
+                  <a:srgbClr val="14253A"/>
+                </a:solidFill>
+                <a:latin typeface="Segoe UI"/>
+              </a:rPr>
+              <a:t>One Docker image, two runtime commands</a:t>
+            </a:r>
+            <a:r>
+              <a:rPr sz="1650" b="0" i="0">
+                <a:solidFill>
+                  <a:srgbClr val="1E242B"/>
+                </a:solidFill>
+                <a:latin typeface="Segoe UI"/>
+              </a:rPr>
+              <a:t> — the API and worker run the same image; Helm just overrides the container command</a:t>
             </a:r>
           </a:p>
           <a:p>
             <a:pPr>
+              <a:lnSpc>
+                <a:spcPct val="110000"/>
+              </a:lnSpc>
               <a:spcAft>
-                <a:spcPts val="1000"/>
+                <a:spcPts val="1700"/>
               </a:spcAft>
-              <a:defRPr sz="1550">
-                <a:solidFill>
-                  <a:srgbClr val="202428"/>
-                </a:solidFill>
-                <a:latin typeface="Calibri"/>
-              </a:defRPr>
             </a:pPr>
             <a:r>
-              <a:rPr>
-                <a:latin typeface="Calibri"/>
-              </a:rPr>
-              <a:t>•  Non-root (uid 1000), read-only root filesystem, all Linux capabilities dropped, seccomp RuntimeDefault, no auto-mounted service account token</a:t>
+              <a:rPr sz="1650" b="1" i="0">
+                <a:solidFill>
+                  <a:srgbClr val="168A86"/>
+                </a:solidFill>
+                <a:latin typeface="Segoe UI"/>
+              </a:rPr>
+              <a:t>▸  </a:t>
+            </a:r>
+            <a:r>
+              <a:rPr sz="1650" b="0" i="0">
+                <a:solidFill>
+                  <a:srgbClr val="1E242B"/>
+                </a:solidFill>
+                <a:latin typeface="Segoe UI"/>
+              </a:rPr>
+              <a:t>Deployed via Helm: non-root, read-only filesystem, health probes tuned to real startup behavior</a:t>
             </a:r>
           </a:p>
           <a:p>
             <a:pPr>
+              <a:lnSpc>
+                <a:spcPct val="110000"/>
+              </a:lnSpc>
               <a:spcAft>
-                <a:spcPts val="1000"/>
+                <a:spcPts val="1700"/>
               </a:spcAft>
-              <a:defRPr sz="1550">
-                <a:solidFill>
-                  <a:srgbClr val="202428"/>
-                </a:solidFill>
-                <a:latin typeface="Calibri"/>
-              </a:defRPr>
             </a:pPr>
             <a:r>
-              <a:rPr>
-                <a:latin typeface="Calibri"/>
-              </a:rPr>
-              <a:t>•  Startup/liveness/readiness probes tuned to real behavior - readiness runs an actual SELECT 1, not just a pool checkout, and a generous startup grace period covers a cold Postgres pull without the liveness probe killing an otherwise-healthy pod</a:t>
-            </a:r>
-          </a:p>
-          <a:p>
-            <a:pPr>
-              <a:spcAft>
-                <a:spcPts val="1000"/>
-              </a:spcAft>
-              <a:defRPr sz="1550">
-                <a:solidFill>
-                  <a:srgbClr val="202428"/>
-                </a:solidFill>
-                <a:latin typeface="Calibri"/>
-              </a:defRPr>
-            </a:pPr>
-            <a:r>
-              <a:rPr>
-                <a:latin typeface="Calibri"/>
-              </a:rPr>
-              <a:t>•  The image tag is always the current git SHA - deploy.sh now refuses to build at all if any tracked source/Docker/Helm/Terraform file has uncommitted changes, so one tag can never silently point at two different images</a:t>
-            </a:r>
-          </a:p>
-        </p:txBody>
-      </p:sp>
-      <p:sp>
-        <p:nvSpPr>
-          <p:cNvPr id="6" name="TextBox 5"/>
+              <a:rPr sz="1650" b="1" i="0">
+                <a:solidFill>
+                  <a:srgbClr val="168A86"/>
+                </a:solidFill>
+                <a:latin typeface="Segoe UI"/>
+              </a:rPr>
+              <a:t>▸  </a:t>
+            </a:r>
+            <a:r>
+              <a:rPr sz="1650" b="1" i="0">
+                <a:solidFill>
+                  <a:srgbClr val="14253A"/>
+                </a:solidFill>
+                <a:latin typeface="Segoe UI"/>
+              </a:rPr>
+              <a:t>Secrets are created out-of-band and referenced by name</a:t>
+            </a:r>
+            <a:r>
+              <a:rPr sz="1650" b="0" i="0">
+                <a:solidFill>
+                  <a:srgbClr val="1E242B"/>
+                </a:solidFill>
+                <a:latin typeface="Segoe UI"/>
+              </a:rPr>
+              <a:t> — never templated into the chart or committed to Git; IAM policies follow least privilege per component</a:t>
+            </a:r>
+          </a:p>
+        </p:txBody>
+      </p:sp>
+      <p:sp>
+        <p:nvSpPr>
+          <p:cNvPr id="6" name="Rectangle 5"/>
+          <p:cNvSpPr/>
+          <p:nvPr/>
+        </p:nvSpPr>
+        <p:spPr>
+          <a:xfrm>
+            <a:off x="640080" y="6272784"/>
+            <a:ext cx="10911535" cy="9525"/>
+          </a:xfrm>
+          <a:prstGeom prst="rect">
+            <a:avLst/>
+          </a:prstGeom>
+          <a:solidFill>
+            <a:srgbClr val="E1E5EA"/>
+          </a:solidFill>
+          <a:ln>
+            <a:noFill/>
+          </a:ln>
+          <a:effectLst/>
+        </p:spPr>
+        <p:style>
+          <a:lnRef idx="1">
+            <a:schemeClr val="accent1"/>
+          </a:lnRef>
+          <a:fillRef idx="3">
+            <a:schemeClr val="accent1"/>
+          </a:fillRef>
+          <a:effectRef idx="2">
+            <a:schemeClr val="accent1"/>
+          </a:effectRef>
+          <a:fontRef idx="minor">
+            <a:schemeClr val="lt1"/>
+          </a:fontRef>
+        </p:style>
+        <p:txBody>
+          <a:bodyPr rtlCol="0" anchor="ctr"/>
+          <a:lstStyle/>
+          <a:p>
+            <a:pPr algn="ctr"/>
+          </a:p>
+        </p:txBody>
+      </p:sp>
+      <p:sp>
+        <p:nvSpPr>
+          <p:cNvPr id="7" name="TextBox 6"/>
           <p:cNvSpPr txBox="1"/>
           <p:nvPr/>
         </p:nvSpPr>
         <p:spPr>
           <a:xfrm>
-            <a:off x="548640" y="6492240"/>
-            <a:ext cx="9144000" cy="274320"/>
+            <a:off x="640080" y="6382512"/>
+            <a:ext cx="7315200" cy="292608"/>
           </a:xfrm>
           <a:prstGeom prst="rect">
             <a:avLst/>
@@ -9782,19 +11536,49 @@
           </a:bodyPr>
           <a:lstStyle/>
           <a:p>
-            <a:pPr>
-              <a:defRPr sz="1000">
-                <a:solidFill>
-                  <a:srgbClr val="636E77"/>
-                </a:solidFill>
-                <a:latin typeface="Calibri"/>
-              </a:defRPr>
-            </a:pPr>
-            <a:r>
-              <a:rPr>
-                <a:latin typeface="Calibri"/>
-              </a:rPr>
-              <a:t>ConvoScore  ·  Kubernetes and deployment</a:t>
+            <a:r>
+              <a:rPr sz="1000" b="0" i="0">
+                <a:solidFill>
+                  <a:srgbClr val="626E79"/>
+                </a:solidFill>
+                <a:latin typeface="Segoe UI"/>
+              </a:rPr>
+              <a:t>ConvoScore  ·  Infrastructure</a:t>
+            </a:r>
+          </a:p>
+        </p:txBody>
+      </p:sp>
+      <p:sp>
+        <p:nvSpPr>
+          <p:cNvPr id="8" name="TextBox 7"/>
+          <p:cNvSpPr txBox="1"/>
+          <p:nvPr/>
+        </p:nvSpPr>
+        <p:spPr>
+          <a:xfrm>
+            <a:off x="10362895" y="6382512"/>
+            <a:ext cx="1188720" cy="292608"/>
+          </a:xfrm>
+          <a:prstGeom prst="rect">
+            <a:avLst/>
+          </a:prstGeom>
+          <a:noFill/>
+        </p:spPr>
+        <p:txBody>
+          <a:bodyPr wrap="none">
+            <a:spAutoFit/>
+          </a:bodyPr>
+          <a:lstStyle/>
+          <a:p>
+            <a:pPr algn="r"/>
+            <a:r>
+              <a:rPr sz="1000" b="0" i="0">
+                <a:solidFill>
+                  <a:srgbClr val="B7C2CC"/>
+                </a:solidFill>
+                <a:latin typeface="Segoe UI"/>
+              </a:rPr>
+              <a:t>09 / 10</a:t>
             </a:r>
           </a:p>
         </p:txBody>

--- a/presentation/ConvoScore-Presentation.pptx
+++ b/presentation/ConvoScore-Presentation.pptx
@@ -581,7 +581,13 @@
           <a:lstStyle/>
           <a:p>
             <a:r>
-              <a:t>This slide is deliberately unflattering on the left and forward-looking on the right. Every item on the left is something I found or decided, not something a reviewer would have to find themselves. On the right: frame it as 'what I'd do next with more time and a real budget,' not 'what's missing from this submission' - the take-home was deliberately scoped smaller than this list on purpose. Note the duplicate-call window is narrowed by an idempotency key, not solved outright - a transactional outbox pattern doesn't apply here since the non-atomic boundary is an external OpenAI call, not two local writes. Other production gaps worth naming if asked: Prometheus/Grafana storage is emptyDir today (no history across restarts), Grafana uses anonymous viewer access, and cost figures are estimates from a hardcoded pricing table - all explicit, documented tradeoffs for a local take-home, not oversights.</a:t>
+              <a:t>This is a proposed future CI/CD path, not something implemented in this take-home - worth being explicit about that distinction if asked. The flow: a commit to the application repo triggers CI (tests, security scanning, image build, SHA tag, push to a registry), which then updates the image tag in a separate GitOps repo; Argo CD watches that repo and reconciles the cluster to match it. Rollback becomes 'revert a Git commit,' not 'run a manual kubectl command.' Separating the GitOps repo from the application repo also means environment-specific Helm values (dev/staging/prod) never need to touch the application codebase.</a:t>
+            </a:r>
+          </a:p>
+          <a:p/>
+          <a:p>
+            <a:r>
+              <a:t>Honest tradeoffs/exclusions worth naming if asked, since they're not their own slide anymore: no exactly-once processing claim anywhere (SQS is at-least-once by design); a crash between an OpenAI response and the DB commit can still cause one extra paid call, bounded and rare, not eliminated (narrowed - not solved - by an idempotency key on the LLM call, not a transactional outbox, since the non-atomic boundary is an external API call, not two local writes); LocalStack doesn't enforce the IAM policies Terraform defines; and the take-home was scoped down on purpose - no CI, no service mesh, no ORM, no new database.</a:t>
             </a:r>
           </a:p>
         </p:txBody>
@@ -4449,7 +4455,7 @@
                 </a:solidFill>
                 <a:latin typeface="Segoe UI"/>
               </a:rPr>
-              <a:t>HONEST TRADEOFFS</a:t>
+              <a:t>LOOKING AHEAD</a:t>
             </a:r>
           </a:p>
         </p:txBody>
@@ -4483,7 +4489,7 @@
                 </a:solidFill>
                 <a:latin typeface="Segoe UI"/>
               </a:rPr>
-              <a:t>What this skips, and what changes in production</a:t>
+              <a:t>Production deployment roadmap</a:t>
             </a:r>
           </a:p>
         </p:txBody>
@@ -4534,14 +4540,762 @@
       </p:sp>
       <p:sp>
         <p:nvSpPr>
-          <p:cNvPr id="5" name="Rounded Rectangle 4"/>
+          <p:cNvPr id="5" name="TextBox 4"/>
+          <p:cNvSpPr txBox="1"/>
+          <p:nvPr/>
+        </p:nvSpPr>
+        <p:spPr>
+          <a:xfrm>
+            <a:off x="640080" y="1444752"/>
+            <a:ext cx="10607040" cy="274320"/>
+          </a:xfrm>
+          <a:prstGeom prst="rect">
+            <a:avLst/>
+          </a:prstGeom>
+          <a:noFill/>
+        </p:spPr>
+        <p:txBody>
+          <a:bodyPr wrap="none">
+            <a:spAutoFit/>
+          </a:bodyPr>
+          <a:lstStyle/>
+          <a:p>
+            <a:r>
+              <a:rPr sz="1200" b="0" i="1">
+                <a:solidFill>
+                  <a:srgbClr val="626E79"/>
+                </a:solidFill>
+                <a:latin typeface="Segoe UI"/>
+              </a:rPr>
+              <a:t>A proposed CI/CD path for production — not part of this take-home's current deployment</a:t>
+            </a:r>
+          </a:p>
+        </p:txBody>
+      </p:sp>
+      <p:sp>
+        <p:nvSpPr>
+          <p:cNvPr id="6" name="Rounded Rectangle 5"/>
           <p:cNvSpPr/>
           <p:nvPr/>
         </p:nvSpPr>
         <p:spPr>
           <a:xfrm>
-            <a:off x="640080" y="1737360"/>
-            <a:ext cx="5074920" cy="4206240"/>
+            <a:off x="640080" y="1874519"/>
+            <a:ext cx="1600200" cy="868680"/>
+          </a:xfrm>
+          <a:prstGeom prst="roundRect">
+            <a:avLst>
+              <a:gd name="adj" fmla="val 12000"/>
+            </a:avLst>
+          </a:prstGeom>
+          <a:solidFill>
+            <a:srgbClr val="4A5A6A"/>
+          </a:solidFill>
+          <a:ln>
+            <a:noFill/>
+          </a:ln>
+          <a:effectLst/>
+        </p:spPr>
+        <p:style>
+          <a:lnRef idx="1">
+            <a:schemeClr val="accent1"/>
+          </a:lnRef>
+          <a:fillRef idx="3">
+            <a:schemeClr val="accent1"/>
+          </a:fillRef>
+          <a:effectRef idx="2">
+            <a:schemeClr val="accent1"/>
+          </a:effectRef>
+          <a:fontRef idx="minor">
+            <a:schemeClr val="lt1"/>
+          </a:fontRef>
+        </p:style>
+        <p:txBody>
+          <a:bodyPr rtlCol="0" anchor="ctr" wrap="square" lIns="50800" rIns="50800"/>
+          <a:lstStyle/>
+          <a:p>
+            <a:pPr algn="ctr">
+              <a:lnSpc>
+                <a:spcPct val="100000"/>
+              </a:lnSpc>
+            </a:pPr>
+            <a:r>
+              <a:rPr sz="1250" b="1" i="0">
+                <a:solidFill>
+                  <a:srgbClr val="FFFFFF"/>
+                </a:solidFill>
+                <a:latin typeface="Segoe UI"/>
+              </a:rPr>
+              <a:t>Application
+repository</a:t>
+            </a:r>
+          </a:p>
+        </p:txBody>
+      </p:sp>
+      <p:sp>
+        <p:nvSpPr>
+          <p:cNvPr id="7" name="Rounded Rectangle 6"/>
+          <p:cNvSpPr/>
+          <p:nvPr/>
+        </p:nvSpPr>
+        <p:spPr>
+          <a:xfrm>
+            <a:off x="2441448" y="1874519"/>
+            <a:ext cx="1600200" cy="868680"/>
+          </a:xfrm>
+          <a:prstGeom prst="roundRect">
+            <a:avLst>
+              <a:gd name="adj" fmla="val 12000"/>
+            </a:avLst>
+          </a:prstGeom>
+          <a:solidFill>
+            <a:srgbClr val="168A86"/>
+          </a:solidFill>
+          <a:ln>
+            <a:noFill/>
+          </a:ln>
+          <a:effectLst/>
+        </p:spPr>
+        <p:style>
+          <a:lnRef idx="1">
+            <a:schemeClr val="accent1"/>
+          </a:lnRef>
+          <a:fillRef idx="3">
+            <a:schemeClr val="accent1"/>
+          </a:fillRef>
+          <a:effectRef idx="2">
+            <a:schemeClr val="accent1"/>
+          </a:effectRef>
+          <a:fontRef idx="minor">
+            <a:schemeClr val="lt1"/>
+          </a:fontRef>
+        </p:style>
+        <p:txBody>
+          <a:bodyPr rtlCol="0" anchor="ctr" wrap="square" lIns="50800" rIns="50800"/>
+          <a:lstStyle/>
+          <a:p>
+            <a:pPr algn="ctr">
+              <a:lnSpc>
+                <a:spcPct val="100000"/>
+              </a:lnSpc>
+            </a:pPr>
+            <a:r>
+              <a:rPr sz="1250" b="1" i="0">
+                <a:solidFill>
+                  <a:srgbClr val="FFFFFF"/>
+                </a:solidFill>
+                <a:latin typeface="Segoe UI"/>
+              </a:rPr>
+              <a:t>CI pipeline</a:t>
+            </a:r>
+          </a:p>
+        </p:txBody>
+      </p:sp>
+      <p:sp>
+        <p:nvSpPr>
+          <p:cNvPr id="8" name="Rounded Rectangle 7"/>
+          <p:cNvSpPr/>
+          <p:nvPr/>
+        </p:nvSpPr>
+        <p:spPr>
+          <a:xfrm>
+            <a:off x="4242816" y="1874519"/>
+            <a:ext cx="1600200" cy="868680"/>
+          </a:xfrm>
+          <a:prstGeom prst="roundRect">
+            <a:avLst>
+              <a:gd name="adj" fmla="val 12000"/>
+            </a:avLst>
+          </a:prstGeom>
+          <a:solidFill>
+            <a:srgbClr val="4A5A6A"/>
+          </a:solidFill>
+          <a:ln>
+            <a:noFill/>
+          </a:ln>
+          <a:effectLst/>
+        </p:spPr>
+        <p:style>
+          <a:lnRef idx="1">
+            <a:schemeClr val="accent1"/>
+          </a:lnRef>
+          <a:fillRef idx="3">
+            <a:schemeClr val="accent1"/>
+          </a:fillRef>
+          <a:effectRef idx="2">
+            <a:schemeClr val="accent1"/>
+          </a:effectRef>
+          <a:fontRef idx="minor">
+            <a:schemeClr val="lt1"/>
+          </a:fontRef>
+        </p:style>
+        <p:txBody>
+          <a:bodyPr rtlCol="0" anchor="ctr" wrap="square" lIns="50800" rIns="50800"/>
+          <a:lstStyle/>
+          <a:p>
+            <a:pPr algn="ctr">
+              <a:lnSpc>
+                <a:spcPct val="100000"/>
+              </a:lnSpc>
+            </a:pPr>
+            <a:r>
+              <a:rPr sz="1250" b="1" i="0">
+                <a:solidFill>
+                  <a:srgbClr val="FFFFFF"/>
+                </a:solidFill>
+                <a:latin typeface="Segoe UI"/>
+              </a:rPr>
+              <a:t>Container
+registry</a:t>
+            </a:r>
+          </a:p>
+        </p:txBody>
+      </p:sp>
+      <p:sp>
+        <p:nvSpPr>
+          <p:cNvPr id="9" name="Rounded Rectangle 8"/>
+          <p:cNvSpPr/>
+          <p:nvPr/>
+        </p:nvSpPr>
+        <p:spPr>
+          <a:xfrm>
+            <a:off x="6044184" y="1874519"/>
+            <a:ext cx="1600200" cy="868680"/>
+          </a:xfrm>
+          <a:prstGeom prst="roundRect">
+            <a:avLst>
+              <a:gd name="adj" fmla="val 12000"/>
+            </a:avLst>
+          </a:prstGeom>
+          <a:solidFill>
+            <a:srgbClr val="C97A1A"/>
+          </a:solidFill>
+          <a:ln>
+            <a:noFill/>
+          </a:ln>
+          <a:effectLst/>
+        </p:spPr>
+        <p:style>
+          <a:lnRef idx="1">
+            <a:schemeClr val="accent1"/>
+          </a:lnRef>
+          <a:fillRef idx="3">
+            <a:schemeClr val="accent1"/>
+          </a:fillRef>
+          <a:effectRef idx="2">
+            <a:schemeClr val="accent1"/>
+          </a:effectRef>
+          <a:fontRef idx="minor">
+            <a:schemeClr val="lt1"/>
+          </a:fontRef>
+        </p:style>
+        <p:txBody>
+          <a:bodyPr rtlCol="0" anchor="ctr" wrap="square" lIns="50800" rIns="50800"/>
+          <a:lstStyle/>
+          <a:p>
+            <a:pPr algn="ctr">
+              <a:lnSpc>
+                <a:spcPct val="100000"/>
+              </a:lnSpc>
+            </a:pPr>
+            <a:r>
+              <a:rPr sz="1250" b="1" i="0">
+                <a:solidFill>
+                  <a:srgbClr val="FFFFFF"/>
+                </a:solidFill>
+                <a:latin typeface="Segoe UI"/>
+              </a:rPr>
+              <a:t>GitOps
+repository</a:t>
+            </a:r>
+          </a:p>
+        </p:txBody>
+      </p:sp>
+      <p:sp>
+        <p:nvSpPr>
+          <p:cNvPr id="10" name="Rounded Rectangle 9"/>
+          <p:cNvSpPr/>
+          <p:nvPr/>
+        </p:nvSpPr>
+        <p:spPr>
+          <a:xfrm>
+            <a:off x="7845552" y="1874519"/>
+            <a:ext cx="1600200" cy="868680"/>
+          </a:xfrm>
+          <a:prstGeom prst="roundRect">
+            <a:avLst>
+              <a:gd name="adj" fmla="val 12000"/>
+            </a:avLst>
+          </a:prstGeom>
+          <a:solidFill>
+            <a:srgbClr val="0F6664"/>
+          </a:solidFill>
+          <a:ln>
+            <a:noFill/>
+          </a:ln>
+          <a:effectLst/>
+        </p:spPr>
+        <p:style>
+          <a:lnRef idx="1">
+            <a:schemeClr val="accent1"/>
+          </a:lnRef>
+          <a:fillRef idx="3">
+            <a:schemeClr val="accent1"/>
+          </a:fillRef>
+          <a:effectRef idx="2">
+            <a:schemeClr val="accent1"/>
+          </a:effectRef>
+          <a:fontRef idx="minor">
+            <a:schemeClr val="lt1"/>
+          </a:fontRef>
+        </p:style>
+        <p:txBody>
+          <a:bodyPr rtlCol="0" anchor="ctr" wrap="square" lIns="50800" rIns="50800"/>
+          <a:lstStyle/>
+          <a:p>
+            <a:pPr algn="ctr">
+              <a:lnSpc>
+                <a:spcPct val="100000"/>
+              </a:lnSpc>
+            </a:pPr>
+            <a:r>
+              <a:rPr sz="1250" b="1" i="0">
+                <a:solidFill>
+                  <a:srgbClr val="FFFFFF"/>
+                </a:solidFill>
+                <a:latin typeface="Segoe UI"/>
+              </a:rPr>
+              <a:t>Argo CD</a:t>
+            </a:r>
+          </a:p>
+        </p:txBody>
+      </p:sp>
+      <p:sp>
+        <p:nvSpPr>
+          <p:cNvPr id="11" name="Rounded Rectangle 10"/>
+          <p:cNvSpPr/>
+          <p:nvPr/>
+        </p:nvSpPr>
+        <p:spPr>
+          <a:xfrm>
+            <a:off x="9646919" y="1874519"/>
+            <a:ext cx="1600200" cy="868680"/>
+          </a:xfrm>
+          <a:prstGeom prst="roundRect">
+            <a:avLst>
+              <a:gd name="adj" fmla="val 12000"/>
+            </a:avLst>
+          </a:prstGeom>
+          <a:solidFill>
+            <a:srgbClr val="14253A"/>
+          </a:solidFill>
+          <a:ln>
+            <a:noFill/>
+          </a:ln>
+          <a:effectLst/>
+        </p:spPr>
+        <p:style>
+          <a:lnRef idx="1">
+            <a:schemeClr val="accent1"/>
+          </a:lnRef>
+          <a:fillRef idx="3">
+            <a:schemeClr val="accent1"/>
+          </a:fillRef>
+          <a:effectRef idx="2">
+            <a:schemeClr val="accent1"/>
+          </a:effectRef>
+          <a:fontRef idx="minor">
+            <a:schemeClr val="lt1"/>
+          </a:fontRef>
+        </p:style>
+        <p:txBody>
+          <a:bodyPr rtlCol="0" anchor="ctr" wrap="square" lIns="50800" rIns="50800"/>
+          <a:lstStyle/>
+          <a:p>
+            <a:pPr algn="ctr">
+              <a:lnSpc>
+                <a:spcPct val="100000"/>
+              </a:lnSpc>
+            </a:pPr>
+            <a:r>
+              <a:rPr sz="1150" b="1" i="0">
+                <a:solidFill>
+                  <a:srgbClr val="FFFFFF"/>
+                </a:solidFill>
+                <a:latin typeface="Segoe UI"/>
+              </a:rPr>
+              <a:t>Kubernetes
+production
+cluster</a:t>
+            </a:r>
+          </a:p>
+        </p:txBody>
+      </p:sp>
+      <p:cxnSp>
+        <p:nvCxnSpPr>
+          <p:cNvPr id="12" name="Connector 11"/>
+          <p:cNvCxnSpPr/>
+          <p:nvPr/>
+        </p:nvCxnSpPr>
+        <p:spPr>
+          <a:xfrm>
+            <a:off x="2240280" y="2308860"/>
+            <a:ext cx="201168" cy="0"/>
+          </a:xfrm>
+          <a:prstGeom prst="line">
+            <a:avLst/>
+          </a:prstGeom>
+          <a:ln w="22225">
+            <a:solidFill>
+              <a:srgbClr val="4A5A6A"/>
+            </a:solidFill>
+            <a:tailEnd type="triangle" w="med" len="med"/>
+          </a:ln>
+        </p:spPr>
+        <p:style>
+          <a:lnRef idx="2">
+            <a:schemeClr val="accent1"/>
+          </a:lnRef>
+          <a:fillRef idx="0">
+            <a:schemeClr val="accent1"/>
+          </a:fillRef>
+          <a:effectRef idx="1">
+            <a:schemeClr val="accent1"/>
+          </a:effectRef>
+          <a:fontRef idx="minor">
+            <a:schemeClr val="tx1"/>
+          </a:fontRef>
+        </p:style>
+      </p:cxnSp>
+      <p:sp>
+        <p:nvSpPr>
+          <p:cNvPr id="13" name="TextBox 12"/>
+          <p:cNvSpPr txBox="1"/>
+          <p:nvPr/>
+        </p:nvSpPr>
+        <p:spPr>
+          <a:xfrm>
+            <a:off x="1540764" y="2834640"/>
+            <a:ext cx="1600200" cy="274320"/>
+          </a:xfrm>
+          <a:prstGeom prst="rect">
+            <a:avLst/>
+          </a:prstGeom>
+          <a:noFill/>
+        </p:spPr>
+        <p:txBody>
+          <a:bodyPr wrap="none" lIns="0" rIns="0">
+            <a:spAutoFit/>
+          </a:bodyPr>
+          <a:lstStyle/>
+          <a:p>
+            <a:pPr algn="ctr"/>
+            <a:r>
+              <a:rPr sz="1050" b="0" i="0">
+                <a:solidFill>
+                  <a:srgbClr val="626E79"/>
+                </a:solidFill>
+                <a:latin typeface="Segoe UI"/>
+              </a:rPr>
+              <a:t>commit</a:t>
+            </a:r>
+          </a:p>
+        </p:txBody>
+      </p:sp>
+      <p:cxnSp>
+        <p:nvCxnSpPr>
+          <p:cNvPr id="14" name="Connector 13"/>
+          <p:cNvCxnSpPr/>
+          <p:nvPr/>
+        </p:nvCxnSpPr>
+        <p:spPr>
+          <a:xfrm>
+            <a:off x="4041648" y="2308860"/>
+            <a:ext cx="201168" cy="0"/>
+          </a:xfrm>
+          <a:prstGeom prst="line">
+            <a:avLst/>
+          </a:prstGeom>
+          <a:ln w="22225">
+            <a:solidFill>
+              <a:srgbClr val="4A5A6A"/>
+            </a:solidFill>
+            <a:tailEnd type="triangle" w="med" len="med"/>
+          </a:ln>
+        </p:spPr>
+        <p:style>
+          <a:lnRef idx="2">
+            <a:schemeClr val="accent1"/>
+          </a:lnRef>
+          <a:fillRef idx="0">
+            <a:schemeClr val="accent1"/>
+          </a:fillRef>
+          <a:effectRef idx="1">
+            <a:schemeClr val="accent1"/>
+          </a:effectRef>
+          <a:fontRef idx="minor">
+            <a:schemeClr val="tx1"/>
+          </a:fontRef>
+        </p:style>
+      </p:cxnSp>
+      <p:sp>
+        <p:nvSpPr>
+          <p:cNvPr id="15" name="TextBox 14"/>
+          <p:cNvSpPr txBox="1"/>
+          <p:nvPr/>
+        </p:nvSpPr>
+        <p:spPr>
+          <a:xfrm>
+            <a:off x="3342131" y="2834640"/>
+            <a:ext cx="1600200" cy="274320"/>
+          </a:xfrm>
+          <a:prstGeom prst="rect">
+            <a:avLst/>
+          </a:prstGeom>
+          <a:noFill/>
+        </p:spPr>
+        <p:txBody>
+          <a:bodyPr wrap="none" lIns="0" rIns="0">
+            <a:spAutoFit/>
+          </a:bodyPr>
+          <a:lstStyle/>
+          <a:p>
+            <a:pPr algn="ctr"/>
+            <a:r>
+              <a:rPr sz="1050" b="0" i="0">
+                <a:solidFill>
+                  <a:srgbClr val="626E79"/>
+                </a:solidFill>
+                <a:latin typeface="Segoe UI"/>
+              </a:rPr>
+              <a:t>build &amp; push</a:t>
+            </a:r>
+          </a:p>
+        </p:txBody>
+      </p:sp>
+      <p:cxnSp>
+        <p:nvCxnSpPr>
+          <p:cNvPr id="16" name="Connector 15"/>
+          <p:cNvCxnSpPr/>
+          <p:nvPr/>
+        </p:nvCxnSpPr>
+        <p:spPr>
+          <a:xfrm>
+            <a:off x="5843016" y="2308860"/>
+            <a:ext cx="201168" cy="0"/>
+          </a:xfrm>
+          <a:prstGeom prst="line">
+            <a:avLst/>
+          </a:prstGeom>
+          <a:ln w="22225">
+            <a:solidFill>
+              <a:srgbClr val="4A5A6A"/>
+            </a:solidFill>
+            <a:tailEnd type="triangle" w="med" len="med"/>
+          </a:ln>
+        </p:spPr>
+        <p:style>
+          <a:lnRef idx="2">
+            <a:schemeClr val="accent1"/>
+          </a:lnRef>
+          <a:fillRef idx="0">
+            <a:schemeClr val="accent1"/>
+          </a:fillRef>
+          <a:effectRef idx="1">
+            <a:schemeClr val="accent1"/>
+          </a:effectRef>
+          <a:fontRef idx="minor">
+            <a:schemeClr val="tx1"/>
+          </a:fontRef>
+        </p:style>
+      </p:cxnSp>
+      <p:sp>
+        <p:nvSpPr>
+          <p:cNvPr id="17" name="TextBox 16"/>
+          <p:cNvSpPr txBox="1"/>
+          <p:nvPr/>
+        </p:nvSpPr>
+        <p:spPr>
+          <a:xfrm>
+            <a:off x="5143500" y="2834640"/>
+            <a:ext cx="1600200" cy="274320"/>
+          </a:xfrm>
+          <a:prstGeom prst="rect">
+            <a:avLst/>
+          </a:prstGeom>
+          <a:noFill/>
+        </p:spPr>
+        <p:txBody>
+          <a:bodyPr wrap="none" lIns="0" rIns="0">
+            <a:spAutoFit/>
+          </a:bodyPr>
+          <a:lstStyle/>
+          <a:p>
+            <a:pPr algn="ctr"/>
+            <a:r>
+              <a:rPr sz="1050" b="0" i="0">
+                <a:solidFill>
+                  <a:srgbClr val="626E79"/>
+                </a:solidFill>
+                <a:latin typeface="Segoe UI"/>
+              </a:rPr>
+              <a:t>update tag</a:t>
+            </a:r>
+          </a:p>
+        </p:txBody>
+      </p:sp>
+      <p:cxnSp>
+        <p:nvCxnSpPr>
+          <p:cNvPr id="18" name="Connector 17"/>
+          <p:cNvCxnSpPr/>
+          <p:nvPr/>
+        </p:nvCxnSpPr>
+        <p:spPr>
+          <a:xfrm>
+            <a:off x="7644383" y="2308860"/>
+            <a:ext cx="201169" cy="0"/>
+          </a:xfrm>
+          <a:prstGeom prst="line">
+            <a:avLst/>
+          </a:prstGeom>
+          <a:ln w="22225">
+            <a:solidFill>
+              <a:srgbClr val="4A5A6A"/>
+            </a:solidFill>
+            <a:tailEnd type="triangle" w="med" len="med"/>
+          </a:ln>
+        </p:spPr>
+        <p:style>
+          <a:lnRef idx="2">
+            <a:schemeClr val="accent1"/>
+          </a:lnRef>
+          <a:fillRef idx="0">
+            <a:schemeClr val="accent1"/>
+          </a:fillRef>
+          <a:effectRef idx="1">
+            <a:schemeClr val="accent1"/>
+          </a:effectRef>
+          <a:fontRef idx="minor">
+            <a:schemeClr val="tx1"/>
+          </a:fontRef>
+        </p:style>
+      </p:cxnSp>
+      <p:sp>
+        <p:nvSpPr>
+          <p:cNvPr id="19" name="TextBox 18"/>
+          <p:cNvSpPr txBox="1"/>
+          <p:nvPr/>
+        </p:nvSpPr>
+        <p:spPr>
+          <a:xfrm>
+            <a:off x="6944867" y="2834640"/>
+            <a:ext cx="1600200" cy="274320"/>
+          </a:xfrm>
+          <a:prstGeom prst="rect">
+            <a:avLst/>
+          </a:prstGeom>
+          <a:noFill/>
+        </p:spPr>
+        <p:txBody>
+          <a:bodyPr wrap="none" lIns="0" rIns="0">
+            <a:spAutoFit/>
+          </a:bodyPr>
+          <a:lstStyle/>
+          <a:p>
+            <a:pPr algn="ctr"/>
+            <a:r>
+              <a:rPr sz="1050" b="0" i="0">
+                <a:solidFill>
+                  <a:srgbClr val="626E79"/>
+                </a:solidFill>
+                <a:latin typeface="Segoe UI"/>
+              </a:rPr>
+              <a:t>git sync</a:t>
+            </a:r>
+          </a:p>
+        </p:txBody>
+      </p:sp>
+      <p:cxnSp>
+        <p:nvCxnSpPr>
+          <p:cNvPr id="20" name="Connector 19"/>
+          <p:cNvCxnSpPr/>
+          <p:nvPr/>
+        </p:nvCxnSpPr>
+        <p:spPr>
+          <a:xfrm>
+            <a:off x="9445752" y="2308860"/>
+            <a:ext cx="201167" cy="0"/>
+          </a:xfrm>
+          <a:prstGeom prst="line">
+            <a:avLst/>
+          </a:prstGeom>
+          <a:ln w="22225">
+            <a:solidFill>
+              <a:srgbClr val="4A5A6A"/>
+            </a:solidFill>
+            <a:tailEnd type="triangle" w="med" len="med"/>
+          </a:ln>
+        </p:spPr>
+        <p:style>
+          <a:lnRef idx="2">
+            <a:schemeClr val="accent1"/>
+          </a:lnRef>
+          <a:fillRef idx="0">
+            <a:schemeClr val="accent1"/>
+          </a:fillRef>
+          <a:effectRef idx="1">
+            <a:schemeClr val="accent1"/>
+          </a:effectRef>
+          <a:fontRef idx="minor">
+            <a:schemeClr val="tx1"/>
+          </a:fontRef>
+        </p:style>
+      </p:cxnSp>
+      <p:sp>
+        <p:nvSpPr>
+          <p:cNvPr id="21" name="TextBox 20"/>
+          <p:cNvSpPr txBox="1"/>
+          <p:nvPr/>
+        </p:nvSpPr>
+        <p:spPr>
+          <a:xfrm>
+            <a:off x="8746236" y="2834640"/>
+            <a:ext cx="1600200" cy="274320"/>
+          </a:xfrm>
+          <a:prstGeom prst="rect">
+            <a:avLst/>
+          </a:prstGeom>
+          <a:noFill/>
+        </p:spPr>
+        <p:txBody>
+          <a:bodyPr wrap="none" lIns="0" rIns="0">
+            <a:spAutoFit/>
+          </a:bodyPr>
+          <a:lstStyle/>
+          <a:p>
+            <a:pPr algn="ctr"/>
+            <a:r>
+              <a:rPr sz="1050" b="0" i="0">
+                <a:solidFill>
+                  <a:srgbClr val="626E79"/>
+                </a:solidFill>
+                <a:latin typeface="Segoe UI"/>
+              </a:rPr>
+              <a:t>deploy</a:t>
+            </a:r>
+          </a:p>
+        </p:txBody>
+      </p:sp>
+      <p:sp>
+        <p:nvSpPr>
+          <p:cNvPr id="22" name="Rounded Rectangle 21"/>
+          <p:cNvSpPr/>
+          <p:nvPr/>
+        </p:nvSpPr>
+        <p:spPr>
+          <a:xfrm>
+            <a:off x="640080" y="3337560"/>
+            <a:ext cx="5074920" cy="1234440"/>
           </a:xfrm>
           <a:prstGeom prst="roundRect">
             <a:avLst>
@@ -4582,20 +5336,20 @@
       </p:sp>
       <p:sp>
         <p:nvSpPr>
-          <p:cNvPr id="6" name="Rectangle 5"/>
+          <p:cNvPr id="23" name="Rectangle 22"/>
           <p:cNvSpPr/>
           <p:nvPr/>
         </p:nvSpPr>
         <p:spPr>
           <a:xfrm>
-            <a:off x="786384" y="1737360"/>
+            <a:off x="786384" y="3337560"/>
             <a:ext cx="4782312" cy="40640"/>
           </a:xfrm>
           <a:prstGeom prst="rect">
             <a:avLst/>
           </a:prstGeom>
           <a:solidFill>
-            <a:srgbClr val="9E3533"/>
+            <a:srgbClr val="4A5A6A"/>
           </a:solidFill>
           <a:ln>
             <a:noFill/>
@@ -4626,14 +5380,67 @@
       </p:sp>
       <p:sp>
         <p:nvSpPr>
-          <p:cNvPr id="7" name="TextBox 6"/>
+          <p:cNvPr id="24" name="Oval 23"/>
+          <p:cNvSpPr/>
+          <p:nvPr/>
+        </p:nvSpPr>
+        <p:spPr>
+          <a:xfrm>
+            <a:off x="868680" y="3520440"/>
+            <a:ext cx="292608" cy="292608"/>
+          </a:xfrm>
+          <a:prstGeom prst="ellipse">
+            <a:avLst/>
+          </a:prstGeom>
+          <a:solidFill>
+            <a:srgbClr val="4A5A6A"/>
+          </a:solidFill>
+          <a:ln>
+            <a:noFill/>
+          </a:ln>
+          <a:effectLst/>
+        </p:spPr>
+        <p:style>
+          <a:lnRef idx="1">
+            <a:schemeClr val="accent1"/>
+          </a:lnRef>
+          <a:fillRef idx="3">
+            <a:schemeClr val="accent1"/>
+          </a:fillRef>
+          <a:effectRef idx="2">
+            <a:schemeClr val="accent1"/>
+          </a:effectRef>
+          <a:fontRef idx="minor">
+            <a:schemeClr val="lt1"/>
+          </a:fontRef>
+        </p:style>
+        <p:txBody>
+          <a:bodyPr rtlCol="0" anchor="ctr" wrap="none" lIns="0" rIns="0"/>
+          <a:lstStyle/>
+          <a:p>
+            <a:pPr algn="ctr"/>
+            <a:r>
+              <a:rPr sz="1250" b="1" i="0">
+                <a:solidFill>
+                  <a:srgbClr val="FFFFFF"/>
+                </a:solidFill>
+                <a:latin typeface="Segoe UI"/>
+              </a:rPr>
+              <a:t>1</a:t>
+            </a:r>
+          </a:p>
+        </p:txBody>
+      </p:sp>
+      <p:sp>
+        <p:nvSpPr>
+          <p:cNvPr id="25" name="TextBox 24"/>
           <p:cNvSpPr txBox="1"/>
           <p:nvPr/>
         </p:nvSpPr>
         <p:spPr>
           <a:xfrm>
-            <a:off x="914400" y="1920240"/>
-            <a:ext cx="4572000" cy="365760"/>
+            <a:off x="1280160" y="3474720"/>
+            <a:ext cx="4160520" cy="320040"/>
           </a:xfrm>
           <a:prstGeom prst="rect">
             <a:avLst/>
@@ -4647,27 +5454,27 @@
           <a:lstStyle/>
           <a:p>
             <a:r>
-              <a:rPr sz="1600" b="1" i="0">
-                <a:solidFill>
-                  <a:srgbClr val="9E3533"/>
-                </a:solidFill>
-                <a:latin typeface="Segoe UI"/>
-              </a:rPr>
-              <a:t>Tradeoffs &amp; exclusions</a:t>
-            </a:r>
-          </a:p>
-        </p:txBody>
-      </p:sp>
-      <p:sp>
-        <p:nvSpPr>
-          <p:cNvPr id="8" name="TextBox 7"/>
+              <a:rPr sz="1450" b="1" i="0">
+                <a:solidFill>
+                  <a:srgbClr val="14253A"/>
+                </a:solidFill>
+                <a:latin typeface="Segoe UI"/>
+              </a:rPr>
+              <a:t>Repository separation</a:t>
+            </a:r>
+          </a:p>
+        </p:txBody>
+      </p:sp>
+      <p:sp>
+        <p:nvSpPr>
+          <p:cNvPr id="26" name="TextBox 25"/>
           <p:cNvSpPr txBox="1"/>
           <p:nvPr/>
         </p:nvSpPr>
         <p:spPr>
           <a:xfrm>
-            <a:off x="914400" y="2395728"/>
-            <a:ext cx="4526280" cy="3474720"/>
+            <a:off x="868680" y="3867911"/>
+            <a:ext cx="4617720" cy="640080"/>
           </a:xfrm>
           <a:prstGeom prst="rect">
             <a:avLst/>
@@ -4682,163 +5489,31 @@
           <a:p>
             <a:pPr>
               <a:lnSpc>
-                <a:spcPct val="110000"/>
+                <a:spcPct val="105000"/>
               </a:lnSpc>
-              <a:spcAft>
-                <a:spcPts val="1300"/>
-              </a:spcAft>
             </a:pPr>
             <a:r>
-              <a:rPr sz="1280" b="1" i="0">
-                <a:solidFill>
-                  <a:srgbClr val="9E3533"/>
-                </a:solidFill>
-                <a:latin typeface="Segoe UI"/>
-              </a:rPr>
-              <a:t>▸  </a:t>
-            </a:r>
-            <a:r>
-              <a:rPr sz="1280" b="1" i="0">
-                <a:solidFill>
-                  <a:srgbClr val="14253A"/>
-                </a:solidFill>
-                <a:latin typeface="Segoe UI"/>
-              </a:rPr>
-              <a:t>No exactly-once claim anywhere</a:t>
-            </a:r>
-            <a:r>
-              <a:rPr sz="1280" b="0" i="0">
+              <a:rPr sz="1250" b="0" i="0">
                 <a:solidFill>
                   <a:srgbClr val="1E242B"/>
                 </a:solidFill>
                 <a:latin typeface="Segoe UI"/>
               </a:rPr>
-              <a:t> — SQS is at-least-once by design</a:t>
-            </a:r>
-          </a:p>
-          <a:p>
-            <a:pPr>
-              <a:lnSpc>
-                <a:spcPct val="110000"/>
-              </a:lnSpc>
-              <a:spcAft>
-                <a:spcPts val="1300"/>
-              </a:spcAft>
-            </a:pPr>
-            <a:r>
-              <a:rPr sz="1280" b="1" i="0">
-                <a:solidFill>
-                  <a:srgbClr val="9E3533"/>
-                </a:solidFill>
-                <a:latin typeface="Segoe UI"/>
-              </a:rPr>
-              <a:t>▸  </a:t>
-            </a:r>
-            <a:r>
-              <a:rPr sz="1280" b="1" i="0">
-                <a:solidFill>
-                  <a:srgbClr val="14253A"/>
-                </a:solidFill>
-                <a:latin typeface="Segoe UI"/>
-              </a:rPr>
-              <a:t>A crash between an OpenAI response and the DB commit can still cause one extra paid call</a:t>
-            </a:r>
-            <a:r>
-              <a:rPr sz="1280" b="0" i="0">
-                <a:solidFill>
-                  <a:srgbClr val="1E242B"/>
-                </a:solidFill>
-                <a:latin typeface="Segoe UI"/>
-              </a:rPr>
-              <a:t> — bounded and rare, not eliminated</a:t>
-            </a:r>
-          </a:p>
-          <a:p>
-            <a:pPr>
-              <a:lnSpc>
-                <a:spcPct val="110000"/>
-              </a:lnSpc>
-              <a:spcAft>
-                <a:spcPts val="1300"/>
-              </a:spcAft>
-            </a:pPr>
-            <a:r>
-              <a:rPr sz="1280" b="1" i="0">
-                <a:solidFill>
-                  <a:srgbClr val="9E3533"/>
-                </a:solidFill>
-                <a:latin typeface="Segoe UI"/>
-              </a:rPr>
-              <a:t>▸  </a:t>
-            </a:r>
-            <a:r>
-              <a:rPr sz="1280" b="1" i="0">
-                <a:solidFill>
-                  <a:srgbClr val="14253A"/>
-                </a:solidFill>
-                <a:latin typeface="Segoe UI"/>
-              </a:rPr>
-              <a:t>LocalStack doesn't enforce the IAM policies Terraform defines</a:t>
-            </a:r>
-            <a:r>
-              <a:rPr sz="1280" b="0" i="0">
-                <a:solidFill>
-                  <a:srgbClr val="1E242B"/>
-                </a:solidFill>
-                <a:latin typeface="Segoe UI"/>
-              </a:rPr>
-              <a:t> — they show the intended shape for real AWS</a:t>
-            </a:r>
-          </a:p>
-          <a:p>
-            <a:pPr>
-              <a:lnSpc>
-                <a:spcPct val="110000"/>
-              </a:lnSpc>
-              <a:spcAft>
-                <a:spcPts val="1300"/>
-              </a:spcAft>
-            </a:pPr>
-            <a:r>
-              <a:rPr sz="1280" b="1" i="0">
-                <a:solidFill>
-                  <a:srgbClr val="9E3533"/>
-                </a:solidFill>
-                <a:latin typeface="Segoe UI"/>
-              </a:rPr>
-              <a:t>▸  </a:t>
-            </a:r>
-            <a:r>
-              <a:rPr sz="1280" b="1" i="0">
-                <a:solidFill>
-                  <a:srgbClr val="14253A"/>
-                </a:solidFill>
-                <a:latin typeface="Segoe UI"/>
-              </a:rPr>
-              <a:t>Scoped down on purpose</a:t>
-            </a:r>
-            <a:r>
-              <a:rPr sz="1280" b="0" i="0">
-                <a:solidFill>
-                  <a:srgbClr val="1E242B"/>
-                </a:solidFill>
-                <a:latin typeface="Segoe UI"/>
-              </a:rPr>
-              <a:t> — no CI, no service mesh, no ORM, no new database</a:t>
-            </a:r>
-          </a:p>
-        </p:txBody>
-      </p:sp>
-      <p:sp>
-        <p:nvSpPr>
-          <p:cNvPr id="9" name="Rounded Rectangle 8"/>
+              <a:t>App code and the Dockerfile stay here; Helm config moves to a separate GitOps repo — Terraform can split out too.</a:t>
+            </a:r>
+          </a:p>
+        </p:txBody>
+      </p:sp>
+      <p:sp>
+        <p:nvSpPr>
+          <p:cNvPr id="27" name="Rounded Rectangle 26"/>
           <p:cNvSpPr/>
           <p:nvPr/>
         </p:nvSpPr>
         <p:spPr>
           <a:xfrm>
-            <a:off x="6172200" y="1737360"/>
-            <a:ext cx="5074920" cy="4206240"/>
+            <a:off x="6172200" y="3337560"/>
+            <a:ext cx="5074920" cy="1234440"/>
           </a:xfrm>
           <a:prstGeom prst="roundRect">
             <a:avLst>
@@ -4879,13 +5554,13 @@
       </p:sp>
       <p:sp>
         <p:nvSpPr>
-          <p:cNvPr id="10" name="Rectangle 9"/>
+          <p:cNvPr id="28" name="Rectangle 27"/>
           <p:cNvSpPr/>
           <p:nvPr/>
         </p:nvSpPr>
         <p:spPr>
           <a:xfrm>
-            <a:off x="6318504" y="1737360"/>
+            <a:off x="6318504" y="3337560"/>
             <a:ext cx="4782312" cy="40640"/>
           </a:xfrm>
           <a:prstGeom prst="rect">
@@ -4923,14 +5598,67 @@
       </p:sp>
       <p:sp>
         <p:nvSpPr>
-          <p:cNvPr id="11" name="TextBox 10"/>
+          <p:cNvPr id="29" name="Oval 28"/>
+          <p:cNvSpPr/>
+          <p:nvPr/>
+        </p:nvSpPr>
+        <p:spPr>
+          <a:xfrm>
+            <a:off x="6400800" y="3520440"/>
+            <a:ext cx="292608" cy="292608"/>
+          </a:xfrm>
+          <a:prstGeom prst="ellipse">
+            <a:avLst/>
+          </a:prstGeom>
+          <a:solidFill>
+            <a:srgbClr val="168A86"/>
+          </a:solidFill>
+          <a:ln>
+            <a:noFill/>
+          </a:ln>
+          <a:effectLst/>
+        </p:spPr>
+        <p:style>
+          <a:lnRef idx="1">
+            <a:schemeClr val="accent1"/>
+          </a:lnRef>
+          <a:fillRef idx="3">
+            <a:schemeClr val="accent1"/>
+          </a:fillRef>
+          <a:effectRef idx="2">
+            <a:schemeClr val="accent1"/>
+          </a:effectRef>
+          <a:fontRef idx="minor">
+            <a:schemeClr val="lt1"/>
+          </a:fontRef>
+        </p:style>
+        <p:txBody>
+          <a:bodyPr rtlCol="0" anchor="ctr" wrap="none" lIns="0" rIns="0"/>
+          <a:lstStyle/>
+          <a:p>
+            <a:pPr algn="ctr"/>
+            <a:r>
+              <a:rPr sz="1250" b="1" i="0">
+                <a:solidFill>
+                  <a:srgbClr val="FFFFFF"/>
+                </a:solidFill>
+                <a:latin typeface="Segoe UI"/>
+              </a:rPr>
+              <a:t>2</a:t>
+            </a:r>
+          </a:p>
+        </p:txBody>
+      </p:sp>
+      <p:sp>
+        <p:nvSpPr>
+          <p:cNvPr id="30" name="TextBox 29"/>
           <p:cNvSpPr txBox="1"/>
           <p:nvPr/>
         </p:nvSpPr>
         <p:spPr>
           <a:xfrm>
-            <a:off x="6446520" y="1920240"/>
-            <a:ext cx="4572000" cy="365760"/>
+            <a:off x="6812280" y="3474720"/>
+            <a:ext cx="4160520" cy="320040"/>
           </a:xfrm>
           <a:prstGeom prst="rect">
             <a:avLst/>
@@ -4944,27 +5672,27 @@
           <a:lstStyle/>
           <a:p>
             <a:r>
-              <a:rPr sz="1600" b="1" i="0">
-                <a:solidFill>
-                  <a:srgbClr val="0F6664"/>
-                </a:solidFill>
-                <a:latin typeface="Segoe UI"/>
-              </a:rPr>
-              <a:t>What changes in production</a:t>
-            </a:r>
-          </a:p>
-        </p:txBody>
-      </p:sp>
-      <p:sp>
-        <p:nvSpPr>
-          <p:cNvPr id="12" name="TextBox 11"/>
+              <a:rPr sz="1450" b="1" i="0">
+                <a:solidFill>
+                  <a:srgbClr val="14253A"/>
+                </a:solidFill>
+                <a:latin typeface="Segoe UI"/>
+              </a:rPr>
+              <a:t>CI pipeline</a:t>
+            </a:r>
+          </a:p>
+        </p:txBody>
+      </p:sp>
+      <p:sp>
+        <p:nvSpPr>
+          <p:cNvPr id="31" name="TextBox 30"/>
           <p:cNvSpPr txBox="1"/>
           <p:nvPr/>
         </p:nvSpPr>
         <p:spPr>
           <a:xfrm>
-            <a:off x="6446520" y="2395728"/>
-            <a:ext cx="4526280" cy="3474720"/>
+            <a:off x="6400800" y="3867911"/>
+            <a:ext cx="4617720" cy="640080"/>
           </a:xfrm>
           <a:prstGeom prst="rect">
             <a:avLst/>
@@ -4979,129 +5707,460 @@
           <a:p>
             <a:pPr>
               <a:lnSpc>
-                <a:spcPct val="110000"/>
+                <a:spcPct val="105000"/>
               </a:lnSpc>
-              <a:spcAft>
-                <a:spcPts val="1300"/>
-              </a:spcAft>
             </a:pPr>
             <a:r>
-              <a:rPr sz="1280" b="1" i="0">
-                <a:solidFill>
-                  <a:srgbClr val="168A86"/>
-                </a:solidFill>
-                <a:latin typeface="Segoe UI"/>
-              </a:rPr>
-              <a:t>▸  </a:t>
-            </a:r>
-            <a:r>
-              <a:rPr sz="1280" b="0" i="0">
+              <a:rPr sz="1250" b="0" i="0">
                 <a:solidFill>
                   <a:srgbClr val="1E242B"/>
                 </a:solidFill>
                 <a:latin typeface="Segoe UI"/>
               </a:rPr>
-              <a:t>RDS for PostgreSQL and managed SQS/S3, instead of a self-hosted Postgres pod and LocalStack</a:t>
-            </a:r>
-          </a:p>
+              <a:t>Every change: tests, security scan, build, tag with the commit SHA, push to the registry, then update the GitOps repo's tag.</a:t>
+            </a:r>
+          </a:p>
+        </p:txBody>
+      </p:sp>
+      <p:sp>
+        <p:nvSpPr>
+          <p:cNvPr id="32" name="Rounded Rectangle 31"/>
+          <p:cNvSpPr/>
+          <p:nvPr/>
+        </p:nvSpPr>
+        <p:spPr>
+          <a:xfrm>
+            <a:off x="640080" y="4754880"/>
+            <a:ext cx="5074920" cy="1234440"/>
+          </a:xfrm>
+          <a:prstGeom prst="roundRect">
+            <a:avLst>
+              <a:gd name="adj" fmla="val 3500"/>
+            </a:avLst>
+          </a:prstGeom>
+          <a:solidFill>
+            <a:srgbClr val="FFFFFF"/>
+          </a:solidFill>
+          <a:ln w="9525">
+            <a:solidFill>
+              <a:srgbClr val="E1E5EA"/>
+            </a:solidFill>
+          </a:ln>
+          <a:effectLst/>
+        </p:spPr>
+        <p:style>
+          <a:lnRef idx="1">
+            <a:schemeClr val="accent1"/>
+          </a:lnRef>
+          <a:fillRef idx="3">
+            <a:schemeClr val="accent1"/>
+          </a:fillRef>
+          <a:effectRef idx="2">
+            <a:schemeClr val="accent1"/>
+          </a:effectRef>
+          <a:fontRef idx="minor">
+            <a:schemeClr val="lt1"/>
+          </a:fontRef>
+        </p:style>
+        <p:txBody>
+          <a:bodyPr rtlCol="0" anchor="ctr"/>
+          <a:lstStyle/>
+          <a:p>
+            <a:pPr algn="ctr"/>
+          </a:p>
+        </p:txBody>
+      </p:sp>
+      <p:sp>
+        <p:nvSpPr>
+          <p:cNvPr id="33" name="Rectangle 32"/>
+          <p:cNvSpPr/>
+          <p:nvPr/>
+        </p:nvSpPr>
+        <p:spPr>
+          <a:xfrm>
+            <a:off x="786384" y="4754880"/>
+            <a:ext cx="4782312" cy="40640"/>
+          </a:xfrm>
+          <a:prstGeom prst="rect">
+            <a:avLst/>
+          </a:prstGeom>
+          <a:solidFill>
+            <a:srgbClr val="0F6664"/>
+          </a:solidFill>
+          <a:ln>
+            <a:noFill/>
+          </a:ln>
+          <a:effectLst/>
+        </p:spPr>
+        <p:style>
+          <a:lnRef idx="1">
+            <a:schemeClr val="accent1"/>
+          </a:lnRef>
+          <a:fillRef idx="3">
+            <a:schemeClr val="accent1"/>
+          </a:fillRef>
+          <a:effectRef idx="2">
+            <a:schemeClr val="accent1"/>
+          </a:effectRef>
+          <a:fontRef idx="minor">
+            <a:schemeClr val="lt1"/>
+          </a:fontRef>
+        </p:style>
+        <p:txBody>
+          <a:bodyPr rtlCol="0" anchor="ctr"/>
+          <a:lstStyle/>
+          <a:p>
+            <a:pPr algn="ctr"/>
+          </a:p>
+        </p:txBody>
+      </p:sp>
+      <p:sp>
+        <p:nvSpPr>
+          <p:cNvPr id="34" name="Oval 33"/>
+          <p:cNvSpPr/>
+          <p:nvPr/>
+        </p:nvSpPr>
+        <p:spPr>
+          <a:xfrm>
+            <a:off x="868680" y="4937760"/>
+            <a:ext cx="292608" cy="292608"/>
+          </a:xfrm>
+          <a:prstGeom prst="ellipse">
+            <a:avLst/>
+          </a:prstGeom>
+          <a:solidFill>
+            <a:srgbClr val="0F6664"/>
+          </a:solidFill>
+          <a:ln>
+            <a:noFill/>
+          </a:ln>
+          <a:effectLst/>
+        </p:spPr>
+        <p:style>
+          <a:lnRef idx="1">
+            <a:schemeClr val="accent1"/>
+          </a:lnRef>
+          <a:fillRef idx="3">
+            <a:schemeClr val="accent1"/>
+          </a:fillRef>
+          <a:effectRef idx="2">
+            <a:schemeClr val="accent1"/>
+          </a:effectRef>
+          <a:fontRef idx="minor">
+            <a:schemeClr val="lt1"/>
+          </a:fontRef>
+        </p:style>
+        <p:txBody>
+          <a:bodyPr rtlCol="0" anchor="ctr" wrap="none" lIns="0" rIns="0"/>
+          <a:lstStyle/>
+          <a:p>
+            <a:pPr algn="ctr"/>
+            <a:r>
+              <a:rPr sz="1250" b="1" i="0">
+                <a:solidFill>
+                  <a:srgbClr val="FFFFFF"/>
+                </a:solidFill>
+                <a:latin typeface="Segoe UI"/>
+              </a:rPr>
+              <a:t>3</a:t>
+            </a:r>
+          </a:p>
+        </p:txBody>
+      </p:sp>
+      <p:sp>
+        <p:nvSpPr>
+          <p:cNvPr id="35" name="TextBox 34"/>
+          <p:cNvSpPr txBox="1"/>
+          <p:nvPr/>
+        </p:nvSpPr>
+        <p:spPr>
+          <a:xfrm>
+            <a:off x="1280160" y="4892040"/>
+            <a:ext cx="4160520" cy="320040"/>
+          </a:xfrm>
+          <a:prstGeom prst="rect">
+            <a:avLst/>
+          </a:prstGeom>
+          <a:noFill/>
+        </p:spPr>
+        <p:txBody>
+          <a:bodyPr wrap="none">
+            <a:spAutoFit/>
+          </a:bodyPr>
+          <a:lstStyle/>
+          <a:p>
+            <a:r>
+              <a:rPr sz="1450" b="1" i="0">
+                <a:solidFill>
+                  <a:srgbClr val="14253A"/>
+                </a:solidFill>
+                <a:latin typeface="Segoe UI"/>
+              </a:rPr>
+              <a:t>Argo CD deployment</a:t>
+            </a:r>
+          </a:p>
+        </p:txBody>
+      </p:sp>
+      <p:sp>
+        <p:nvSpPr>
+          <p:cNvPr id="36" name="TextBox 35"/>
+          <p:cNvSpPr txBox="1"/>
+          <p:nvPr/>
+        </p:nvSpPr>
+        <p:spPr>
+          <a:xfrm>
+            <a:off x="868680" y="5285232"/>
+            <a:ext cx="4617720" cy="640080"/>
+          </a:xfrm>
+          <a:prstGeom prst="rect">
+            <a:avLst/>
+          </a:prstGeom>
+          <a:noFill/>
+        </p:spPr>
+        <p:txBody>
+          <a:bodyPr wrap="square">
+            <a:spAutoFit/>
+          </a:bodyPr>
+          <a:lstStyle/>
           <a:p>
             <a:pPr>
               <a:lnSpc>
-                <a:spcPct val="110000"/>
+                <a:spcPct val="105000"/>
               </a:lnSpc>
-              <a:spcAft>
-                <a:spcPts val="1300"/>
-              </a:spcAft>
             </a:pPr>
             <a:r>
-              <a:rPr sz="1280" b="1" i="0">
-                <a:solidFill>
-                  <a:srgbClr val="168A86"/>
-                </a:solidFill>
-                <a:latin typeface="Segoe UI"/>
-              </a:rPr>
-              <a:t>▸  </a:t>
-            </a:r>
-            <a:r>
-              <a:rPr sz="1280" b="0" i="0">
+              <a:rPr sz="1250" b="0" i="0">
                 <a:solidFill>
                   <a:srgbClr val="1E242B"/>
                 </a:solidFill>
                 <a:latin typeface="Segoe UI"/>
               </a:rPr>
-              <a:t>Workload identity (e.g. IRSA) and an external secret manager, instead of static credentials and manual Kubernetes Secrets</a:t>
-            </a:r>
-          </a:p>
+              <a:t>Argo CD syncs the GitOps repo into the cluster — changes reviewed via Git, rollback by reverting to a known-good commit.</a:t>
+            </a:r>
+          </a:p>
+        </p:txBody>
+      </p:sp>
+      <p:sp>
+        <p:nvSpPr>
+          <p:cNvPr id="37" name="Rounded Rectangle 36"/>
+          <p:cNvSpPr/>
+          <p:nvPr/>
+        </p:nvSpPr>
+        <p:spPr>
+          <a:xfrm>
+            <a:off x="6172200" y="4754880"/>
+            <a:ext cx="5074920" cy="1234440"/>
+          </a:xfrm>
+          <a:prstGeom prst="roundRect">
+            <a:avLst>
+              <a:gd name="adj" fmla="val 3500"/>
+            </a:avLst>
+          </a:prstGeom>
+          <a:solidFill>
+            <a:srgbClr val="FFFFFF"/>
+          </a:solidFill>
+          <a:ln w="9525">
+            <a:solidFill>
+              <a:srgbClr val="E1E5EA"/>
+            </a:solidFill>
+          </a:ln>
+          <a:effectLst/>
+        </p:spPr>
+        <p:style>
+          <a:lnRef idx="1">
+            <a:schemeClr val="accent1"/>
+          </a:lnRef>
+          <a:fillRef idx="3">
+            <a:schemeClr val="accent1"/>
+          </a:fillRef>
+          <a:effectRef idx="2">
+            <a:schemeClr val="accent1"/>
+          </a:effectRef>
+          <a:fontRef idx="minor">
+            <a:schemeClr val="lt1"/>
+          </a:fontRef>
+        </p:style>
+        <p:txBody>
+          <a:bodyPr rtlCol="0" anchor="ctr"/>
+          <a:lstStyle/>
+          <a:p>
+            <a:pPr algn="ctr"/>
+          </a:p>
+        </p:txBody>
+      </p:sp>
+      <p:sp>
+        <p:nvSpPr>
+          <p:cNvPr id="38" name="Rectangle 37"/>
+          <p:cNvSpPr/>
+          <p:nvPr/>
+        </p:nvSpPr>
+        <p:spPr>
+          <a:xfrm>
+            <a:off x="6318504" y="4754880"/>
+            <a:ext cx="4782312" cy="40640"/>
+          </a:xfrm>
+          <a:prstGeom prst="rect">
+            <a:avLst/>
+          </a:prstGeom>
+          <a:solidFill>
+            <a:srgbClr val="14253A"/>
+          </a:solidFill>
+          <a:ln>
+            <a:noFill/>
+          </a:ln>
+          <a:effectLst/>
+        </p:spPr>
+        <p:style>
+          <a:lnRef idx="1">
+            <a:schemeClr val="accent1"/>
+          </a:lnRef>
+          <a:fillRef idx="3">
+            <a:schemeClr val="accent1"/>
+          </a:fillRef>
+          <a:effectRef idx="2">
+            <a:schemeClr val="accent1"/>
+          </a:effectRef>
+          <a:fontRef idx="minor">
+            <a:schemeClr val="lt1"/>
+          </a:fontRef>
+        </p:style>
+        <p:txBody>
+          <a:bodyPr rtlCol="0" anchor="ctr"/>
+          <a:lstStyle/>
+          <a:p>
+            <a:pPr algn="ctr"/>
+          </a:p>
+        </p:txBody>
+      </p:sp>
+      <p:sp>
+        <p:nvSpPr>
+          <p:cNvPr id="39" name="Oval 38"/>
+          <p:cNvSpPr/>
+          <p:nvPr/>
+        </p:nvSpPr>
+        <p:spPr>
+          <a:xfrm>
+            <a:off x="6400800" y="4937760"/>
+            <a:ext cx="292608" cy="292608"/>
+          </a:xfrm>
+          <a:prstGeom prst="ellipse">
+            <a:avLst/>
+          </a:prstGeom>
+          <a:solidFill>
+            <a:srgbClr val="14253A"/>
+          </a:solidFill>
+          <a:ln>
+            <a:noFill/>
+          </a:ln>
+          <a:effectLst/>
+        </p:spPr>
+        <p:style>
+          <a:lnRef idx="1">
+            <a:schemeClr val="accent1"/>
+          </a:lnRef>
+          <a:fillRef idx="3">
+            <a:schemeClr val="accent1"/>
+          </a:fillRef>
+          <a:effectRef idx="2">
+            <a:schemeClr val="accent1"/>
+          </a:effectRef>
+          <a:fontRef idx="minor">
+            <a:schemeClr val="lt1"/>
+          </a:fontRef>
+        </p:style>
+        <p:txBody>
+          <a:bodyPr rtlCol="0" anchor="ctr" wrap="none" lIns="0" rIns="0"/>
+          <a:lstStyle/>
+          <a:p>
+            <a:pPr algn="ctr"/>
+            <a:r>
+              <a:rPr sz="1250" b="1" i="0">
+                <a:solidFill>
+                  <a:srgbClr val="FFFFFF"/>
+                </a:solidFill>
+                <a:latin typeface="Segoe UI"/>
+              </a:rPr>
+              <a:t>4</a:t>
+            </a:r>
+          </a:p>
+        </p:txBody>
+      </p:sp>
+      <p:sp>
+        <p:nvSpPr>
+          <p:cNvPr id="40" name="TextBox 39"/>
+          <p:cNvSpPr txBox="1"/>
+          <p:nvPr/>
+        </p:nvSpPr>
+        <p:spPr>
+          <a:xfrm>
+            <a:off x="6812280" y="4892040"/>
+            <a:ext cx="4160520" cy="320040"/>
+          </a:xfrm>
+          <a:prstGeom prst="rect">
+            <a:avLst/>
+          </a:prstGeom>
+          <a:noFill/>
+        </p:spPr>
+        <p:txBody>
+          <a:bodyPr wrap="none">
+            <a:spAutoFit/>
+          </a:bodyPr>
+          <a:lstStyle/>
+          <a:p>
+            <a:r>
+              <a:rPr sz="1450" b="1" i="0">
+                <a:solidFill>
+                  <a:srgbClr val="14253A"/>
+                </a:solidFill>
+                <a:latin typeface="Segoe UI"/>
+              </a:rPr>
+              <a:t>Production reliability</a:t>
+            </a:r>
+          </a:p>
+        </p:txBody>
+      </p:sp>
+      <p:sp>
+        <p:nvSpPr>
+          <p:cNvPr id="41" name="TextBox 40"/>
+          <p:cNvSpPr txBox="1"/>
+          <p:nvPr/>
+        </p:nvSpPr>
+        <p:spPr>
+          <a:xfrm>
+            <a:off x="6400800" y="5285232"/>
+            <a:ext cx="4617720" cy="640080"/>
+          </a:xfrm>
+          <a:prstGeom prst="rect">
+            <a:avLst/>
+          </a:prstGeom>
+          <a:noFill/>
+        </p:spPr>
+        <p:txBody>
+          <a:bodyPr wrap="square">
+            <a:spAutoFit/>
+          </a:bodyPr>
+          <a:lstStyle/>
           <a:p>
             <a:pPr>
               <a:lnSpc>
-                <a:spcPct val="110000"/>
+                <a:spcPct val="105000"/>
               </a:lnSpc>
-              <a:spcAft>
-                <a:spcPts val="1300"/>
-              </a:spcAft>
             </a:pPr>
             <a:r>
-              <a:rPr sz="1280" b="1" i="0">
-                <a:solidFill>
-                  <a:srgbClr val="168A86"/>
-                </a:solidFill>
-                <a:latin typeface="Segoe UI"/>
-              </a:rPr>
-              <a:t>▸  </a:t>
-            </a:r>
-            <a:r>
-              <a:rPr sz="1280" b="0" i="0">
+              <a:rPr sz="1250" b="0" i="0">
                 <a:solidFill>
                   <a:srgbClr val="1E242B"/>
                 </a:solidFill>
                 <a:latin typeface="Segoe UI"/>
               </a:rPr>
-              <a:t>High availability, autoscaling on queue depth, persistent metrics storage, real alert routing</a:t>
-            </a:r>
-          </a:p>
-          <a:p>
-            <a:pPr>
-              <a:lnSpc>
-                <a:spcPct val="110000"/>
-              </a:lnSpc>
-              <a:spcAft>
-                <a:spcPts val="1300"/>
-              </a:spcAft>
-            </a:pPr>
-            <a:r>
-              <a:rPr sz="1280" b="1" i="0">
-                <a:solidFill>
-                  <a:srgbClr val="168A86"/>
-                </a:solidFill>
-                <a:latin typeface="Segoe UI"/>
-              </a:rPr>
-              <a:t>▸  </a:t>
-            </a:r>
-            <a:r>
-              <a:rPr sz="1280" b="1" i="0">
-                <a:solidFill>
-                  <a:srgbClr val="14253A"/>
-                </a:solidFill>
-                <a:latin typeface="Segoe UI"/>
-              </a:rPr>
-              <a:t>Narrowing</a:t>
-            </a:r>
-            <a:r>
-              <a:rPr sz="1280" b="0" i="0">
-                <a:solidFill>
-                  <a:srgbClr val="1E242B"/>
-                </a:solidFill>
-                <a:latin typeface="Segoe UI"/>
-              </a:rPr>
-              <a:t> — not fully closing — the OpenAI-response-to-commit duplicate window, e.g. with an idempotency key on the LLM call</a:t>
-            </a:r>
-          </a:p>
-        </p:txBody>
-      </p:sp>
-      <p:sp>
-        <p:nvSpPr>
-          <p:cNvPr id="13" name="Rectangle 12"/>
+              <a:t>Managed RDS/SQS/S3/DLQ, a cloud secret manager and workload identity, multiple replicas, queue-depth autoscaling, monitoring and backups.</a:t>
+            </a:r>
+          </a:p>
+        </p:txBody>
+      </p:sp>
+      <p:sp>
+        <p:nvSpPr>
+          <p:cNvPr id="42" name="Rectangle 41"/>
           <p:cNvSpPr/>
           <p:nvPr/>
         </p:nvSpPr>
@@ -5145,7 +6204,7 @@
       </p:sp>
       <p:sp>
         <p:nvSpPr>
-          <p:cNvPr id="14" name="TextBox 13"/>
+          <p:cNvPr id="43" name="TextBox 42"/>
           <p:cNvSpPr txBox="1"/>
           <p:nvPr/>
         </p:nvSpPr>
@@ -5172,14 +6231,14 @@
                 </a:solidFill>
                 <a:latin typeface="Segoe UI"/>
               </a:rPr>
-              <a:t>ConvoScore  ·  Tradeoffs and roadmap</a:t>
-            </a:r>
-          </a:p>
-        </p:txBody>
-      </p:sp>
-      <p:sp>
-        <p:nvSpPr>
-          <p:cNvPr id="15" name="TextBox 14"/>
+              <a:t>ConvoScore  ·  Production roadmap</a:t>
+            </a:r>
+          </a:p>
+        </p:txBody>
+      </p:sp>
+      <p:sp>
+        <p:nvSpPr>
+          <p:cNvPr id="44" name="TextBox 43"/>
           <p:cNvSpPr txBox="1"/>
           <p:nvPr/>
         </p:nvSpPr>
